--- a/Rapport + Presentation + Video/Presentation2.pptx
+++ b/Rapport + Presentation + Video/Presentation2.pptx
@@ -4,6 +4,9 @@
   <p:sldMasterIdLst>
     <p:sldMasterId id="2147483648" r:id="rId1"/>
   </p:sldMasterIdLst>
+  <p:notesMasterIdLst>
+    <p:notesMasterId r:id="rId25"/>
+  </p:notesMasterIdLst>
   <p:sldIdLst>
     <p:sldId id="256" r:id="rId2"/>
     <p:sldId id="258" r:id="rId3"/>
@@ -140,6 +143,2456 @@
 </p188:authorLst>
 </file>
 
+<file path=ppt/notesMasters/notesMaster1.xml><?xml version="1.0" encoding="utf-8"?>
+<p:notesMaster xmlns:a="http://schemas.openxmlformats.org/drawingml/2006/main" xmlns:r="http://schemas.openxmlformats.org/officeDocument/2006/relationships" xmlns:p="http://schemas.openxmlformats.org/presentationml/2006/main">
+  <p:cSld>
+    <p:bg>
+      <p:bgRef idx="1001">
+        <a:schemeClr val="bg1"/>
+      </p:bgRef>
+    </p:bg>
+    <p:spTree>
+      <p:nvGrpSpPr>
+        <p:cNvPr id="1" name=""/>
+        <p:cNvGrpSpPr/>
+        <p:nvPr/>
+      </p:nvGrpSpPr>
+      <p:grpSpPr>
+        <a:xfrm>
+          <a:off x="0" y="0"/>
+          <a:ext cx="0" cy="0"/>
+          <a:chOff x="0" y="0"/>
+          <a:chExt cx="0" cy="0"/>
+        </a:xfrm>
+      </p:grpSpPr>
+      <p:sp>
+        <p:nvSpPr>
+          <p:cNvPr id="2" name="Header Placeholder 1"/>
+          <p:cNvSpPr>
+            <a:spLocks noGrp="1"/>
+          </p:cNvSpPr>
+          <p:nvPr>
+            <p:ph type="hdr" sz="quarter"/>
+          </p:nvPr>
+        </p:nvSpPr>
+        <p:spPr>
+          <a:xfrm>
+            <a:off x="0" y="0"/>
+            <a:ext cx="2971800" cy="458788"/>
+          </a:xfrm>
+          <a:prstGeom prst="rect">
+            <a:avLst/>
+          </a:prstGeom>
+        </p:spPr>
+        <p:txBody>
+          <a:bodyPr vert="horz" lIns="91440" tIns="45720" rIns="91440" bIns="45720" rtlCol="0"/>
+          <a:lstStyle>
+            <a:lvl1pPr algn="l">
+              <a:defRPr sz="1200"/>
+            </a:lvl1pPr>
+          </a:lstStyle>
+          <a:p>
+            <a:endParaRPr lang="en-US"/>
+          </a:p>
+        </p:txBody>
+      </p:sp>
+      <p:sp>
+        <p:nvSpPr>
+          <p:cNvPr id="3" name="Date Placeholder 2"/>
+          <p:cNvSpPr>
+            <a:spLocks noGrp="1"/>
+          </p:cNvSpPr>
+          <p:nvPr>
+            <p:ph type="dt" idx="1"/>
+          </p:nvPr>
+        </p:nvSpPr>
+        <p:spPr>
+          <a:xfrm>
+            <a:off x="3884613" y="0"/>
+            <a:ext cx="2971800" cy="458788"/>
+          </a:xfrm>
+          <a:prstGeom prst="rect">
+            <a:avLst/>
+          </a:prstGeom>
+        </p:spPr>
+        <p:txBody>
+          <a:bodyPr vert="horz" lIns="91440" tIns="45720" rIns="91440" bIns="45720" rtlCol="0"/>
+          <a:lstStyle>
+            <a:lvl1pPr algn="r">
+              <a:defRPr sz="1200"/>
+            </a:lvl1pPr>
+          </a:lstStyle>
+          <a:p>
+            <a:fld id="{2DD31903-8489-4C46-9BB9-98EB0F1E730D}" type="datetimeFigureOut">
+              <a:rPr lang="en-US" smtClean="0"/>
+              <a:t>6/20/2025</a:t>
+            </a:fld>
+            <a:endParaRPr lang="en-US"/>
+          </a:p>
+        </p:txBody>
+      </p:sp>
+      <p:sp>
+        <p:nvSpPr>
+          <p:cNvPr id="4" name="Slide Image Placeholder 3"/>
+          <p:cNvSpPr>
+            <a:spLocks noGrp="1" noRot="1" noChangeAspect="1"/>
+          </p:cNvSpPr>
+          <p:nvPr>
+            <p:ph type="sldImg" idx="2"/>
+          </p:nvPr>
+        </p:nvSpPr>
+        <p:spPr>
+          <a:xfrm>
+            <a:off x="685800" y="1143000"/>
+            <a:ext cx="5486400" cy="3086100"/>
+          </a:xfrm>
+          <a:prstGeom prst="rect">
+            <a:avLst/>
+          </a:prstGeom>
+          <a:noFill/>
+          <a:ln w="12700">
+            <a:solidFill>
+              <a:prstClr val="black"/>
+            </a:solidFill>
+          </a:ln>
+        </p:spPr>
+        <p:txBody>
+          <a:bodyPr vert="horz" lIns="91440" tIns="45720" rIns="91440" bIns="45720" rtlCol="0" anchor="ctr"/>
+          <a:lstStyle/>
+          <a:p>
+            <a:endParaRPr lang="en-US"/>
+          </a:p>
+        </p:txBody>
+      </p:sp>
+      <p:sp>
+        <p:nvSpPr>
+          <p:cNvPr id="5" name="Notes Placeholder 4"/>
+          <p:cNvSpPr>
+            <a:spLocks noGrp="1"/>
+          </p:cNvSpPr>
+          <p:nvPr>
+            <p:ph type="body" sz="quarter" idx="3"/>
+          </p:nvPr>
+        </p:nvSpPr>
+        <p:spPr>
+          <a:xfrm>
+            <a:off x="685800" y="4400550"/>
+            <a:ext cx="5486400" cy="3600450"/>
+          </a:xfrm>
+          <a:prstGeom prst="rect">
+            <a:avLst/>
+          </a:prstGeom>
+        </p:spPr>
+        <p:txBody>
+          <a:bodyPr vert="horz" lIns="91440" tIns="45720" rIns="91440" bIns="45720" rtlCol="0"/>
+          <a:lstStyle/>
+          <a:p>
+            <a:pPr lvl="0"/>
+            <a:r>
+              <a:rPr lang="en-US"/>
+              <a:t>Click to edit Master text styles</a:t>
+            </a:r>
+          </a:p>
+          <a:p>
+            <a:pPr lvl="1"/>
+            <a:r>
+              <a:rPr lang="en-US"/>
+              <a:t>Second level</a:t>
+            </a:r>
+          </a:p>
+          <a:p>
+            <a:pPr lvl="2"/>
+            <a:r>
+              <a:rPr lang="en-US"/>
+              <a:t>Third level</a:t>
+            </a:r>
+          </a:p>
+          <a:p>
+            <a:pPr lvl="3"/>
+            <a:r>
+              <a:rPr lang="en-US"/>
+              <a:t>Fourth level</a:t>
+            </a:r>
+          </a:p>
+          <a:p>
+            <a:pPr lvl="4"/>
+            <a:r>
+              <a:rPr lang="en-US"/>
+              <a:t>Fifth level</a:t>
+            </a:r>
+          </a:p>
+        </p:txBody>
+      </p:sp>
+      <p:sp>
+        <p:nvSpPr>
+          <p:cNvPr id="6" name="Footer Placeholder 5"/>
+          <p:cNvSpPr>
+            <a:spLocks noGrp="1"/>
+          </p:cNvSpPr>
+          <p:nvPr>
+            <p:ph type="ftr" sz="quarter" idx="4"/>
+          </p:nvPr>
+        </p:nvSpPr>
+        <p:spPr>
+          <a:xfrm>
+            <a:off x="0" y="8685213"/>
+            <a:ext cx="2971800" cy="458787"/>
+          </a:xfrm>
+          <a:prstGeom prst="rect">
+            <a:avLst/>
+          </a:prstGeom>
+        </p:spPr>
+        <p:txBody>
+          <a:bodyPr vert="horz" lIns="91440" tIns="45720" rIns="91440" bIns="45720" rtlCol="0" anchor="b"/>
+          <a:lstStyle>
+            <a:lvl1pPr algn="l">
+              <a:defRPr sz="1200"/>
+            </a:lvl1pPr>
+          </a:lstStyle>
+          <a:p>
+            <a:endParaRPr lang="en-US"/>
+          </a:p>
+        </p:txBody>
+      </p:sp>
+      <p:sp>
+        <p:nvSpPr>
+          <p:cNvPr id="7" name="Slide Number Placeholder 6"/>
+          <p:cNvSpPr>
+            <a:spLocks noGrp="1"/>
+          </p:cNvSpPr>
+          <p:nvPr>
+            <p:ph type="sldNum" sz="quarter" idx="5"/>
+          </p:nvPr>
+        </p:nvSpPr>
+        <p:spPr>
+          <a:xfrm>
+            <a:off x="3884613" y="8685213"/>
+            <a:ext cx="2971800" cy="458787"/>
+          </a:xfrm>
+          <a:prstGeom prst="rect">
+            <a:avLst/>
+          </a:prstGeom>
+        </p:spPr>
+        <p:txBody>
+          <a:bodyPr vert="horz" lIns="91440" tIns="45720" rIns="91440" bIns="45720" rtlCol="0" anchor="b"/>
+          <a:lstStyle>
+            <a:lvl1pPr algn="r">
+              <a:defRPr sz="1200"/>
+            </a:lvl1pPr>
+          </a:lstStyle>
+          <a:p>
+            <a:fld id="{8BE14A05-6774-4917-8ABF-DDCE5A905991}" type="slidenum">
+              <a:rPr lang="en-US" smtClean="0"/>
+              <a:t>‹#›</a:t>
+            </a:fld>
+            <a:endParaRPr lang="en-US"/>
+          </a:p>
+        </p:txBody>
+      </p:sp>
+    </p:spTree>
+    <p:extLst>
+      <p:ext uri="{BB962C8B-B14F-4D97-AF65-F5344CB8AC3E}">
+        <p14:creationId xmlns:p14="http://schemas.microsoft.com/office/powerpoint/2010/main" val="1402229657"/>
+      </p:ext>
+    </p:extLst>
+  </p:cSld>
+  <p:clrMap bg1="lt1" tx1="dk1" bg2="lt2" tx2="dk2" accent1="accent1" accent2="accent2" accent3="accent3" accent4="accent4" accent5="accent5" accent6="accent6" hlink="hlink" folHlink="folHlink"/>
+  <p:notesStyle>
+    <a:lvl1pPr marL="0" algn="l" defTabSz="914400" rtl="0" eaLnBrk="1" latinLnBrk="0" hangingPunct="1">
+      <a:defRPr sz="1200" kern="1200">
+        <a:solidFill>
+          <a:schemeClr val="tx1"/>
+        </a:solidFill>
+        <a:latin typeface="+mn-lt"/>
+        <a:ea typeface="+mn-ea"/>
+        <a:cs typeface="+mn-cs"/>
+      </a:defRPr>
+    </a:lvl1pPr>
+    <a:lvl2pPr marL="457200" algn="l" defTabSz="914400" rtl="0" eaLnBrk="1" latinLnBrk="0" hangingPunct="1">
+      <a:defRPr sz="1200" kern="1200">
+        <a:solidFill>
+          <a:schemeClr val="tx1"/>
+        </a:solidFill>
+        <a:latin typeface="+mn-lt"/>
+        <a:ea typeface="+mn-ea"/>
+        <a:cs typeface="+mn-cs"/>
+      </a:defRPr>
+    </a:lvl2pPr>
+    <a:lvl3pPr marL="914400" algn="l" defTabSz="914400" rtl="0" eaLnBrk="1" latinLnBrk="0" hangingPunct="1">
+      <a:defRPr sz="1200" kern="1200">
+        <a:solidFill>
+          <a:schemeClr val="tx1"/>
+        </a:solidFill>
+        <a:latin typeface="+mn-lt"/>
+        <a:ea typeface="+mn-ea"/>
+        <a:cs typeface="+mn-cs"/>
+      </a:defRPr>
+    </a:lvl3pPr>
+    <a:lvl4pPr marL="1371600" algn="l" defTabSz="914400" rtl="0" eaLnBrk="1" latinLnBrk="0" hangingPunct="1">
+      <a:defRPr sz="1200" kern="1200">
+        <a:solidFill>
+          <a:schemeClr val="tx1"/>
+        </a:solidFill>
+        <a:latin typeface="+mn-lt"/>
+        <a:ea typeface="+mn-ea"/>
+        <a:cs typeface="+mn-cs"/>
+      </a:defRPr>
+    </a:lvl4pPr>
+    <a:lvl5pPr marL="1828800" algn="l" defTabSz="914400" rtl="0" eaLnBrk="1" latinLnBrk="0" hangingPunct="1">
+      <a:defRPr sz="1200" kern="1200">
+        <a:solidFill>
+          <a:schemeClr val="tx1"/>
+        </a:solidFill>
+        <a:latin typeface="+mn-lt"/>
+        <a:ea typeface="+mn-ea"/>
+        <a:cs typeface="+mn-cs"/>
+      </a:defRPr>
+    </a:lvl5pPr>
+    <a:lvl6pPr marL="2286000" algn="l" defTabSz="914400" rtl="0" eaLnBrk="1" latinLnBrk="0" hangingPunct="1">
+      <a:defRPr sz="1200" kern="1200">
+        <a:solidFill>
+          <a:schemeClr val="tx1"/>
+        </a:solidFill>
+        <a:latin typeface="+mn-lt"/>
+        <a:ea typeface="+mn-ea"/>
+        <a:cs typeface="+mn-cs"/>
+      </a:defRPr>
+    </a:lvl6pPr>
+    <a:lvl7pPr marL="2743200" algn="l" defTabSz="914400" rtl="0" eaLnBrk="1" latinLnBrk="0" hangingPunct="1">
+      <a:defRPr sz="1200" kern="1200">
+        <a:solidFill>
+          <a:schemeClr val="tx1"/>
+        </a:solidFill>
+        <a:latin typeface="+mn-lt"/>
+        <a:ea typeface="+mn-ea"/>
+        <a:cs typeface="+mn-cs"/>
+      </a:defRPr>
+    </a:lvl7pPr>
+    <a:lvl8pPr marL="3200400" algn="l" defTabSz="914400" rtl="0" eaLnBrk="1" latinLnBrk="0" hangingPunct="1">
+      <a:defRPr sz="1200" kern="1200">
+        <a:solidFill>
+          <a:schemeClr val="tx1"/>
+        </a:solidFill>
+        <a:latin typeface="+mn-lt"/>
+        <a:ea typeface="+mn-ea"/>
+        <a:cs typeface="+mn-cs"/>
+      </a:defRPr>
+    </a:lvl8pPr>
+    <a:lvl9pPr marL="3657600" algn="l" defTabSz="914400" rtl="0" eaLnBrk="1" latinLnBrk="0" hangingPunct="1">
+      <a:defRPr sz="1200" kern="1200">
+        <a:solidFill>
+          <a:schemeClr val="tx1"/>
+        </a:solidFill>
+        <a:latin typeface="+mn-lt"/>
+        <a:ea typeface="+mn-ea"/>
+        <a:cs typeface="+mn-cs"/>
+      </a:defRPr>
+    </a:lvl9pPr>
+  </p:notesStyle>
+</p:notesMaster>
+</file>
+
+<file path=ppt/notesSlides/notesSlide1.xml><?xml version="1.0" encoding="utf-8"?>
+<p:notes xmlns:a="http://schemas.openxmlformats.org/drawingml/2006/main" xmlns:r="http://schemas.openxmlformats.org/officeDocument/2006/relationships" xmlns:p="http://schemas.openxmlformats.org/presentationml/2006/main">
+  <p:cSld>
+    <p:spTree>
+      <p:nvGrpSpPr>
+        <p:cNvPr id="1" name=""/>
+        <p:cNvGrpSpPr/>
+        <p:nvPr/>
+      </p:nvGrpSpPr>
+      <p:grpSpPr>
+        <a:xfrm>
+          <a:off x="0" y="0"/>
+          <a:ext cx="0" cy="0"/>
+          <a:chOff x="0" y="0"/>
+          <a:chExt cx="0" cy="0"/>
+        </a:xfrm>
+      </p:grpSpPr>
+      <p:sp>
+        <p:nvSpPr>
+          <p:cNvPr id="2" name="Slide Image Placeholder 1"/>
+          <p:cNvSpPr>
+            <a:spLocks noGrp="1" noRot="1" noChangeAspect="1"/>
+          </p:cNvSpPr>
+          <p:nvPr>
+            <p:ph type="sldImg"/>
+          </p:nvPr>
+        </p:nvSpPr>
+        <p:spPr/>
+      </p:sp>
+      <p:sp>
+        <p:nvSpPr>
+          <p:cNvPr id="3" name="Notes Placeholder 2"/>
+          <p:cNvSpPr>
+            <a:spLocks noGrp="1"/>
+          </p:cNvSpPr>
+          <p:nvPr>
+            <p:ph type="body" idx="1"/>
+          </p:nvPr>
+        </p:nvSpPr>
+        <p:spPr/>
+        <p:txBody>
+          <a:bodyPr/>
+          <a:lstStyle/>
+          <a:p>
+            <a:endParaRPr lang="en-US" dirty="0"/>
+          </a:p>
+        </p:txBody>
+      </p:sp>
+      <p:sp>
+        <p:nvSpPr>
+          <p:cNvPr id="4" name="Slide Number Placeholder 3"/>
+          <p:cNvSpPr>
+            <a:spLocks noGrp="1"/>
+          </p:cNvSpPr>
+          <p:nvPr>
+            <p:ph type="sldNum" sz="quarter" idx="5"/>
+          </p:nvPr>
+        </p:nvSpPr>
+        <p:spPr/>
+        <p:txBody>
+          <a:bodyPr/>
+          <a:lstStyle/>
+          <a:p>
+            <a:fld id="{8BE14A05-6774-4917-8ABF-DDCE5A905991}" type="slidenum">
+              <a:rPr lang="en-US" smtClean="0"/>
+              <a:t>1</a:t>
+            </a:fld>
+            <a:endParaRPr lang="en-US"/>
+          </a:p>
+        </p:txBody>
+      </p:sp>
+    </p:spTree>
+    <p:extLst>
+      <p:ext uri="{BB962C8B-B14F-4D97-AF65-F5344CB8AC3E}">
+        <p14:creationId xmlns:p14="http://schemas.microsoft.com/office/powerpoint/2010/main" val="1065759805"/>
+      </p:ext>
+    </p:extLst>
+  </p:cSld>
+  <p:clrMapOvr>
+    <a:masterClrMapping/>
+  </p:clrMapOvr>
+</p:notes>
+</file>
+
+<file path=ppt/notesSlides/notesSlide10.xml><?xml version="1.0" encoding="utf-8"?>
+<p:notes xmlns:a="http://schemas.openxmlformats.org/drawingml/2006/main" xmlns:r="http://schemas.openxmlformats.org/officeDocument/2006/relationships" xmlns:p="http://schemas.openxmlformats.org/presentationml/2006/main">
+  <p:cSld>
+    <p:spTree>
+      <p:nvGrpSpPr>
+        <p:cNvPr id="1" name=""/>
+        <p:cNvGrpSpPr/>
+        <p:nvPr/>
+      </p:nvGrpSpPr>
+      <p:grpSpPr>
+        <a:xfrm>
+          <a:off x="0" y="0"/>
+          <a:ext cx="0" cy="0"/>
+          <a:chOff x="0" y="0"/>
+          <a:chExt cx="0" cy="0"/>
+        </a:xfrm>
+      </p:grpSpPr>
+      <p:sp>
+        <p:nvSpPr>
+          <p:cNvPr id="2" name="Slide Image Placeholder 1"/>
+          <p:cNvSpPr>
+            <a:spLocks noGrp="1" noRot="1" noChangeAspect="1"/>
+          </p:cNvSpPr>
+          <p:nvPr>
+            <p:ph type="sldImg"/>
+          </p:nvPr>
+        </p:nvSpPr>
+        <p:spPr/>
+      </p:sp>
+      <p:sp>
+        <p:nvSpPr>
+          <p:cNvPr id="3" name="Notes Placeholder 2"/>
+          <p:cNvSpPr>
+            <a:spLocks noGrp="1"/>
+          </p:cNvSpPr>
+          <p:nvPr>
+            <p:ph type="body" idx="1"/>
+          </p:nvPr>
+        </p:nvSpPr>
+        <p:spPr/>
+        <p:txBody>
+          <a:bodyPr/>
+          <a:lstStyle/>
+          <a:p>
+            <a:r>
+              <a:rPr lang="fr-FR" sz="1200" b="0" kern="1200" dirty="0">
+                <a:solidFill>
+                  <a:schemeClr val="tx1"/>
+                </a:solidFill>
+                <a:effectLst/>
+                <a:latin typeface="+mn-lt"/>
+                <a:ea typeface="+mn-ea"/>
+                <a:cs typeface="+mn-cs"/>
+              </a:rPr>
+              <a:t>Le DL n'a pas surpassé le ML ici. Pourquoi ?  </a:t>
+            </a:r>
+          </a:p>
+          <a:p>
+            <a:r>
+              <a:rPr lang="fr-FR" sz="1200" b="0" kern="1200" dirty="0">
+                <a:solidFill>
+                  <a:schemeClr val="tx1"/>
+                </a:solidFill>
+                <a:effectLst/>
+                <a:latin typeface="+mn-lt"/>
+                <a:ea typeface="+mn-ea"/>
+                <a:cs typeface="+mn-cs"/>
+              </a:rPr>
+              <a:t>- Le DL nécessite beaucoup de données.  </a:t>
+            </a:r>
+          </a:p>
+          <a:p>
+            <a:r>
+              <a:rPr lang="fr-FR" sz="1200" b="0" kern="1200" dirty="0">
+                <a:solidFill>
+                  <a:schemeClr val="tx1"/>
+                </a:solidFill>
+                <a:effectLst/>
+                <a:latin typeface="+mn-lt"/>
+                <a:ea typeface="+mn-ea"/>
+                <a:cs typeface="+mn-cs"/>
+              </a:rPr>
+              <a:t>- Avec un </a:t>
+            </a:r>
+            <a:r>
+              <a:rPr lang="fr-FR" sz="1200" b="0" kern="1200" dirty="0" err="1">
+                <a:solidFill>
+                  <a:schemeClr val="tx1"/>
+                </a:solidFill>
+                <a:effectLst/>
+                <a:latin typeface="+mn-lt"/>
+                <a:ea typeface="+mn-ea"/>
+                <a:cs typeface="+mn-cs"/>
+              </a:rPr>
+              <a:t>dataset</a:t>
+            </a:r>
+            <a:r>
+              <a:rPr lang="fr-FR" sz="1200" b="0" kern="1200" dirty="0">
+                <a:solidFill>
+                  <a:schemeClr val="tx1"/>
+                </a:solidFill>
+                <a:effectLst/>
+                <a:latin typeface="+mn-lt"/>
+                <a:ea typeface="+mn-ea"/>
+                <a:cs typeface="+mn-cs"/>
+              </a:rPr>
+              <a:t> moyen, le ML est plus simple et plus efficace.  </a:t>
+            </a:r>
+          </a:p>
+          <a:p>
+            <a:r>
+              <a:rPr lang="fr-FR" sz="1200" b="0" kern="1200" dirty="0">
+                <a:solidFill>
+                  <a:schemeClr val="tx1"/>
+                </a:solidFill>
+                <a:effectLst/>
+                <a:latin typeface="+mn-lt"/>
+                <a:ea typeface="+mn-ea"/>
+                <a:cs typeface="+mn-cs"/>
+              </a:rPr>
+              <a:t>Notre conclusion : le ML est adapté à ce projet.</a:t>
+            </a:r>
+          </a:p>
+          <a:p>
+            <a:endParaRPr lang="en-US" dirty="0"/>
+          </a:p>
+        </p:txBody>
+      </p:sp>
+      <p:sp>
+        <p:nvSpPr>
+          <p:cNvPr id="4" name="Slide Number Placeholder 3"/>
+          <p:cNvSpPr>
+            <a:spLocks noGrp="1"/>
+          </p:cNvSpPr>
+          <p:nvPr>
+            <p:ph type="sldNum" sz="quarter" idx="5"/>
+          </p:nvPr>
+        </p:nvSpPr>
+        <p:spPr/>
+        <p:txBody>
+          <a:bodyPr/>
+          <a:lstStyle/>
+          <a:p>
+            <a:fld id="{8BE14A05-6774-4917-8ABF-DDCE5A905991}" type="slidenum">
+              <a:rPr lang="en-US" smtClean="0"/>
+              <a:t>18</a:t>
+            </a:fld>
+            <a:endParaRPr lang="en-US"/>
+          </a:p>
+        </p:txBody>
+      </p:sp>
+    </p:spTree>
+    <p:extLst>
+      <p:ext uri="{BB962C8B-B14F-4D97-AF65-F5344CB8AC3E}">
+        <p14:creationId xmlns:p14="http://schemas.microsoft.com/office/powerpoint/2010/main" val="1380460262"/>
+      </p:ext>
+    </p:extLst>
+  </p:cSld>
+  <p:clrMapOvr>
+    <a:masterClrMapping/>
+  </p:clrMapOvr>
+</p:notes>
+</file>
+
+<file path=ppt/notesSlides/notesSlide11.xml><?xml version="1.0" encoding="utf-8"?>
+<p:notes xmlns:a="http://schemas.openxmlformats.org/drawingml/2006/main" xmlns:r="http://schemas.openxmlformats.org/officeDocument/2006/relationships" xmlns:p="http://schemas.openxmlformats.org/presentationml/2006/main">
+  <p:cSld>
+    <p:spTree>
+      <p:nvGrpSpPr>
+        <p:cNvPr id="1" name=""/>
+        <p:cNvGrpSpPr/>
+        <p:nvPr/>
+      </p:nvGrpSpPr>
+      <p:grpSpPr>
+        <a:xfrm>
+          <a:off x="0" y="0"/>
+          <a:ext cx="0" cy="0"/>
+          <a:chOff x="0" y="0"/>
+          <a:chExt cx="0" cy="0"/>
+        </a:xfrm>
+      </p:grpSpPr>
+      <p:sp>
+        <p:nvSpPr>
+          <p:cNvPr id="2" name="Slide Image Placeholder 1"/>
+          <p:cNvSpPr>
+            <a:spLocks noGrp="1" noRot="1" noChangeAspect="1"/>
+          </p:cNvSpPr>
+          <p:nvPr>
+            <p:ph type="sldImg"/>
+          </p:nvPr>
+        </p:nvSpPr>
+        <p:spPr/>
+      </p:sp>
+      <p:sp>
+        <p:nvSpPr>
+          <p:cNvPr id="3" name="Notes Placeholder 2"/>
+          <p:cNvSpPr>
+            <a:spLocks noGrp="1"/>
+          </p:cNvSpPr>
+          <p:nvPr>
+            <p:ph type="body" idx="1"/>
+          </p:nvPr>
+        </p:nvSpPr>
+        <p:spPr/>
+        <p:txBody>
+          <a:bodyPr/>
+          <a:lstStyle/>
+          <a:p>
+            <a:r>
+              <a:rPr lang="fr-FR" sz="1200" b="0" kern="1200" dirty="0">
+                <a:solidFill>
+                  <a:schemeClr val="tx1"/>
+                </a:solidFill>
+                <a:effectLst/>
+                <a:latin typeface="+mn-lt"/>
+                <a:ea typeface="+mn-ea"/>
+                <a:cs typeface="+mn-cs"/>
+              </a:rPr>
+              <a:t>Nous avons développé une interface avec </a:t>
+            </a:r>
+            <a:r>
+              <a:rPr lang="fr-FR" sz="1200" b="0" kern="1200" dirty="0" err="1">
+                <a:solidFill>
+                  <a:schemeClr val="tx1"/>
+                </a:solidFill>
+                <a:effectLst/>
+                <a:latin typeface="+mn-lt"/>
+                <a:ea typeface="+mn-ea"/>
+                <a:cs typeface="+mn-cs"/>
+              </a:rPr>
+              <a:t>Streamlit</a:t>
+            </a:r>
+            <a:r>
+              <a:rPr lang="fr-FR" sz="1200" b="0" kern="1200" dirty="0">
+                <a:solidFill>
+                  <a:schemeClr val="tx1"/>
+                </a:solidFill>
+                <a:effectLst/>
+                <a:latin typeface="+mn-lt"/>
+                <a:ea typeface="+mn-ea"/>
+                <a:cs typeface="+mn-cs"/>
+              </a:rPr>
+              <a:t> :  </a:t>
+            </a:r>
+          </a:p>
+          <a:p>
+            <a:r>
+              <a:rPr lang="fr-FR" sz="1200" b="0" kern="1200" dirty="0">
+                <a:solidFill>
+                  <a:schemeClr val="tx1"/>
+                </a:solidFill>
+                <a:effectLst/>
+                <a:latin typeface="+mn-lt"/>
+                <a:ea typeface="+mn-ea"/>
+                <a:cs typeface="+mn-cs"/>
+              </a:rPr>
+              <a:t>- Visualisation des résultats.  </a:t>
+            </a:r>
+          </a:p>
+          <a:p>
+            <a:r>
+              <a:rPr lang="fr-FR" sz="1200" b="0" kern="1200" dirty="0">
+                <a:solidFill>
+                  <a:schemeClr val="tx1"/>
+                </a:solidFill>
+                <a:effectLst/>
+                <a:latin typeface="+mn-lt"/>
+                <a:ea typeface="+mn-ea"/>
+                <a:cs typeface="+mn-cs"/>
+              </a:rPr>
+              <a:t>- Sélection dynamique des modèles.  </a:t>
+            </a:r>
+          </a:p>
+          <a:p>
+            <a:r>
+              <a:rPr lang="fr-FR" sz="1200" b="0" kern="1200" dirty="0">
+                <a:solidFill>
+                  <a:schemeClr val="tx1"/>
+                </a:solidFill>
+                <a:effectLst/>
+                <a:latin typeface="+mn-lt"/>
+                <a:ea typeface="+mn-ea"/>
+                <a:cs typeface="+mn-cs"/>
+              </a:rPr>
+              <a:t>- Tests interactifs.  </a:t>
+            </a:r>
+          </a:p>
+          <a:p>
+            <a:r>
+              <a:rPr lang="fr-FR" sz="1200" b="0" kern="1200" dirty="0">
+                <a:solidFill>
+                  <a:schemeClr val="tx1"/>
+                </a:solidFill>
+                <a:effectLst/>
+                <a:latin typeface="+mn-lt"/>
+                <a:ea typeface="+mn-ea"/>
+                <a:cs typeface="+mn-cs"/>
+              </a:rPr>
+              <a:t>Cela rend notre solution accessible et pratique.</a:t>
+            </a:r>
+          </a:p>
+          <a:p>
+            <a:endParaRPr lang="en-US" dirty="0"/>
+          </a:p>
+        </p:txBody>
+      </p:sp>
+      <p:sp>
+        <p:nvSpPr>
+          <p:cNvPr id="4" name="Slide Number Placeholder 3"/>
+          <p:cNvSpPr>
+            <a:spLocks noGrp="1"/>
+          </p:cNvSpPr>
+          <p:nvPr>
+            <p:ph type="sldNum" sz="quarter" idx="5"/>
+          </p:nvPr>
+        </p:nvSpPr>
+        <p:spPr/>
+        <p:txBody>
+          <a:bodyPr/>
+          <a:lstStyle/>
+          <a:p>
+            <a:fld id="{8BE14A05-6774-4917-8ABF-DDCE5A905991}" type="slidenum">
+              <a:rPr lang="en-US" smtClean="0"/>
+              <a:t>19</a:t>
+            </a:fld>
+            <a:endParaRPr lang="en-US"/>
+          </a:p>
+        </p:txBody>
+      </p:sp>
+    </p:spTree>
+    <p:extLst>
+      <p:ext uri="{BB962C8B-B14F-4D97-AF65-F5344CB8AC3E}">
+        <p14:creationId xmlns:p14="http://schemas.microsoft.com/office/powerpoint/2010/main" val="3451305610"/>
+      </p:ext>
+    </p:extLst>
+  </p:cSld>
+  <p:clrMapOvr>
+    <a:masterClrMapping/>
+  </p:clrMapOvr>
+</p:notes>
+</file>
+
+<file path=ppt/notesSlides/notesSlide12.xml><?xml version="1.0" encoding="utf-8"?>
+<p:notes xmlns:a="http://schemas.openxmlformats.org/drawingml/2006/main" xmlns:r="http://schemas.openxmlformats.org/officeDocument/2006/relationships" xmlns:p="http://schemas.openxmlformats.org/presentationml/2006/main">
+  <p:cSld>
+    <p:spTree>
+      <p:nvGrpSpPr>
+        <p:cNvPr id="1" name=""/>
+        <p:cNvGrpSpPr/>
+        <p:nvPr/>
+      </p:nvGrpSpPr>
+      <p:grpSpPr>
+        <a:xfrm>
+          <a:off x="0" y="0"/>
+          <a:ext cx="0" cy="0"/>
+          <a:chOff x="0" y="0"/>
+          <a:chExt cx="0" cy="0"/>
+        </a:xfrm>
+      </p:grpSpPr>
+      <p:sp>
+        <p:nvSpPr>
+          <p:cNvPr id="2" name="Slide Image Placeholder 1"/>
+          <p:cNvSpPr>
+            <a:spLocks noGrp="1" noRot="1" noChangeAspect="1"/>
+          </p:cNvSpPr>
+          <p:nvPr>
+            <p:ph type="sldImg"/>
+          </p:nvPr>
+        </p:nvSpPr>
+        <p:spPr/>
+      </p:sp>
+      <p:sp>
+        <p:nvSpPr>
+          <p:cNvPr id="3" name="Notes Placeholder 2"/>
+          <p:cNvSpPr>
+            <a:spLocks noGrp="1"/>
+          </p:cNvSpPr>
+          <p:nvPr>
+            <p:ph type="body" idx="1"/>
+          </p:nvPr>
+        </p:nvSpPr>
+        <p:spPr/>
+        <p:txBody>
+          <a:bodyPr/>
+          <a:lstStyle/>
+          <a:p>
+            <a:r>
+              <a:rPr lang="fr-FR" sz="1200" b="0" i="1" kern="1200" dirty="0">
+                <a:solidFill>
+                  <a:schemeClr val="tx1"/>
+                </a:solidFill>
+                <a:effectLst/>
+                <a:latin typeface="+mn-lt"/>
+                <a:ea typeface="+mn-ea"/>
+                <a:cs typeface="+mn-cs"/>
+              </a:rPr>
+              <a:t>Voici le program , et voici le code de </a:t>
+            </a:r>
+            <a:r>
+              <a:rPr lang="fr-FR" sz="1200" b="0" i="1" kern="1200" dirty="0" err="1">
+                <a:solidFill>
+                  <a:schemeClr val="tx1"/>
+                </a:solidFill>
+                <a:effectLst/>
+                <a:latin typeface="+mn-lt"/>
+                <a:ea typeface="+mn-ea"/>
+                <a:cs typeface="+mn-cs"/>
+              </a:rPr>
+              <a:t>streamlit</a:t>
+            </a:r>
+            <a:r>
+              <a:rPr lang="fr-FR" sz="1200" b="0" i="1" kern="1200" dirty="0">
+                <a:solidFill>
+                  <a:schemeClr val="tx1"/>
+                </a:solidFill>
+                <a:effectLst/>
+                <a:latin typeface="+mn-lt"/>
+                <a:ea typeface="+mn-ea"/>
+                <a:cs typeface="+mn-cs"/>
+              </a:rPr>
+              <a:t> </a:t>
+            </a:r>
+            <a:r>
+              <a:rPr lang="fr-FR" sz="1200" b="0" i="1" kern="1200" dirty="0" err="1">
+                <a:solidFill>
+                  <a:schemeClr val="tx1"/>
+                </a:solidFill>
+                <a:effectLst/>
+                <a:latin typeface="+mn-lt"/>
+                <a:ea typeface="+mn-ea"/>
+                <a:cs typeface="+mn-cs"/>
+              </a:rPr>
+              <a:t>tres</a:t>
+            </a:r>
+            <a:r>
+              <a:rPr lang="fr-FR" sz="1200" b="0" i="1" kern="1200" dirty="0">
+                <a:solidFill>
+                  <a:schemeClr val="tx1"/>
+                </a:solidFill>
+                <a:effectLst/>
+                <a:latin typeface="+mn-lt"/>
+                <a:ea typeface="+mn-ea"/>
+                <a:cs typeface="+mn-cs"/>
+              </a:rPr>
+              <a:t> petit in seul fichier , et u </a:t>
+            </a:r>
+            <a:r>
+              <a:rPr lang="fr-FR" sz="1200" b="0" i="1" kern="1200" dirty="0" err="1">
+                <a:solidFill>
+                  <a:schemeClr val="tx1"/>
+                </a:solidFill>
+                <a:effectLst/>
+                <a:latin typeface="+mn-lt"/>
+                <a:ea typeface="+mn-ea"/>
+                <a:cs typeface="+mn-cs"/>
+              </a:rPr>
+              <a:t>json</a:t>
+            </a:r>
+            <a:r>
+              <a:rPr lang="fr-FR" sz="1200" b="0" i="1" kern="1200" dirty="0">
+                <a:solidFill>
+                  <a:schemeClr val="tx1"/>
+                </a:solidFill>
+                <a:effectLst/>
+                <a:latin typeface="+mn-lt"/>
+                <a:ea typeface="+mn-ea"/>
+                <a:cs typeface="+mn-cs"/>
+              </a:rPr>
+              <a:t> fichier</a:t>
+            </a:r>
+            <a:br>
+              <a:rPr lang="fr-FR" sz="1200" b="0" i="1" kern="1200" dirty="0">
+                <a:solidFill>
+                  <a:schemeClr val="tx1"/>
+                </a:solidFill>
+                <a:effectLst/>
+                <a:latin typeface="+mn-lt"/>
+                <a:ea typeface="+mn-ea"/>
+                <a:cs typeface="+mn-cs"/>
+              </a:rPr>
+            </a:br>
+            <a:r>
+              <a:rPr lang="fr-FR" sz="1200" b="0" i="1" kern="1200" dirty="0">
+                <a:solidFill>
+                  <a:schemeClr val="tx1"/>
+                </a:solidFill>
+                <a:effectLst/>
+                <a:latin typeface="+mn-lt"/>
+                <a:ea typeface="+mn-ea"/>
+                <a:cs typeface="+mn-cs"/>
+              </a:rPr>
+              <a:t>Testons le module de </a:t>
+            </a:r>
+            <a:r>
+              <a:rPr lang="fr-FR" sz="1200" b="0" i="1" kern="1200" dirty="0" err="1">
+                <a:solidFill>
+                  <a:schemeClr val="tx1"/>
+                </a:solidFill>
+                <a:effectLst/>
+                <a:latin typeface="+mn-lt"/>
+                <a:ea typeface="+mn-ea"/>
+                <a:cs typeface="+mn-cs"/>
+              </a:rPr>
+              <a:t>deep</a:t>
+            </a:r>
+            <a:r>
+              <a:rPr lang="fr-FR" sz="1200" b="0" i="1" kern="1200" dirty="0">
+                <a:solidFill>
+                  <a:schemeClr val="tx1"/>
+                </a:solidFill>
+                <a:effectLst/>
+                <a:latin typeface="+mn-lt"/>
+                <a:ea typeface="+mn-ea"/>
+                <a:cs typeface="+mn-cs"/>
+              </a:rPr>
+              <a:t> </a:t>
+            </a:r>
+            <a:r>
+              <a:rPr lang="fr-FR" sz="1200" b="0" i="1" kern="1200" dirty="0" err="1">
+                <a:solidFill>
+                  <a:schemeClr val="tx1"/>
+                </a:solidFill>
+                <a:effectLst/>
+                <a:latin typeface="+mn-lt"/>
+                <a:ea typeface="+mn-ea"/>
+                <a:cs typeface="+mn-cs"/>
+              </a:rPr>
+              <a:t>learing</a:t>
+            </a:r>
+            <a:r>
+              <a:rPr lang="fr-FR" sz="1200" b="0" i="1" kern="1200" dirty="0">
+                <a:solidFill>
+                  <a:schemeClr val="tx1"/>
+                </a:solidFill>
+                <a:effectLst/>
+                <a:latin typeface="+mn-lt"/>
+                <a:ea typeface="+mn-ea"/>
+                <a:cs typeface="+mn-cs"/>
+              </a:rPr>
+              <a:t> , on choisi le </a:t>
+            </a:r>
+            <a:r>
+              <a:rPr lang="fr-FR" sz="1200" b="0" i="1" kern="1200" dirty="0" err="1">
+                <a:solidFill>
+                  <a:schemeClr val="tx1"/>
+                </a:solidFill>
+                <a:effectLst/>
+                <a:latin typeface="+mn-lt"/>
+                <a:ea typeface="+mn-ea"/>
+                <a:cs typeface="+mn-cs"/>
+              </a:rPr>
+              <a:t>millieur</a:t>
+            </a:r>
+            <a:r>
+              <a:rPr lang="fr-FR" sz="1200" b="0" i="1" kern="1200" dirty="0">
+                <a:solidFill>
+                  <a:schemeClr val="tx1"/>
+                </a:solidFill>
+                <a:effectLst/>
+                <a:latin typeface="+mn-lt"/>
+                <a:ea typeface="+mn-ea"/>
+                <a:cs typeface="+mn-cs"/>
+              </a:rPr>
+              <a:t> model (FNN) , en insérant un exemple des valeurs</a:t>
+            </a:r>
+          </a:p>
+          <a:p>
+            <a:r>
+              <a:rPr lang="fr-FR" sz="1200" b="1" i="0" kern="1200" dirty="0">
+                <a:solidFill>
+                  <a:schemeClr val="tx1"/>
+                </a:solidFill>
+                <a:effectLst/>
+                <a:latin typeface="+mn-lt"/>
+                <a:ea typeface="+mn-ea"/>
+                <a:cs typeface="+mn-cs"/>
+              </a:rPr>
+              <a:t>Après l'insertion, le résultat attendu est : lg --////// </a:t>
+            </a:r>
+          </a:p>
+          <a:p>
+            <a:r>
+              <a:rPr lang="fr-FR" sz="1200" b="1" i="0" kern="1200" dirty="0">
+                <a:solidFill>
+                  <a:schemeClr val="tx1"/>
+                </a:solidFill>
+                <a:effectLst/>
+                <a:latin typeface="+mn-lt"/>
+                <a:ea typeface="+mn-ea"/>
+                <a:cs typeface="+mn-cs"/>
+              </a:rPr>
+              <a:t>On testons autre model , </a:t>
+            </a:r>
+          </a:p>
+          <a:p>
+            <a:r>
+              <a:rPr lang="fr-FR" sz="1200" b="1" i="0" kern="1200" dirty="0">
+                <a:solidFill>
+                  <a:schemeClr val="tx1"/>
+                </a:solidFill>
+                <a:effectLst/>
+                <a:latin typeface="+mn-lt"/>
+                <a:ea typeface="+mn-ea"/>
+                <a:cs typeface="+mn-cs"/>
+              </a:rPr>
+              <a:t>Ml , le meilleur … voila </a:t>
+            </a:r>
+          </a:p>
+          <a:p>
+            <a:endParaRPr lang="en-US" dirty="0"/>
+          </a:p>
+        </p:txBody>
+      </p:sp>
+      <p:sp>
+        <p:nvSpPr>
+          <p:cNvPr id="4" name="Slide Number Placeholder 3"/>
+          <p:cNvSpPr>
+            <a:spLocks noGrp="1"/>
+          </p:cNvSpPr>
+          <p:nvPr>
+            <p:ph type="sldNum" sz="quarter" idx="5"/>
+          </p:nvPr>
+        </p:nvSpPr>
+        <p:spPr/>
+        <p:txBody>
+          <a:bodyPr/>
+          <a:lstStyle/>
+          <a:p>
+            <a:fld id="{8BE14A05-6774-4917-8ABF-DDCE5A905991}" type="slidenum">
+              <a:rPr lang="en-US" smtClean="0"/>
+              <a:t>20</a:t>
+            </a:fld>
+            <a:endParaRPr lang="en-US"/>
+          </a:p>
+        </p:txBody>
+      </p:sp>
+    </p:spTree>
+    <p:extLst>
+      <p:ext uri="{BB962C8B-B14F-4D97-AF65-F5344CB8AC3E}">
+        <p14:creationId xmlns:p14="http://schemas.microsoft.com/office/powerpoint/2010/main" val="4165346077"/>
+      </p:ext>
+    </p:extLst>
+  </p:cSld>
+  <p:clrMapOvr>
+    <a:masterClrMapping/>
+  </p:clrMapOvr>
+</p:notes>
+</file>
+
+<file path=ppt/notesSlides/notesSlide2.xml><?xml version="1.0" encoding="utf-8"?>
+<p:notes xmlns:a="http://schemas.openxmlformats.org/drawingml/2006/main" xmlns:r="http://schemas.openxmlformats.org/officeDocument/2006/relationships" xmlns:p="http://schemas.openxmlformats.org/presentationml/2006/main">
+  <p:cSld>
+    <p:spTree>
+      <p:nvGrpSpPr>
+        <p:cNvPr id="1" name=""/>
+        <p:cNvGrpSpPr/>
+        <p:nvPr/>
+      </p:nvGrpSpPr>
+      <p:grpSpPr>
+        <a:xfrm>
+          <a:off x="0" y="0"/>
+          <a:ext cx="0" cy="0"/>
+          <a:chOff x="0" y="0"/>
+          <a:chExt cx="0" cy="0"/>
+        </a:xfrm>
+      </p:grpSpPr>
+      <p:sp>
+        <p:nvSpPr>
+          <p:cNvPr id="2" name="Slide Image Placeholder 1"/>
+          <p:cNvSpPr>
+            <a:spLocks noGrp="1" noRot="1" noChangeAspect="1"/>
+          </p:cNvSpPr>
+          <p:nvPr>
+            <p:ph type="sldImg"/>
+          </p:nvPr>
+        </p:nvSpPr>
+        <p:spPr/>
+      </p:sp>
+      <p:sp>
+        <p:nvSpPr>
+          <p:cNvPr id="3" name="Notes Placeholder 2"/>
+          <p:cNvSpPr>
+            <a:spLocks noGrp="1"/>
+          </p:cNvSpPr>
+          <p:nvPr>
+            <p:ph type="body" idx="1"/>
+          </p:nvPr>
+        </p:nvSpPr>
+        <p:spPr/>
+        <p:txBody>
+          <a:bodyPr/>
+          <a:lstStyle/>
+          <a:p>
+            <a:r>
+              <a:rPr lang="en-US" dirty="0"/>
+              <a:t>La </a:t>
+            </a:r>
+            <a:r>
+              <a:rPr lang="en-US" dirty="0" err="1"/>
+              <a:t>distrbition</a:t>
+            </a:r>
+            <a:r>
+              <a:rPr lang="en-US" dirty="0"/>
+              <a:t> de </a:t>
+            </a:r>
+            <a:r>
+              <a:rPr lang="en-US" dirty="0" err="1"/>
+              <a:t>Ia</a:t>
+            </a:r>
+            <a:r>
+              <a:rPr lang="en-US" dirty="0"/>
+              <a:t> est c</a:t>
+            </a:r>
+          </a:p>
+          <a:p>
+            <a:r>
+              <a:rPr lang="en-US" dirty="0" err="1"/>
+              <a:t>Ib</a:t>
+            </a:r>
+            <a:r>
+              <a:rPr lang="en-US" dirty="0"/>
+              <a:t> / </a:t>
+            </a:r>
+            <a:r>
+              <a:rPr lang="en-US" dirty="0" err="1"/>
+              <a:t>iaentre</a:t>
+            </a:r>
+            <a:r>
+              <a:rPr lang="en-US" dirty="0"/>
+              <a:t> entre -250 / 250</a:t>
+            </a:r>
+          </a:p>
+          <a:p>
+            <a:r>
+              <a:rPr lang="en-US" dirty="0" err="1"/>
+              <a:t>Ic</a:t>
+            </a:r>
+            <a:r>
+              <a:rPr lang="en-US" dirty="0"/>
+              <a:t> entre -100 / 100</a:t>
+            </a:r>
+          </a:p>
+          <a:p>
+            <a:endParaRPr lang="en-US" dirty="0"/>
+          </a:p>
+          <a:p>
+            <a:r>
+              <a:rPr lang="en-US" dirty="0"/>
+              <a:t>Va . </a:t>
+            </a:r>
+            <a:r>
+              <a:rPr lang="en-US" dirty="0" err="1"/>
+              <a:t>Vc</a:t>
+            </a:r>
+            <a:r>
+              <a:rPr lang="en-US" dirty="0"/>
+              <a:t> 0.2 </a:t>
+            </a:r>
+          </a:p>
+          <a:p>
+            <a:r>
+              <a:rPr lang="en-US" dirty="0" err="1"/>
+              <a:t>Vb</a:t>
+            </a:r>
+            <a:r>
+              <a:rPr lang="en-US" dirty="0"/>
+              <a:t> 0.1</a:t>
+            </a:r>
+          </a:p>
+        </p:txBody>
+      </p:sp>
+      <p:sp>
+        <p:nvSpPr>
+          <p:cNvPr id="4" name="Slide Number Placeholder 3"/>
+          <p:cNvSpPr>
+            <a:spLocks noGrp="1"/>
+          </p:cNvSpPr>
+          <p:nvPr>
+            <p:ph type="sldNum" sz="quarter" idx="5"/>
+          </p:nvPr>
+        </p:nvSpPr>
+        <p:spPr/>
+        <p:txBody>
+          <a:bodyPr/>
+          <a:lstStyle/>
+          <a:p>
+            <a:fld id="{8BE14A05-6774-4917-8ABF-DDCE5A905991}" type="slidenum">
+              <a:rPr lang="en-US" smtClean="0"/>
+              <a:t>9</a:t>
+            </a:fld>
+            <a:endParaRPr lang="en-US"/>
+          </a:p>
+        </p:txBody>
+      </p:sp>
+    </p:spTree>
+    <p:extLst>
+      <p:ext uri="{BB962C8B-B14F-4D97-AF65-F5344CB8AC3E}">
+        <p14:creationId xmlns:p14="http://schemas.microsoft.com/office/powerpoint/2010/main" val="3541450473"/>
+      </p:ext>
+    </p:extLst>
+  </p:cSld>
+  <p:clrMapOvr>
+    <a:masterClrMapping/>
+  </p:clrMapOvr>
+</p:notes>
+</file>
+
+<file path=ppt/notesSlides/notesSlide3.xml><?xml version="1.0" encoding="utf-8"?>
+<p:notes xmlns:a="http://schemas.openxmlformats.org/drawingml/2006/main" xmlns:r="http://schemas.openxmlformats.org/officeDocument/2006/relationships" xmlns:p="http://schemas.openxmlformats.org/presentationml/2006/main">
+  <p:cSld>
+    <p:spTree>
+      <p:nvGrpSpPr>
+        <p:cNvPr id="1" name=""/>
+        <p:cNvGrpSpPr/>
+        <p:nvPr/>
+      </p:nvGrpSpPr>
+      <p:grpSpPr>
+        <a:xfrm>
+          <a:off x="0" y="0"/>
+          <a:ext cx="0" cy="0"/>
+          <a:chOff x="0" y="0"/>
+          <a:chExt cx="0" cy="0"/>
+        </a:xfrm>
+      </p:grpSpPr>
+      <p:sp>
+        <p:nvSpPr>
+          <p:cNvPr id="2" name="Slide Image Placeholder 1"/>
+          <p:cNvSpPr>
+            <a:spLocks noGrp="1" noRot="1" noChangeAspect="1"/>
+          </p:cNvSpPr>
+          <p:nvPr>
+            <p:ph type="sldImg"/>
+          </p:nvPr>
+        </p:nvSpPr>
+        <p:spPr/>
+      </p:sp>
+      <p:sp>
+        <p:nvSpPr>
+          <p:cNvPr id="3" name="Notes Placeholder 2"/>
+          <p:cNvSpPr>
+            <a:spLocks noGrp="1"/>
+          </p:cNvSpPr>
+          <p:nvPr>
+            <p:ph type="body" idx="1"/>
+          </p:nvPr>
+        </p:nvSpPr>
+        <p:spPr/>
+        <p:txBody>
+          <a:bodyPr/>
+          <a:lstStyle/>
+          <a:p>
+            <a:r>
+              <a:rPr lang="fr-FR" sz="1200" b="1" i="0" kern="1200" dirty="0">
+                <a:solidFill>
+                  <a:schemeClr val="tx1"/>
+                </a:solidFill>
+                <a:effectLst/>
+                <a:latin typeface="+mn-lt"/>
+                <a:ea typeface="+mn-ea"/>
+                <a:cs typeface="+mn-cs"/>
+              </a:rPr>
+              <a:t>ML (Machine Learning)</a:t>
+            </a:r>
+            <a:r>
+              <a:rPr lang="fr-FR" sz="1200" b="0" i="0" kern="1200" dirty="0">
+                <a:solidFill>
+                  <a:schemeClr val="tx1"/>
+                </a:solidFill>
+                <a:effectLst/>
+                <a:latin typeface="+mn-lt"/>
+                <a:ea typeface="+mn-ea"/>
+                <a:cs typeface="+mn-cs"/>
+              </a:rPr>
+              <a:t> : L'apprentissage automatique permet aux machines d'apprendre à partir des données.</a:t>
+            </a:r>
+          </a:p>
+          <a:p>
+            <a:r>
+              <a:rPr lang="fr-FR" sz="1200" b="0" i="0" kern="1200" dirty="0">
+                <a:solidFill>
+                  <a:schemeClr val="tx1"/>
+                </a:solidFill>
+                <a:effectLst/>
+                <a:latin typeface="+mn-lt"/>
+                <a:ea typeface="+mn-ea"/>
+                <a:cs typeface="+mn-cs"/>
+              </a:rPr>
+              <a:t>Nous avons testes les </a:t>
+            </a:r>
+            <a:r>
+              <a:rPr lang="fr-FR" sz="1200" b="0" i="0" kern="1200" dirty="0" err="1">
+                <a:solidFill>
+                  <a:schemeClr val="tx1"/>
+                </a:solidFill>
+                <a:effectLst/>
+                <a:latin typeface="+mn-lt"/>
+                <a:ea typeface="+mn-ea"/>
+                <a:cs typeface="+mn-cs"/>
+              </a:rPr>
+              <a:t>modeles</a:t>
+            </a:r>
+            <a:r>
+              <a:rPr lang="fr-FR" sz="1200" b="0" i="0" kern="1200" dirty="0">
+                <a:solidFill>
+                  <a:schemeClr val="tx1"/>
+                </a:solidFill>
+                <a:effectLst/>
+                <a:latin typeface="+mn-lt"/>
+                <a:ea typeface="+mn-ea"/>
+                <a:cs typeface="+mn-cs"/>
+              </a:rPr>
+              <a:t> suivant :</a:t>
+            </a:r>
+          </a:p>
+          <a:p>
+            <a:r>
+              <a:rPr lang="fr-FR" sz="1200" b="0" i="0" kern="1200" dirty="0">
+                <a:solidFill>
+                  <a:schemeClr val="tx1"/>
+                </a:solidFill>
+                <a:effectLst/>
+                <a:latin typeface="+mn-lt"/>
+                <a:ea typeface="+mn-ea"/>
+                <a:cs typeface="+mn-cs"/>
+              </a:rPr>
+              <a:t>- </a:t>
+            </a:r>
+            <a:r>
+              <a:rPr lang="fr-FR" sz="1200" b="0" i="0" kern="1200" dirty="0" err="1">
+                <a:solidFill>
+                  <a:schemeClr val="tx1"/>
+                </a:solidFill>
+                <a:effectLst/>
+                <a:latin typeface="+mn-lt"/>
+                <a:ea typeface="+mn-ea"/>
+                <a:cs typeface="+mn-cs"/>
+              </a:rPr>
+              <a:t>Knn</a:t>
+            </a:r>
+            <a:r>
+              <a:rPr lang="fr-FR" sz="1200" b="0" i="0" kern="1200" dirty="0">
+                <a:solidFill>
+                  <a:schemeClr val="tx1"/>
+                </a:solidFill>
+                <a:effectLst/>
+                <a:latin typeface="+mn-lt"/>
+                <a:ea typeface="+mn-ea"/>
+                <a:cs typeface="+mn-cs"/>
+              </a:rPr>
+              <a:t> ….</a:t>
+            </a:r>
+          </a:p>
+          <a:p>
+            <a:pPr marL="0" marR="0" lvl="0" indent="0" algn="l" defTabSz="914400" rtl="0" eaLnBrk="1" fontAlgn="auto" latinLnBrk="0" hangingPunct="1">
+              <a:lnSpc>
+                <a:spcPct val="100000"/>
+              </a:lnSpc>
+              <a:spcBef>
+                <a:spcPts val="0"/>
+              </a:spcBef>
+              <a:spcAft>
+                <a:spcPts val="0"/>
+              </a:spcAft>
+              <a:buClrTx/>
+              <a:buSzTx/>
+              <a:buFontTx/>
+              <a:buNone/>
+              <a:tabLst/>
+              <a:defRPr/>
+            </a:pPr>
+            <a:r>
+              <a:rPr lang="fr-FR" sz="1200" b="0" kern="1200" dirty="0">
+                <a:solidFill>
+                  <a:schemeClr val="tx1"/>
+                </a:solidFill>
+                <a:effectLst/>
+                <a:latin typeface="+mn-lt"/>
+                <a:ea typeface="+mn-ea"/>
+                <a:cs typeface="+mn-cs"/>
+              </a:rPr>
+              <a:t>Meilleurs modèles : SVM Optimisé (86,84%), </a:t>
+            </a:r>
+            <a:r>
+              <a:rPr lang="fr-FR" sz="1200" b="0" kern="1200" dirty="0" err="1">
+                <a:solidFill>
+                  <a:schemeClr val="tx1"/>
+                </a:solidFill>
+                <a:effectLst/>
+                <a:latin typeface="+mn-lt"/>
+                <a:ea typeface="+mn-ea"/>
+                <a:cs typeface="+mn-cs"/>
+              </a:rPr>
+              <a:t>Random</a:t>
+            </a:r>
+            <a:r>
+              <a:rPr lang="fr-FR" sz="1200" b="0" kern="1200" dirty="0">
+                <a:solidFill>
+                  <a:schemeClr val="tx1"/>
+                </a:solidFill>
+                <a:effectLst/>
+                <a:latin typeface="+mn-lt"/>
+                <a:ea typeface="+mn-ea"/>
+                <a:cs typeface="+mn-cs"/>
+              </a:rPr>
+              <a:t> Forest (85,95%). Plus faibles : SGD (32,36%), Régression Logistique (37,19%)</a:t>
+            </a:r>
+          </a:p>
+          <a:p>
+            <a:endParaRPr lang="fr-FR" sz="1200" b="0" i="0" kern="1200" dirty="0">
+              <a:solidFill>
+                <a:schemeClr val="tx1"/>
+              </a:solidFill>
+              <a:effectLst/>
+              <a:latin typeface="+mn-lt"/>
+              <a:ea typeface="+mn-ea"/>
+              <a:cs typeface="+mn-cs"/>
+            </a:endParaRPr>
+          </a:p>
+        </p:txBody>
+      </p:sp>
+      <p:sp>
+        <p:nvSpPr>
+          <p:cNvPr id="4" name="Slide Number Placeholder 3"/>
+          <p:cNvSpPr>
+            <a:spLocks noGrp="1"/>
+          </p:cNvSpPr>
+          <p:nvPr>
+            <p:ph type="sldNum" sz="quarter" idx="5"/>
+          </p:nvPr>
+        </p:nvSpPr>
+        <p:spPr/>
+        <p:txBody>
+          <a:bodyPr/>
+          <a:lstStyle/>
+          <a:p>
+            <a:fld id="{8BE14A05-6774-4917-8ABF-DDCE5A905991}" type="slidenum">
+              <a:rPr lang="en-US" smtClean="0"/>
+              <a:t>11</a:t>
+            </a:fld>
+            <a:endParaRPr lang="en-US"/>
+          </a:p>
+        </p:txBody>
+      </p:sp>
+    </p:spTree>
+    <p:extLst>
+      <p:ext uri="{BB962C8B-B14F-4D97-AF65-F5344CB8AC3E}">
+        <p14:creationId xmlns:p14="http://schemas.microsoft.com/office/powerpoint/2010/main" val="2674552292"/>
+      </p:ext>
+    </p:extLst>
+  </p:cSld>
+  <p:clrMapOvr>
+    <a:masterClrMapping/>
+  </p:clrMapOvr>
+</p:notes>
+</file>
+
+<file path=ppt/notesSlides/notesSlide4.xml><?xml version="1.0" encoding="utf-8"?>
+<p:notes xmlns:a="http://schemas.openxmlformats.org/drawingml/2006/main" xmlns:r="http://schemas.openxmlformats.org/officeDocument/2006/relationships" xmlns:p="http://schemas.openxmlformats.org/presentationml/2006/main">
+  <p:cSld>
+    <p:spTree>
+      <p:nvGrpSpPr>
+        <p:cNvPr id="1" name=""/>
+        <p:cNvGrpSpPr/>
+        <p:nvPr/>
+      </p:nvGrpSpPr>
+      <p:grpSpPr>
+        <a:xfrm>
+          <a:off x="0" y="0"/>
+          <a:ext cx="0" cy="0"/>
+          <a:chOff x="0" y="0"/>
+          <a:chExt cx="0" cy="0"/>
+        </a:xfrm>
+      </p:grpSpPr>
+      <p:sp>
+        <p:nvSpPr>
+          <p:cNvPr id="2" name="Slide Image Placeholder 1"/>
+          <p:cNvSpPr>
+            <a:spLocks noGrp="1" noRot="1" noChangeAspect="1"/>
+          </p:cNvSpPr>
+          <p:nvPr>
+            <p:ph type="sldImg"/>
+          </p:nvPr>
+        </p:nvSpPr>
+        <p:spPr/>
+      </p:sp>
+      <p:sp>
+        <p:nvSpPr>
+          <p:cNvPr id="3" name="Notes Placeholder 2"/>
+          <p:cNvSpPr>
+            <a:spLocks noGrp="1"/>
+          </p:cNvSpPr>
+          <p:nvPr>
+            <p:ph type="body" idx="1"/>
+          </p:nvPr>
+        </p:nvSpPr>
+        <p:spPr/>
+        <p:txBody>
+          <a:bodyPr/>
+          <a:lstStyle/>
+          <a:p>
+            <a:r>
+              <a:rPr lang="fr-FR" sz="1200" b="0" kern="1200" dirty="0">
+                <a:solidFill>
+                  <a:schemeClr val="tx1"/>
+                </a:solidFill>
+                <a:effectLst/>
+                <a:latin typeface="+mn-lt"/>
+                <a:ea typeface="+mn-ea"/>
+                <a:cs typeface="+mn-cs"/>
+              </a:rPr>
+              <a:t>Le SVM avec noyau RBF est le meilleur :  </a:t>
+            </a:r>
+          </a:p>
+          <a:p>
+            <a:r>
+              <a:rPr lang="fr-FR" sz="1200" b="0" kern="1200" dirty="0">
+                <a:solidFill>
+                  <a:schemeClr val="tx1"/>
+                </a:solidFill>
+                <a:effectLst/>
+                <a:latin typeface="+mn-lt"/>
+                <a:ea typeface="+mn-ea"/>
+                <a:cs typeface="+mn-cs"/>
+              </a:rPr>
+              <a:t>- </a:t>
+            </a:r>
+            <a:r>
+              <a:rPr lang="fr-FR" sz="1200" b="0" kern="1200" dirty="0" err="1">
+                <a:solidFill>
+                  <a:schemeClr val="tx1"/>
+                </a:solidFill>
+                <a:effectLst/>
+                <a:latin typeface="+mn-lt"/>
+                <a:ea typeface="+mn-ea"/>
+                <a:cs typeface="+mn-cs"/>
+              </a:rPr>
+              <a:t>Accuracy</a:t>
+            </a:r>
+            <a:r>
+              <a:rPr lang="fr-FR" sz="1200" b="0" kern="1200" dirty="0">
+                <a:solidFill>
+                  <a:schemeClr val="tx1"/>
+                </a:solidFill>
+                <a:effectLst/>
+                <a:latin typeface="+mn-lt"/>
+                <a:ea typeface="+mn-ea"/>
+                <a:cs typeface="+mn-cs"/>
+              </a:rPr>
+              <a:t> : 86,84 %.  </a:t>
+            </a:r>
+          </a:p>
+          <a:p>
+            <a:r>
+              <a:rPr lang="fr-FR" sz="1200" b="0" kern="1200" dirty="0">
+                <a:solidFill>
+                  <a:schemeClr val="tx1"/>
+                </a:solidFill>
+                <a:effectLst/>
+                <a:latin typeface="+mn-lt"/>
+                <a:ea typeface="+mn-ea"/>
+                <a:cs typeface="+mn-cs"/>
+              </a:rPr>
+              <a:t>- F1-score : 86,8 %.  </a:t>
+            </a:r>
+          </a:p>
+          <a:p>
+            <a:r>
+              <a:rPr lang="fr-FR" sz="1200" b="0" kern="1200" dirty="0">
+                <a:solidFill>
+                  <a:schemeClr val="tx1"/>
+                </a:solidFill>
+                <a:effectLst/>
+                <a:latin typeface="+mn-lt"/>
+                <a:ea typeface="+mn-ea"/>
+                <a:cs typeface="+mn-cs"/>
+              </a:rPr>
+              <a:t>- Peu d'erreurs sur les classes majoritaires.  </a:t>
+            </a:r>
+          </a:p>
+          <a:p>
+            <a:r>
+              <a:rPr lang="fr-FR" sz="1200" b="0" kern="1200" dirty="0">
+                <a:solidFill>
+                  <a:schemeClr val="tx1"/>
+                </a:solidFill>
+                <a:effectLst/>
+                <a:latin typeface="+mn-lt"/>
+                <a:ea typeface="+mn-ea"/>
+                <a:cs typeface="+mn-cs"/>
+              </a:rPr>
+              <a:t>C'est notre choix pour la détection.</a:t>
+            </a:r>
+          </a:p>
+          <a:p>
+            <a:r>
+              <a:rPr lang="en-US" dirty="0"/>
+              <a:t>---</a:t>
+            </a:r>
+          </a:p>
+          <a:p>
+            <a:r>
+              <a:rPr lang="fr-FR" sz="1200" b="1" i="0" kern="1200" dirty="0">
+                <a:solidFill>
+                  <a:schemeClr val="tx1"/>
+                </a:solidFill>
+                <a:effectLst/>
+                <a:latin typeface="+mn-lt"/>
+                <a:ea typeface="+mn-ea"/>
+                <a:cs typeface="+mn-cs"/>
+              </a:rPr>
+              <a:t>RBF</a:t>
+            </a:r>
+            <a:r>
+              <a:rPr lang="fr-FR" sz="1200" b="0" i="0" kern="1200" dirty="0">
+                <a:solidFill>
+                  <a:schemeClr val="tx1"/>
+                </a:solidFill>
+                <a:effectLst/>
+                <a:latin typeface="+mn-lt"/>
+                <a:ea typeface="+mn-ea"/>
+                <a:cs typeface="+mn-cs"/>
+              </a:rPr>
+              <a:t> permet des frontières de décision flexibles et complexes en SVM.</a:t>
+            </a:r>
+            <a:endParaRPr lang="en-US" dirty="0"/>
+          </a:p>
+        </p:txBody>
+      </p:sp>
+      <p:sp>
+        <p:nvSpPr>
+          <p:cNvPr id="4" name="Slide Number Placeholder 3"/>
+          <p:cNvSpPr>
+            <a:spLocks noGrp="1"/>
+          </p:cNvSpPr>
+          <p:nvPr>
+            <p:ph type="sldNum" sz="quarter" idx="5"/>
+          </p:nvPr>
+        </p:nvSpPr>
+        <p:spPr/>
+        <p:txBody>
+          <a:bodyPr/>
+          <a:lstStyle/>
+          <a:p>
+            <a:fld id="{8BE14A05-6774-4917-8ABF-DDCE5A905991}" type="slidenum">
+              <a:rPr lang="en-US" smtClean="0"/>
+              <a:t>12</a:t>
+            </a:fld>
+            <a:endParaRPr lang="en-US"/>
+          </a:p>
+        </p:txBody>
+      </p:sp>
+    </p:spTree>
+    <p:extLst>
+      <p:ext uri="{BB962C8B-B14F-4D97-AF65-F5344CB8AC3E}">
+        <p14:creationId xmlns:p14="http://schemas.microsoft.com/office/powerpoint/2010/main" val="851938087"/>
+      </p:ext>
+    </p:extLst>
+  </p:cSld>
+  <p:clrMapOvr>
+    <a:masterClrMapping/>
+  </p:clrMapOvr>
+</p:notes>
+</file>
+
+<file path=ppt/notesSlides/notesSlide5.xml><?xml version="1.0" encoding="utf-8"?>
+<p:notes xmlns:a="http://schemas.openxmlformats.org/drawingml/2006/main" xmlns:r="http://schemas.openxmlformats.org/officeDocument/2006/relationships" xmlns:p="http://schemas.openxmlformats.org/presentationml/2006/main">
+  <p:cSld>
+    <p:spTree>
+      <p:nvGrpSpPr>
+        <p:cNvPr id="1" name=""/>
+        <p:cNvGrpSpPr/>
+        <p:nvPr/>
+      </p:nvGrpSpPr>
+      <p:grpSpPr>
+        <a:xfrm>
+          <a:off x="0" y="0"/>
+          <a:ext cx="0" cy="0"/>
+          <a:chOff x="0" y="0"/>
+          <a:chExt cx="0" cy="0"/>
+        </a:xfrm>
+      </p:grpSpPr>
+      <p:sp>
+        <p:nvSpPr>
+          <p:cNvPr id="2" name="Slide Image Placeholder 1"/>
+          <p:cNvSpPr>
+            <a:spLocks noGrp="1" noRot="1" noChangeAspect="1"/>
+          </p:cNvSpPr>
+          <p:nvPr>
+            <p:ph type="sldImg"/>
+          </p:nvPr>
+        </p:nvSpPr>
+        <p:spPr/>
+      </p:sp>
+      <p:sp>
+        <p:nvSpPr>
+          <p:cNvPr id="3" name="Notes Placeholder 2"/>
+          <p:cNvSpPr>
+            <a:spLocks noGrp="1"/>
+          </p:cNvSpPr>
+          <p:nvPr>
+            <p:ph type="body" idx="1"/>
+          </p:nvPr>
+        </p:nvSpPr>
+        <p:spPr/>
+        <p:txBody>
+          <a:bodyPr/>
+          <a:lstStyle/>
+          <a:p>
+            <a:r>
+              <a:rPr lang="fr-FR" sz="1200" b="0" kern="1200" dirty="0">
+                <a:solidFill>
+                  <a:schemeClr val="tx1"/>
+                </a:solidFill>
+                <a:effectLst/>
+                <a:latin typeface="+mn-lt"/>
+                <a:ea typeface="+mn-ea"/>
+                <a:cs typeface="+mn-cs"/>
+              </a:rPr>
+              <a:t>Comparaison des modèles ML :  </a:t>
+            </a:r>
+          </a:p>
+          <a:p>
+            <a:r>
+              <a:rPr lang="fr-FR" sz="1200" b="0" kern="1200" dirty="0">
+                <a:solidFill>
+                  <a:schemeClr val="tx1"/>
+                </a:solidFill>
+                <a:effectLst/>
+                <a:latin typeface="+mn-lt"/>
+                <a:ea typeface="+mn-ea"/>
+                <a:cs typeface="+mn-cs"/>
+              </a:rPr>
+              <a:t>- SVM optimisé en tête.  </a:t>
+            </a:r>
+          </a:p>
+          <a:p>
+            <a:r>
+              <a:rPr lang="fr-FR" sz="1200" b="0" kern="1200" dirty="0">
+                <a:solidFill>
+                  <a:schemeClr val="tx1"/>
+                </a:solidFill>
+                <a:effectLst/>
+                <a:latin typeface="+mn-lt"/>
+                <a:ea typeface="+mn-ea"/>
+                <a:cs typeface="+mn-cs"/>
+              </a:rPr>
+              <a:t>- Suivi par </a:t>
+            </a:r>
+            <a:r>
+              <a:rPr lang="fr-FR" sz="1200" b="0" kern="1200" dirty="0" err="1">
+                <a:solidFill>
+                  <a:schemeClr val="tx1"/>
+                </a:solidFill>
+                <a:effectLst/>
+                <a:latin typeface="+mn-lt"/>
+                <a:ea typeface="+mn-ea"/>
+                <a:cs typeface="+mn-cs"/>
+              </a:rPr>
+              <a:t>XGBoost</a:t>
+            </a:r>
+            <a:r>
+              <a:rPr lang="fr-FR" sz="1200" b="0" kern="1200" dirty="0">
+                <a:solidFill>
+                  <a:schemeClr val="tx1"/>
+                </a:solidFill>
+                <a:effectLst/>
+                <a:latin typeface="+mn-lt"/>
+                <a:ea typeface="+mn-ea"/>
+                <a:cs typeface="+mn-cs"/>
+              </a:rPr>
+              <a:t> et </a:t>
+            </a:r>
+            <a:r>
+              <a:rPr lang="fr-FR" sz="1200" b="0" kern="1200" dirty="0" err="1">
+                <a:solidFill>
+                  <a:schemeClr val="tx1"/>
+                </a:solidFill>
+                <a:effectLst/>
+                <a:latin typeface="+mn-lt"/>
+                <a:ea typeface="+mn-ea"/>
+                <a:cs typeface="+mn-cs"/>
+              </a:rPr>
+              <a:t>Random</a:t>
+            </a:r>
+            <a:r>
+              <a:rPr lang="fr-FR" sz="1200" b="0" kern="1200" dirty="0">
+                <a:solidFill>
+                  <a:schemeClr val="tx1"/>
+                </a:solidFill>
+                <a:effectLst/>
+                <a:latin typeface="+mn-lt"/>
+                <a:ea typeface="+mn-ea"/>
+                <a:cs typeface="+mn-cs"/>
+              </a:rPr>
+              <a:t> Forest.  </a:t>
+            </a:r>
+          </a:p>
+          <a:p>
+            <a:r>
+              <a:rPr lang="fr-FR" sz="1200" b="0" kern="1200" dirty="0">
+                <a:solidFill>
+                  <a:schemeClr val="tx1"/>
+                </a:solidFill>
+                <a:effectLst/>
+                <a:latin typeface="+mn-lt"/>
+                <a:ea typeface="+mn-ea"/>
+                <a:cs typeface="+mn-cs"/>
+              </a:rPr>
+              <a:t>- KNN et autres moins performants.  </a:t>
+            </a:r>
+          </a:p>
+          <a:p>
+            <a:r>
+              <a:rPr lang="fr-FR" sz="1200" b="0" kern="1200" dirty="0">
+                <a:solidFill>
+                  <a:schemeClr val="tx1"/>
+                </a:solidFill>
+                <a:effectLst/>
+                <a:latin typeface="+mn-lt"/>
+                <a:ea typeface="+mn-ea"/>
+                <a:cs typeface="+mn-cs"/>
+              </a:rPr>
+              <a:t>Le SVM est clairement le plus efficace.</a:t>
+            </a:r>
+          </a:p>
+          <a:p>
+            <a:endParaRPr lang="en-US" dirty="0"/>
+          </a:p>
+        </p:txBody>
+      </p:sp>
+      <p:sp>
+        <p:nvSpPr>
+          <p:cNvPr id="4" name="Slide Number Placeholder 3"/>
+          <p:cNvSpPr>
+            <a:spLocks noGrp="1"/>
+          </p:cNvSpPr>
+          <p:nvPr>
+            <p:ph type="sldNum" sz="quarter" idx="5"/>
+          </p:nvPr>
+        </p:nvSpPr>
+        <p:spPr/>
+        <p:txBody>
+          <a:bodyPr/>
+          <a:lstStyle/>
+          <a:p>
+            <a:fld id="{8BE14A05-6774-4917-8ABF-DDCE5A905991}" type="slidenum">
+              <a:rPr lang="en-US" smtClean="0"/>
+              <a:t>13</a:t>
+            </a:fld>
+            <a:endParaRPr lang="en-US"/>
+          </a:p>
+        </p:txBody>
+      </p:sp>
+    </p:spTree>
+    <p:extLst>
+      <p:ext uri="{BB962C8B-B14F-4D97-AF65-F5344CB8AC3E}">
+        <p14:creationId xmlns:p14="http://schemas.microsoft.com/office/powerpoint/2010/main" val="1405199632"/>
+      </p:ext>
+    </p:extLst>
+  </p:cSld>
+  <p:clrMapOvr>
+    <a:masterClrMapping/>
+  </p:clrMapOvr>
+</p:notes>
+</file>
+
+<file path=ppt/notesSlides/notesSlide6.xml><?xml version="1.0" encoding="utf-8"?>
+<p:notes xmlns:a="http://schemas.openxmlformats.org/drawingml/2006/main" xmlns:r="http://schemas.openxmlformats.org/officeDocument/2006/relationships" xmlns:p="http://schemas.openxmlformats.org/presentationml/2006/main">
+  <p:cSld>
+    <p:spTree>
+      <p:nvGrpSpPr>
+        <p:cNvPr id="1" name=""/>
+        <p:cNvGrpSpPr/>
+        <p:nvPr/>
+      </p:nvGrpSpPr>
+      <p:grpSpPr>
+        <a:xfrm>
+          <a:off x="0" y="0"/>
+          <a:ext cx="0" cy="0"/>
+          <a:chOff x="0" y="0"/>
+          <a:chExt cx="0" cy="0"/>
+        </a:xfrm>
+      </p:grpSpPr>
+      <p:sp>
+        <p:nvSpPr>
+          <p:cNvPr id="2" name="Slide Image Placeholder 1"/>
+          <p:cNvSpPr>
+            <a:spLocks noGrp="1" noRot="1" noChangeAspect="1"/>
+          </p:cNvSpPr>
+          <p:nvPr>
+            <p:ph type="sldImg"/>
+          </p:nvPr>
+        </p:nvSpPr>
+        <p:spPr/>
+      </p:sp>
+      <p:sp>
+        <p:nvSpPr>
+          <p:cNvPr id="3" name="Notes Placeholder 2"/>
+          <p:cNvSpPr>
+            <a:spLocks noGrp="1"/>
+          </p:cNvSpPr>
+          <p:nvPr>
+            <p:ph type="body" idx="1"/>
+          </p:nvPr>
+        </p:nvSpPr>
+        <p:spPr/>
+        <p:txBody>
+          <a:bodyPr/>
+          <a:lstStyle/>
+          <a:p>
+            <a:pPr marL="0" marR="0" lvl="0" indent="0" algn="l" defTabSz="914400" rtl="0" eaLnBrk="1" fontAlgn="auto" latinLnBrk="0" hangingPunct="1">
+              <a:lnSpc>
+                <a:spcPct val="100000"/>
+              </a:lnSpc>
+              <a:spcBef>
+                <a:spcPts val="0"/>
+              </a:spcBef>
+              <a:spcAft>
+                <a:spcPts val="0"/>
+              </a:spcAft>
+              <a:buClrTx/>
+              <a:buSzTx/>
+              <a:buFontTx/>
+              <a:buNone/>
+              <a:tabLst/>
+              <a:defRPr/>
+            </a:pPr>
+            <a:r>
+              <a:rPr lang="fr-FR" sz="1200" b="1" i="0" kern="1200" dirty="0">
+                <a:solidFill>
+                  <a:schemeClr val="tx1"/>
+                </a:solidFill>
+                <a:effectLst/>
+                <a:latin typeface="+mn-lt"/>
+                <a:ea typeface="+mn-ea"/>
+                <a:cs typeface="+mn-cs"/>
+              </a:rPr>
+              <a:t>DL (Deep Learning)</a:t>
+            </a:r>
+            <a:r>
+              <a:rPr lang="fr-FR" sz="1200" b="0" i="0" kern="1200" dirty="0">
+                <a:solidFill>
+                  <a:schemeClr val="tx1"/>
+                </a:solidFill>
+                <a:effectLst/>
+                <a:latin typeface="+mn-lt"/>
+                <a:ea typeface="+mn-ea"/>
+                <a:cs typeface="+mn-cs"/>
+              </a:rPr>
+              <a:t> : L'apprentissage profond utilise des réseaux de neurones pour modéliser des motifs complexes.</a:t>
+            </a:r>
+          </a:p>
+          <a:p>
+            <a:r>
+              <a:rPr lang="fr-FR" sz="1200" b="0" i="0" kern="1200" dirty="0">
+                <a:solidFill>
+                  <a:schemeClr val="tx1"/>
+                </a:solidFill>
+                <a:effectLst/>
+                <a:latin typeface="+mn-lt"/>
+                <a:ea typeface="+mn-ea"/>
+                <a:cs typeface="+mn-cs"/>
+              </a:rPr>
+              <a:t>Nous avons testes les </a:t>
+            </a:r>
+            <a:r>
+              <a:rPr lang="fr-FR" sz="1200" b="0" i="0" kern="1200" dirty="0" err="1">
+                <a:solidFill>
+                  <a:schemeClr val="tx1"/>
+                </a:solidFill>
+                <a:effectLst/>
+                <a:latin typeface="+mn-lt"/>
+                <a:ea typeface="+mn-ea"/>
+                <a:cs typeface="+mn-cs"/>
+              </a:rPr>
+              <a:t>modeles</a:t>
+            </a:r>
+            <a:r>
+              <a:rPr lang="fr-FR" sz="1200" b="0" i="0" kern="1200" dirty="0">
+                <a:solidFill>
+                  <a:schemeClr val="tx1"/>
+                </a:solidFill>
+                <a:effectLst/>
+                <a:latin typeface="+mn-lt"/>
+                <a:ea typeface="+mn-ea"/>
+                <a:cs typeface="+mn-cs"/>
+              </a:rPr>
+              <a:t> suivant :</a:t>
+            </a:r>
+          </a:p>
+          <a:p>
+            <a:endParaRPr lang="fr-FR" sz="1200" b="0" i="0" kern="1200" dirty="0">
+              <a:solidFill>
+                <a:schemeClr val="tx1"/>
+              </a:solidFill>
+              <a:effectLst/>
+              <a:latin typeface="+mn-lt"/>
+              <a:ea typeface="+mn-ea"/>
+              <a:cs typeface="+mn-cs"/>
+            </a:endParaRPr>
+          </a:p>
+        </p:txBody>
+      </p:sp>
+      <p:sp>
+        <p:nvSpPr>
+          <p:cNvPr id="4" name="Slide Number Placeholder 3"/>
+          <p:cNvSpPr>
+            <a:spLocks noGrp="1"/>
+          </p:cNvSpPr>
+          <p:nvPr>
+            <p:ph type="sldNum" sz="quarter" idx="5"/>
+          </p:nvPr>
+        </p:nvSpPr>
+        <p:spPr/>
+        <p:txBody>
+          <a:bodyPr/>
+          <a:lstStyle/>
+          <a:p>
+            <a:fld id="{8BE14A05-6774-4917-8ABF-DDCE5A905991}" type="slidenum">
+              <a:rPr lang="en-US" smtClean="0"/>
+              <a:t>14</a:t>
+            </a:fld>
+            <a:endParaRPr lang="en-US"/>
+          </a:p>
+        </p:txBody>
+      </p:sp>
+    </p:spTree>
+    <p:extLst>
+      <p:ext uri="{BB962C8B-B14F-4D97-AF65-F5344CB8AC3E}">
+        <p14:creationId xmlns:p14="http://schemas.microsoft.com/office/powerpoint/2010/main" val="2481000604"/>
+      </p:ext>
+    </p:extLst>
+  </p:cSld>
+  <p:clrMapOvr>
+    <a:masterClrMapping/>
+  </p:clrMapOvr>
+</p:notes>
+</file>
+
+<file path=ppt/notesSlides/notesSlide7.xml><?xml version="1.0" encoding="utf-8"?>
+<p:notes xmlns:a="http://schemas.openxmlformats.org/drawingml/2006/main" xmlns:r="http://schemas.openxmlformats.org/officeDocument/2006/relationships" xmlns:p="http://schemas.openxmlformats.org/presentationml/2006/main">
+  <p:cSld>
+    <p:spTree>
+      <p:nvGrpSpPr>
+        <p:cNvPr id="1" name=""/>
+        <p:cNvGrpSpPr/>
+        <p:nvPr/>
+      </p:nvGrpSpPr>
+      <p:grpSpPr>
+        <a:xfrm>
+          <a:off x="0" y="0"/>
+          <a:ext cx="0" cy="0"/>
+          <a:chOff x="0" y="0"/>
+          <a:chExt cx="0" cy="0"/>
+        </a:xfrm>
+      </p:grpSpPr>
+      <p:sp>
+        <p:nvSpPr>
+          <p:cNvPr id="2" name="Slide Image Placeholder 1"/>
+          <p:cNvSpPr>
+            <a:spLocks noGrp="1" noRot="1" noChangeAspect="1"/>
+          </p:cNvSpPr>
+          <p:nvPr>
+            <p:ph type="sldImg"/>
+          </p:nvPr>
+        </p:nvSpPr>
+        <p:spPr/>
+      </p:sp>
+      <p:sp>
+        <p:nvSpPr>
+          <p:cNvPr id="3" name="Notes Placeholder 2"/>
+          <p:cNvSpPr>
+            <a:spLocks noGrp="1"/>
+          </p:cNvSpPr>
+          <p:nvPr>
+            <p:ph type="body" idx="1"/>
+          </p:nvPr>
+        </p:nvSpPr>
+        <p:spPr/>
+        <p:txBody>
+          <a:bodyPr/>
+          <a:lstStyle/>
+          <a:p>
+            <a:r>
+              <a:rPr lang="fr-FR" sz="1200" b="0" kern="1200" dirty="0">
+                <a:solidFill>
+                  <a:schemeClr val="tx1"/>
+                </a:solidFill>
+                <a:effectLst/>
+                <a:latin typeface="+mn-lt"/>
+                <a:ea typeface="+mn-ea"/>
+                <a:cs typeface="+mn-cs"/>
+              </a:rPr>
+              <a:t>Résultats du Deep Learning :  </a:t>
+            </a:r>
+          </a:p>
+          <a:p>
+            <a:r>
+              <a:rPr lang="fr-FR" sz="1200" b="0" kern="1200" dirty="0">
+                <a:solidFill>
+                  <a:schemeClr val="tx1"/>
+                </a:solidFill>
+                <a:effectLst/>
+                <a:latin typeface="+mn-lt"/>
+                <a:ea typeface="+mn-ea"/>
+                <a:cs typeface="+mn-cs"/>
+              </a:rPr>
+              <a:t>- FNN : 84,36 %.  </a:t>
+            </a:r>
+          </a:p>
+          <a:p>
+            <a:r>
+              <a:rPr lang="fr-FR" sz="1200" b="0" kern="1200" dirty="0">
+                <a:solidFill>
+                  <a:schemeClr val="tx1"/>
+                </a:solidFill>
+                <a:effectLst/>
+                <a:latin typeface="+mn-lt"/>
+                <a:ea typeface="+mn-ea"/>
+                <a:cs typeface="+mn-cs"/>
+              </a:rPr>
+              <a:t>- CNN : 82,96 %.  </a:t>
+            </a:r>
+          </a:p>
+          <a:p>
+            <a:r>
+              <a:rPr lang="fr-FR" sz="1200" b="0" kern="1200" dirty="0">
+                <a:solidFill>
+                  <a:schemeClr val="tx1"/>
+                </a:solidFill>
+                <a:effectLst/>
+                <a:latin typeface="+mn-lt"/>
+                <a:ea typeface="+mn-ea"/>
+                <a:cs typeface="+mn-cs"/>
+              </a:rPr>
+              <a:t>- LSTM et GRU autour de 81 %.  </a:t>
+            </a:r>
+          </a:p>
+          <a:p>
+            <a:r>
+              <a:rPr lang="fr-FR" sz="1200" b="0" kern="1200" dirty="0">
+                <a:solidFill>
+                  <a:schemeClr val="tx1"/>
+                </a:solidFill>
+                <a:effectLst/>
+                <a:latin typeface="+mn-lt"/>
+                <a:ea typeface="+mn-ea"/>
+                <a:cs typeface="+mn-cs"/>
+              </a:rPr>
+              <a:t>Performances bonnes, mais pas meilleures que le SVM.</a:t>
+            </a:r>
+          </a:p>
+          <a:p>
+            <a:endParaRPr lang="en-US" dirty="0"/>
+          </a:p>
+        </p:txBody>
+      </p:sp>
+      <p:sp>
+        <p:nvSpPr>
+          <p:cNvPr id="4" name="Slide Number Placeholder 3"/>
+          <p:cNvSpPr>
+            <a:spLocks noGrp="1"/>
+          </p:cNvSpPr>
+          <p:nvPr>
+            <p:ph type="sldNum" sz="quarter" idx="5"/>
+          </p:nvPr>
+        </p:nvSpPr>
+        <p:spPr/>
+        <p:txBody>
+          <a:bodyPr/>
+          <a:lstStyle/>
+          <a:p>
+            <a:fld id="{8BE14A05-6774-4917-8ABF-DDCE5A905991}" type="slidenum">
+              <a:rPr lang="en-US" smtClean="0"/>
+              <a:t>15</a:t>
+            </a:fld>
+            <a:endParaRPr lang="en-US"/>
+          </a:p>
+        </p:txBody>
+      </p:sp>
+    </p:spTree>
+    <p:extLst>
+      <p:ext uri="{BB962C8B-B14F-4D97-AF65-F5344CB8AC3E}">
+        <p14:creationId xmlns:p14="http://schemas.microsoft.com/office/powerpoint/2010/main" val="3393697590"/>
+      </p:ext>
+    </p:extLst>
+  </p:cSld>
+  <p:clrMapOvr>
+    <a:masterClrMapping/>
+  </p:clrMapOvr>
+</p:notes>
+</file>
+
+<file path=ppt/notesSlides/notesSlide8.xml><?xml version="1.0" encoding="utf-8"?>
+<p:notes xmlns:a="http://schemas.openxmlformats.org/drawingml/2006/main" xmlns:r="http://schemas.openxmlformats.org/officeDocument/2006/relationships" xmlns:p="http://schemas.openxmlformats.org/presentationml/2006/main">
+  <p:cSld>
+    <p:spTree>
+      <p:nvGrpSpPr>
+        <p:cNvPr id="1" name=""/>
+        <p:cNvGrpSpPr/>
+        <p:nvPr/>
+      </p:nvGrpSpPr>
+      <p:grpSpPr>
+        <a:xfrm>
+          <a:off x="0" y="0"/>
+          <a:ext cx="0" cy="0"/>
+          <a:chOff x="0" y="0"/>
+          <a:chExt cx="0" cy="0"/>
+        </a:xfrm>
+      </p:grpSpPr>
+      <p:sp>
+        <p:nvSpPr>
+          <p:cNvPr id="2" name="Slide Image Placeholder 1"/>
+          <p:cNvSpPr>
+            <a:spLocks noGrp="1" noRot="1" noChangeAspect="1"/>
+          </p:cNvSpPr>
+          <p:nvPr>
+            <p:ph type="sldImg"/>
+          </p:nvPr>
+        </p:nvSpPr>
+        <p:spPr/>
+      </p:sp>
+      <p:sp>
+        <p:nvSpPr>
+          <p:cNvPr id="3" name="Notes Placeholder 2"/>
+          <p:cNvSpPr>
+            <a:spLocks noGrp="1"/>
+          </p:cNvSpPr>
+          <p:nvPr>
+            <p:ph type="body" idx="1"/>
+          </p:nvPr>
+        </p:nvSpPr>
+        <p:spPr/>
+        <p:txBody>
+          <a:bodyPr/>
+          <a:lstStyle/>
+          <a:p>
+            <a:r>
+              <a:rPr lang="en-US" dirty="0"/>
+              <a:t>La meme chose</a:t>
+            </a:r>
+          </a:p>
+        </p:txBody>
+      </p:sp>
+      <p:sp>
+        <p:nvSpPr>
+          <p:cNvPr id="4" name="Slide Number Placeholder 3"/>
+          <p:cNvSpPr>
+            <a:spLocks noGrp="1"/>
+          </p:cNvSpPr>
+          <p:nvPr>
+            <p:ph type="sldNum" sz="quarter" idx="5"/>
+          </p:nvPr>
+        </p:nvSpPr>
+        <p:spPr/>
+        <p:txBody>
+          <a:bodyPr/>
+          <a:lstStyle/>
+          <a:p>
+            <a:fld id="{8BE14A05-6774-4917-8ABF-DDCE5A905991}" type="slidenum">
+              <a:rPr lang="en-US" smtClean="0"/>
+              <a:t>16</a:t>
+            </a:fld>
+            <a:endParaRPr lang="en-US"/>
+          </a:p>
+        </p:txBody>
+      </p:sp>
+    </p:spTree>
+    <p:extLst>
+      <p:ext uri="{BB962C8B-B14F-4D97-AF65-F5344CB8AC3E}">
+        <p14:creationId xmlns:p14="http://schemas.microsoft.com/office/powerpoint/2010/main" val="3660273952"/>
+      </p:ext>
+    </p:extLst>
+  </p:cSld>
+  <p:clrMapOvr>
+    <a:masterClrMapping/>
+  </p:clrMapOvr>
+</p:notes>
+</file>
+
+<file path=ppt/notesSlides/notesSlide9.xml><?xml version="1.0" encoding="utf-8"?>
+<p:notes xmlns:a="http://schemas.openxmlformats.org/drawingml/2006/main" xmlns:r="http://schemas.openxmlformats.org/officeDocument/2006/relationships" xmlns:p="http://schemas.openxmlformats.org/presentationml/2006/main">
+  <p:cSld>
+    <p:spTree>
+      <p:nvGrpSpPr>
+        <p:cNvPr id="1" name=""/>
+        <p:cNvGrpSpPr/>
+        <p:nvPr/>
+      </p:nvGrpSpPr>
+      <p:grpSpPr>
+        <a:xfrm>
+          <a:off x="0" y="0"/>
+          <a:ext cx="0" cy="0"/>
+          <a:chOff x="0" y="0"/>
+          <a:chExt cx="0" cy="0"/>
+        </a:xfrm>
+      </p:grpSpPr>
+      <p:sp>
+        <p:nvSpPr>
+          <p:cNvPr id="2" name="Slide Image Placeholder 1"/>
+          <p:cNvSpPr>
+            <a:spLocks noGrp="1" noRot="1" noChangeAspect="1"/>
+          </p:cNvSpPr>
+          <p:nvPr>
+            <p:ph type="sldImg"/>
+          </p:nvPr>
+        </p:nvSpPr>
+        <p:spPr/>
+      </p:sp>
+      <p:sp>
+        <p:nvSpPr>
+          <p:cNvPr id="3" name="Notes Placeholder 2"/>
+          <p:cNvSpPr>
+            <a:spLocks noGrp="1"/>
+          </p:cNvSpPr>
+          <p:nvPr>
+            <p:ph type="body" idx="1"/>
+          </p:nvPr>
+        </p:nvSpPr>
+        <p:spPr/>
+        <p:txBody>
+          <a:bodyPr/>
+          <a:lstStyle/>
+          <a:p>
+            <a:r>
+              <a:rPr lang="fr-FR" sz="1200" b="0" kern="1200" dirty="0">
+                <a:solidFill>
+                  <a:schemeClr val="tx1"/>
+                </a:solidFill>
+                <a:effectLst/>
+                <a:latin typeface="+mn-lt"/>
+                <a:ea typeface="+mn-ea"/>
+                <a:cs typeface="+mn-cs"/>
+              </a:rPr>
+              <a:t>Voici un tableau récapitulatif :  </a:t>
+            </a:r>
+          </a:p>
+          <a:p>
+            <a:r>
+              <a:rPr lang="fr-FR" sz="1200" b="0" kern="1200" dirty="0">
+                <a:solidFill>
+                  <a:schemeClr val="tx1"/>
+                </a:solidFill>
+                <a:effectLst/>
+                <a:latin typeface="+mn-lt"/>
+                <a:ea typeface="+mn-ea"/>
+                <a:cs typeface="+mn-cs"/>
+              </a:rPr>
+              <a:t>- SVM optimisé en tête avec 86,84 %.  </a:t>
+            </a:r>
+          </a:p>
+          <a:p>
+            <a:r>
+              <a:rPr lang="fr-FR" sz="1200" b="0" kern="1200" dirty="0">
+                <a:solidFill>
+                  <a:schemeClr val="tx1"/>
+                </a:solidFill>
+                <a:effectLst/>
+                <a:latin typeface="+mn-lt"/>
+                <a:ea typeface="+mn-ea"/>
+                <a:cs typeface="+mn-cs"/>
+              </a:rPr>
+              <a:t>- FNN et LSTM derrière.  </a:t>
+            </a:r>
+          </a:p>
+          <a:p>
+            <a:r>
+              <a:rPr lang="fr-FR" sz="1200" b="0" kern="1200" dirty="0">
+                <a:solidFill>
+                  <a:schemeClr val="tx1"/>
+                </a:solidFill>
+                <a:effectLst/>
+                <a:latin typeface="+mn-lt"/>
+                <a:ea typeface="+mn-ea"/>
+                <a:cs typeface="+mn-cs"/>
+              </a:rPr>
+              <a:t>Cela confirme que le ML classique est très compétitif.</a:t>
+            </a:r>
+          </a:p>
+        </p:txBody>
+      </p:sp>
+      <p:sp>
+        <p:nvSpPr>
+          <p:cNvPr id="4" name="Slide Number Placeholder 3"/>
+          <p:cNvSpPr>
+            <a:spLocks noGrp="1"/>
+          </p:cNvSpPr>
+          <p:nvPr>
+            <p:ph type="sldNum" sz="quarter" idx="5"/>
+          </p:nvPr>
+        </p:nvSpPr>
+        <p:spPr/>
+        <p:txBody>
+          <a:bodyPr/>
+          <a:lstStyle/>
+          <a:p>
+            <a:fld id="{8BE14A05-6774-4917-8ABF-DDCE5A905991}" type="slidenum">
+              <a:rPr lang="en-US" smtClean="0"/>
+              <a:t>17</a:t>
+            </a:fld>
+            <a:endParaRPr lang="en-US"/>
+          </a:p>
+        </p:txBody>
+      </p:sp>
+    </p:spTree>
+    <p:extLst>
+      <p:ext uri="{BB962C8B-B14F-4D97-AF65-F5344CB8AC3E}">
+        <p14:creationId xmlns:p14="http://schemas.microsoft.com/office/powerpoint/2010/main" val="396561875"/>
+      </p:ext>
+    </p:extLst>
+  </p:cSld>
+  <p:clrMapOvr>
+    <a:masterClrMapping/>
+  </p:clrMapOvr>
+</p:notes>
+</file>
+
 <file path=ppt/slideLayouts/slideLayout1.xml><?xml version="1.0" encoding="utf-8"?>
 <p:sldLayout xmlns:a="http://schemas.openxmlformats.org/drawingml/2006/main" xmlns:r="http://schemas.openxmlformats.org/officeDocument/2006/relationships" xmlns:p="http://schemas.openxmlformats.org/presentationml/2006/main" type="title" preserve="1">
   <p:cSld name="Title Slide">
@@ -287,7 +2740,7 @@
           <a:p>
             <a:fld id="{E83A90B6-4BC5-4B47-A6B2-7915DE90D8AE}" type="datetimeFigureOut">
               <a:rPr lang="en-US" smtClean="0"/>
-              <a:t>5/19/2025</a:t>
+              <a:t>6/20/2025</a:t>
             </a:fld>
             <a:endParaRPr lang="en-US"/>
           </a:p>
@@ -485,7 +2938,7 @@
           <a:p>
             <a:fld id="{E83A90B6-4BC5-4B47-A6B2-7915DE90D8AE}" type="datetimeFigureOut">
               <a:rPr lang="en-US" smtClean="0"/>
-              <a:t>5/19/2025</a:t>
+              <a:t>6/20/2025</a:t>
             </a:fld>
             <a:endParaRPr lang="en-US"/>
           </a:p>
@@ -693,7 +3146,7 @@
           <a:p>
             <a:fld id="{E83A90B6-4BC5-4B47-A6B2-7915DE90D8AE}" type="datetimeFigureOut">
               <a:rPr lang="en-US" smtClean="0"/>
-              <a:t>5/19/2025</a:t>
+              <a:t>6/20/2025</a:t>
             </a:fld>
             <a:endParaRPr lang="en-US"/>
           </a:p>
@@ -891,7 +3344,7 @@
           <a:p>
             <a:fld id="{E83A90B6-4BC5-4B47-A6B2-7915DE90D8AE}" type="datetimeFigureOut">
               <a:rPr lang="en-US" smtClean="0"/>
-              <a:t>5/19/2025</a:t>
+              <a:t>6/20/2025</a:t>
             </a:fld>
             <a:endParaRPr lang="en-US"/>
           </a:p>
@@ -1166,7 +3619,7 @@
           <a:p>
             <a:fld id="{E83A90B6-4BC5-4B47-A6B2-7915DE90D8AE}" type="datetimeFigureOut">
               <a:rPr lang="en-US" smtClean="0"/>
-              <a:t>5/19/2025</a:t>
+              <a:t>6/20/2025</a:t>
             </a:fld>
             <a:endParaRPr lang="en-US"/>
           </a:p>
@@ -1431,7 +3884,7 @@
           <a:p>
             <a:fld id="{E83A90B6-4BC5-4B47-A6B2-7915DE90D8AE}" type="datetimeFigureOut">
               <a:rPr lang="en-US" smtClean="0"/>
-              <a:t>5/19/2025</a:t>
+              <a:t>6/20/2025</a:t>
             </a:fld>
             <a:endParaRPr lang="en-US"/>
           </a:p>
@@ -1843,7 +4296,7 @@
           <a:p>
             <a:fld id="{E83A90B6-4BC5-4B47-A6B2-7915DE90D8AE}" type="datetimeFigureOut">
               <a:rPr lang="en-US" smtClean="0"/>
-              <a:t>5/19/2025</a:t>
+              <a:t>6/20/2025</a:t>
             </a:fld>
             <a:endParaRPr lang="en-US"/>
           </a:p>
@@ -1984,7 +4437,7 @@
           <a:p>
             <a:fld id="{E83A90B6-4BC5-4B47-A6B2-7915DE90D8AE}" type="datetimeFigureOut">
               <a:rPr lang="en-US" smtClean="0"/>
-              <a:t>5/19/2025</a:t>
+              <a:t>6/20/2025</a:t>
             </a:fld>
             <a:endParaRPr lang="en-US"/>
           </a:p>
@@ -2097,7 +4550,7 @@
           <a:p>
             <a:fld id="{E83A90B6-4BC5-4B47-A6B2-7915DE90D8AE}" type="datetimeFigureOut">
               <a:rPr lang="en-US" smtClean="0"/>
-              <a:t>5/19/2025</a:t>
+              <a:t>6/20/2025</a:t>
             </a:fld>
             <a:endParaRPr lang="en-US"/>
           </a:p>
@@ -2408,7 +4861,7 @@
           <a:p>
             <a:fld id="{E83A90B6-4BC5-4B47-A6B2-7915DE90D8AE}" type="datetimeFigureOut">
               <a:rPr lang="en-US" smtClean="0"/>
-              <a:t>5/19/2025</a:t>
+              <a:t>6/20/2025</a:t>
             </a:fld>
             <a:endParaRPr lang="en-US"/>
           </a:p>
@@ -2696,7 +5149,7 @@
           <a:p>
             <a:fld id="{E83A90B6-4BC5-4B47-A6B2-7915DE90D8AE}" type="datetimeFigureOut">
               <a:rPr lang="en-US" smtClean="0"/>
-              <a:t>5/19/2025</a:t>
+              <a:t>6/20/2025</a:t>
             </a:fld>
             <a:endParaRPr lang="en-US"/>
           </a:p>
@@ -2937,7 +5390,7 @@
           <a:p>
             <a:fld id="{E83A90B6-4BC5-4B47-A6B2-7915DE90D8AE}" type="datetimeFigureOut">
               <a:rPr lang="en-US" smtClean="0"/>
-              <a:t>5/19/2025</a:t>
+              <a:t>6/20/2025</a:t>
             </a:fld>
             <a:endParaRPr lang="en-US"/>
           </a:p>
@@ -3369,7 +5822,7 @@
           <p:nvPr/>
         </p:nvPicPr>
         <p:blipFill>
-          <a:blip r:embed="rId2">
+          <a:blip r:embed="rId3">
             <a:extLst>
               <a:ext uri="{28A0092B-C50C-407E-A947-70E740481C1C}">
                 <a14:useLocalDpi xmlns:a14="http://schemas.microsoft.com/office/drawing/2010/main" val="0"/>
@@ -3435,7 +5888,7 @@
             </a:pathLst>
           </a:custGeom>
           <a:blipFill>
-            <a:blip r:embed="rId3"/>
+            <a:blip r:embed="rId4"/>
             <a:stretch>
               <a:fillRect/>
             </a:stretch>
@@ -3463,8 +5916,8 @@
         </p:nvSpPr>
         <p:spPr>
           <a:xfrm>
-            <a:off x="3657193" y="3489279"/>
-            <a:ext cx="5555309" cy="560025"/>
+            <a:off x="3621320" y="3507671"/>
+            <a:ext cx="4879213" cy="560025"/>
           </a:xfrm>
           <a:prstGeom prst="rect">
             <a:avLst/>
@@ -3821,7 +6274,7 @@
           <p:nvPr/>
         </p:nvPicPr>
         <p:blipFill>
-          <a:blip r:embed="rId2">
+          <a:blip r:embed="rId3">
             <a:extLst>
               <a:ext uri="{28A0092B-C50C-407E-A947-70E740481C1C}">
                 <a14:useLocalDpi xmlns:a14="http://schemas.microsoft.com/office/drawing/2010/main" val="0"/>
@@ -4097,7 +6550,7 @@
         <p:spPr>
           <a:xfrm>
             <a:off x="6506873" y="4318910"/>
-            <a:ext cx="4632960" cy="2123658"/>
+            <a:ext cx="4632960" cy="1754326"/>
           </a:xfrm>
           <a:prstGeom prst="rect">
             <a:avLst/>
@@ -4183,120 +6636,33 @@
             </a:r>
             <a:r>
               <a:rPr lang="fr-FR" sz="2400" b="1" dirty="0">
-                <a:effectLst/>
                 <a:ea typeface="Calibri" panose="020F0502020204030204" pitchFamily="34" charset="0"/>
                 <a:cs typeface="Arial" panose="020B0604020202020204" pitchFamily="34" charset="0"/>
               </a:rPr>
-              <a:t>Moulay Driss El </a:t>
-            </a:r>
-            <a:r>
-              <a:rPr lang="fr-FR" sz="2400" b="1" dirty="0" err="1">
-                <a:effectLst/>
+              <a:t>Moulay Driss EL OUADGHIRI </a:t>
+            </a:r>
+          </a:p>
+          <a:p>
+            <a:r>
+              <a:rPr lang="fr-FR" sz="2400" b="1" dirty="0">
                 <a:ea typeface="Calibri" panose="020F0502020204030204" pitchFamily="34" charset="0"/>
                 <a:cs typeface="Arial" panose="020B0604020202020204" pitchFamily="34" charset="0"/>
               </a:rPr>
-              <a:t>oudghiri</a:t>
-            </a:r>
-            <a:endParaRPr lang="fr-FR" sz="2400" b="1" dirty="0">
-              <a:effectLst/>
-              <a:ea typeface="Calibri" panose="020F0502020204030204" pitchFamily="34" charset="0"/>
-              <a:cs typeface="Arial" panose="020B0604020202020204" pitchFamily="34" charset="0"/>
-            </a:endParaRPr>
-          </a:p>
-          <a:p>
-            <a:r>
-              <a:rPr lang="en-US" sz="2400" b="1" dirty="0">
-                <a:ea typeface="Poppins Semi-Bold"/>
-                <a:cs typeface="Poppins Semi-Bold"/>
-                <a:sym typeface="Poppins Semi-Bold"/>
+              <a:t>Pr. Hamid BOURRAY</a:t>
+            </a:r>
+          </a:p>
+          <a:p>
+            <a:r>
+              <a:rPr lang="fr-FR" sz="2400" b="1" dirty="0">
+                <a:ea typeface="Calibri" panose="020F0502020204030204" pitchFamily="34" charset="0"/>
+                <a:cs typeface="Arial" panose="020B0604020202020204" pitchFamily="34" charset="0"/>
               </a:rPr>
-              <a:t>Pr. </a:t>
-            </a:r>
-            <a:r>
-              <a:rPr lang="fr-FR" sz="2400" b="1" dirty="0">
-                <a:effectLst/>
-                <a:ea typeface="Times New Roman" panose="02020603050405020304" pitchFamily="18" charset="0"/>
-              </a:rPr>
-              <a:t>Hamid </a:t>
-            </a:r>
-            <a:r>
-              <a:rPr lang="fr-FR" sz="2400" b="1" dirty="0" err="1">
-                <a:effectLst/>
-                <a:ea typeface="Times New Roman" panose="02020603050405020304" pitchFamily="18" charset="0"/>
-              </a:rPr>
-              <a:t>Bourray</a:t>
+              <a:t>Pr. Abdeslam ELFERGOUGUI</a:t>
             </a:r>
             <a:endParaRPr lang="en-US" sz="2400" b="1" dirty="0">
               <a:ea typeface="Poppins Semi-Bold"/>
               <a:cs typeface="Poppins Semi-Bold"/>
               <a:sym typeface="Poppins Semi-Bold"/>
-            </a:endParaRPr>
-          </a:p>
-          <a:p>
-            <a:r>
-              <a:rPr lang="fr-FR" sz="2400" b="1" dirty="0">
-                <a:effectLst/>
-                <a:ea typeface="Times New Roman" panose="02020603050405020304" pitchFamily="18" charset="0"/>
-              </a:rPr>
-              <a:t>Pr. Zakaria </a:t>
-            </a:r>
-            <a:r>
-              <a:rPr lang="fr-FR" sz="2400" b="1" dirty="0" err="1">
-                <a:effectLst/>
-                <a:ea typeface="Times New Roman" panose="02020603050405020304" pitchFamily="18" charset="0"/>
-              </a:rPr>
-              <a:t>Lahbi</a:t>
-            </a:r>
-            <a:endParaRPr lang="en-US" sz="2400" b="1" dirty="0">
-              <a:ea typeface="Poppins Semi-Bold"/>
-              <a:cs typeface="Poppins Semi-Bold"/>
-              <a:sym typeface="Poppins Semi-Bold"/>
-            </a:endParaRPr>
-          </a:p>
-          <a:p>
-            <a:r>
-              <a:rPr lang="en-US" sz="2400" b="1" dirty="0">
-                <a:ea typeface="Poppins Semi-Bold"/>
-                <a:cs typeface="Poppins Semi-Bold"/>
-                <a:sym typeface="Poppins Semi-Bold"/>
-              </a:rPr>
-              <a:t>M.  </a:t>
-            </a:r>
-            <a:r>
-              <a:rPr lang="fr-FR" sz="2400" b="1" dirty="0">
-                <a:effectLst/>
-                <a:ea typeface="Calibri" panose="020F0502020204030204" pitchFamily="34" charset="0"/>
-                <a:cs typeface="Arial" panose="020B0604020202020204" pitchFamily="34" charset="0"/>
-              </a:rPr>
-              <a:t>KHTOU </a:t>
-            </a:r>
-            <a:r>
-              <a:rPr lang="fr-FR" sz="2400" b="1" dirty="0" err="1">
-                <a:effectLst/>
-                <a:ea typeface="Calibri" panose="020F0502020204030204" pitchFamily="34" charset="0"/>
-                <a:cs typeface="Arial" panose="020B0604020202020204" pitchFamily="34" charset="0"/>
-              </a:rPr>
-              <a:t>Otmane</a:t>
-            </a:r>
-            <a:r>
-              <a:rPr lang="fr-FR" sz="2400" b="1" dirty="0">
-                <a:effectLst/>
-                <a:ea typeface="Calibri" panose="020F0502020204030204" pitchFamily="34" charset="0"/>
-                <a:cs typeface="Arial" panose="020B0604020202020204" pitchFamily="34" charset="0"/>
-              </a:rPr>
-              <a:t> </a:t>
-            </a:r>
-            <a:r>
-              <a:rPr lang="fr-FR" sz="2400" b="1" dirty="0">
-                <a:ea typeface="Calibri" panose="020F0502020204030204" pitchFamily="34" charset="0"/>
-                <a:cs typeface="Arial" panose="020B0604020202020204" pitchFamily="34" charset="0"/>
-              </a:rPr>
-              <a:t> </a:t>
-            </a:r>
-            <a:endParaRPr lang="fr-FR" sz="2400" b="1" dirty="0">
-              <a:effectLst/>
-              <a:ea typeface="Calibri" panose="020F0502020204030204" pitchFamily="34" charset="0"/>
-              <a:cs typeface="Arial" panose="020B0604020202020204" pitchFamily="34" charset="0"/>
             </a:endParaRPr>
           </a:p>
         </p:txBody>
@@ -4316,7 +6682,7 @@
           <p:nvPr/>
         </p:nvPicPr>
         <p:blipFill rotWithShape="1">
-          <a:blip r:embed="rId4">
+          <a:blip r:embed="rId5">
             <a:extLst>
               <a:ext uri="{28A0092B-C50C-407E-A947-70E740481C1C}">
                 <a14:useLocalDpi xmlns:a14="http://schemas.microsoft.com/office/drawing/2010/main" val="0"/>
@@ -4395,6 +6761,59 @@
           <a:chExt cx="0" cy="0"/>
         </a:xfrm>
       </p:grpSpPr>
+      <p:sp>
+        <p:nvSpPr>
+          <p:cNvPr id="2" name="TextBox 1">
+            <a:extLst>
+              <a:ext uri="{FF2B5EF4-FFF2-40B4-BE49-F238E27FC236}">
+                <a16:creationId xmlns:a16="http://schemas.microsoft.com/office/drawing/2014/main" id="{189D6DAB-F16F-1676-639E-000221BCC5F1}"/>
+              </a:ext>
+            </a:extLst>
+          </p:cNvPr>
+          <p:cNvSpPr txBox="1"/>
+          <p:nvPr/>
+        </p:nvSpPr>
+        <p:spPr>
+          <a:xfrm>
+            <a:off x="2264225" y="-2658481"/>
+            <a:ext cx="7663547" cy="2308324"/>
+          </a:xfrm>
+          <a:prstGeom prst="rect">
+            <a:avLst/>
+          </a:prstGeom>
+          <a:noFill/>
+        </p:spPr>
+        <p:txBody>
+          <a:bodyPr wrap="square">
+            <a:spAutoFit/>
+          </a:bodyPr>
+          <a:lstStyle/>
+          <a:p>
+            <a:pPr algn="ctr"/>
+            <a:r>
+              <a:rPr lang="fr-FR" sz="2400" b="1" dirty="0"/>
+              <a:t>Pour modéliser des relations complexes, nous avons utilisé plusieurs algorithmes d'apprentissage automatique (</a:t>
+            </a:r>
+            <a:r>
+              <a:rPr lang="en-US" sz="2400" b="1" dirty="0"/>
+              <a:t>Decision Trees, Random Forests, </a:t>
+            </a:r>
+            <a:r>
+              <a:rPr lang="fr-FR" sz="2400" b="1" dirty="0"/>
+              <a:t>SVM, </a:t>
+            </a:r>
+            <a:r>
+              <a:rPr lang="fr-FR" sz="2400" b="1" dirty="0" err="1"/>
+              <a:t>XGBoost</a:t>
+            </a:r>
+            <a:r>
+              <a:rPr lang="fr-FR" sz="2400" b="1" dirty="0"/>
+              <a:t>). Ces modèles apprennent automatiquement des motifs et représentations à partir des données brutes, permettant des prédictions robustes.</a:t>
+            </a:r>
+            <a:endParaRPr lang="en-US" sz="2400" b="1" dirty="0"/>
+          </a:p>
+        </p:txBody>
+      </p:sp>
       <p:sp>
         <p:nvSpPr>
           <p:cNvPr id="6" name="Rectangle: Rounded Corners 5">
@@ -5194,6 +7613,172 @@
       </p:grpSpPr>
       <p:sp>
         <p:nvSpPr>
+          <p:cNvPr id="12" name="TextBox 11">
+            <a:extLst>
+              <a:ext uri="{FF2B5EF4-FFF2-40B4-BE49-F238E27FC236}">
+                <a16:creationId xmlns:a16="http://schemas.microsoft.com/office/drawing/2014/main" id="{7F6E8A80-D890-641B-9CCC-E7EE68F09873}"/>
+              </a:ext>
+            </a:extLst>
+          </p:cNvPr>
+          <p:cNvSpPr txBox="1"/>
+          <p:nvPr/>
+        </p:nvSpPr>
+        <p:spPr>
+          <a:xfrm>
+            <a:off x="2410308" y="-1823406"/>
+            <a:ext cx="8182093" cy="1077218"/>
+          </a:xfrm>
+          <a:prstGeom prst="rect">
+            <a:avLst/>
+          </a:prstGeom>
+          <a:noFill/>
+        </p:spPr>
+        <p:txBody>
+          <a:bodyPr wrap="square" rtlCol="0">
+            <a:spAutoFit/>
+          </a:bodyPr>
+          <a:lstStyle/>
+          <a:p>
+            <a:pPr algn="ctr"/>
+            <a:r>
+              <a:rPr lang="fr-FR" sz="3200" b="1" dirty="0"/>
+              <a:t>Le SVM avec noyau RBF (C=100, gamma=1) offre :</a:t>
+            </a:r>
+            <a:endParaRPr lang="en-US" sz="3200" b="1" dirty="0"/>
+          </a:p>
+        </p:txBody>
+      </p:sp>
+      <p:sp>
+        <p:nvSpPr>
+          <p:cNvPr id="11" name="TextBox 10">
+            <a:extLst>
+              <a:ext uri="{FF2B5EF4-FFF2-40B4-BE49-F238E27FC236}">
+                <a16:creationId xmlns:a16="http://schemas.microsoft.com/office/drawing/2014/main" id="{1DE10C50-DE93-4576-91EE-16D745E23C0F}"/>
+              </a:ext>
+            </a:extLst>
+          </p:cNvPr>
+          <p:cNvSpPr txBox="1"/>
+          <p:nvPr/>
+        </p:nvSpPr>
+        <p:spPr>
+          <a:xfrm>
+            <a:off x="2264226" y="2597713"/>
+            <a:ext cx="7663547" cy="2308324"/>
+          </a:xfrm>
+          <a:prstGeom prst="rect">
+            <a:avLst/>
+          </a:prstGeom>
+          <a:noFill/>
+        </p:spPr>
+        <p:txBody>
+          <a:bodyPr wrap="square">
+            <a:spAutoFit/>
+          </a:bodyPr>
+          <a:lstStyle/>
+          <a:p>
+            <a:pPr algn="ctr"/>
+            <a:r>
+              <a:rPr lang="fr-FR" sz="2400" b="1" dirty="0">
+                <a:effectLst/>
+              </a:rPr>
+              <a:t>Pour modéliser des relations complexes, nous avons utilisé plusieurs algorithmes d'apprentissage automatique (</a:t>
+            </a:r>
+            <a:r>
+              <a:rPr lang="en-US" sz="2400" b="1" dirty="0"/>
+              <a:t>Decision Trees, Random Forests, </a:t>
+            </a:r>
+            <a:r>
+              <a:rPr lang="fr-FR" sz="2400" b="1" dirty="0">
+                <a:effectLst/>
+              </a:rPr>
+              <a:t>SVM, </a:t>
+            </a:r>
+            <a:r>
+              <a:rPr lang="fr-FR" sz="2400" b="1" dirty="0" err="1">
+                <a:effectLst/>
+              </a:rPr>
+              <a:t>XGBoost</a:t>
+            </a:r>
+            <a:r>
+              <a:rPr lang="fr-FR" sz="2400" b="1" dirty="0">
+                <a:effectLst/>
+              </a:rPr>
+              <a:t>). Ces modèles apprennent automatiquement des motifs et représentations à partir des données brutes, permettant des prédictions robustes.</a:t>
+            </a:r>
+            <a:endParaRPr lang="en-US" sz="2400" b="1" dirty="0"/>
+          </a:p>
+        </p:txBody>
+      </p:sp>
+      <p:sp>
+        <p:nvSpPr>
+          <p:cNvPr id="7" name="TextBox 6">
+            <a:extLst>
+              <a:ext uri="{FF2B5EF4-FFF2-40B4-BE49-F238E27FC236}">
+                <a16:creationId xmlns:a16="http://schemas.microsoft.com/office/drawing/2014/main" id="{90D1E134-CE28-0B80-7F1D-691E6A2C98C5}"/>
+              </a:ext>
+            </a:extLst>
+          </p:cNvPr>
+          <p:cNvSpPr txBox="1"/>
+          <p:nvPr/>
+        </p:nvSpPr>
+        <p:spPr>
+          <a:xfrm>
+            <a:off x="2371068" y="7373028"/>
+            <a:ext cx="7943367" cy="1754326"/>
+          </a:xfrm>
+          <a:prstGeom prst="rect">
+            <a:avLst/>
+          </a:prstGeom>
+          <a:noFill/>
+        </p:spPr>
+        <p:txBody>
+          <a:bodyPr wrap="square" rtlCol="0">
+            <a:spAutoFit/>
+          </a:bodyPr>
+          <a:lstStyle/>
+          <a:p>
+            <a:pPr marL="457200" indent="-457200" algn="ctr">
+              <a:buFont typeface="Wingdings" panose="05000000000000000000" pitchFamily="2" charset="2"/>
+              <a:buChar char="q"/>
+            </a:pPr>
+            <a:r>
+              <a:rPr lang="en-US" sz="3600" b="1" dirty="0"/>
+              <a:t>Accuracy : 86.84 %</a:t>
+            </a:r>
+          </a:p>
+          <a:p>
+            <a:pPr marL="457200" indent="-457200" algn="ctr">
+              <a:buFont typeface="Wingdings" panose="05000000000000000000" pitchFamily="2" charset="2"/>
+              <a:buChar char="q"/>
+            </a:pPr>
+            <a:r>
+              <a:rPr lang="en-US" sz="3600" b="1" dirty="0"/>
+              <a:t>F1-score </a:t>
+            </a:r>
+            <a:r>
+              <a:rPr lang="en-US" sz="3600" b="1" dirty="0" err="1"/>
+              <a:t>pondéré</a:t>
+            </a:r>
+            <a:r>
+              <a:rPr lang="en-US" sz="3600" b="1" dirty="0"/>
+              <a:t> : 86.8 %</a:t>
+            </a:r>
+          </a:p>
+          <a:p>
+            <a:pPr marL="457200" indent="-457200" algn="ctr">
+              <a:buFont typeface="Wingdings" panose="05000000000000000000" pitchFamily="2" charset="2"/>
+              <a:buChar char="q"/>
+            </a:pPr>
+            <a:r>
+              <a:rPr lang="fr-FR" sz="3600" b="1" dirty="0"/>
+              <a:t>Faibles erreurs sur classes majoritaires</a:t>
+            </a:r>
+            <a:endParaRPr lang="en-US" sz="3600" b="1" dirty="0"/>
+          </a:p>
+        </p:txBody>
+      </p:sp>
+      <p:sp>
+        <p:nvSpPr>
           <p:cNvPr id="6" name="Rectangle: Rounded Corners 5">
             <a:extLst>
               <a:ext uri="{FF2B5EF4-FFF2-40B4-BE49-F238E27FC236}">
@@ -5800,14 +8385,14 @@
           <p:nvPr>
             <p:extLst>
               <p:ext uri="{D42A27DB-BD31-4B8C-83A1-F6EECF244321}">
-                <p14:modId xmlns:p14="http://schemas.microsoft.com/office/powerpoint/2010/main" val="3641549067"/>
+                <p14:modId xmlns:p14="http://schemas.microsoft.com/office/powerpoint/2010/main" val="1344979693"/>
               </p:ext>
             </p:extLst>
           </p:nvPr>
         </p:nvGraphicFramePr>
         <p:xfrm>
           <a:off x="1654628" y="8102190"/>
-          <a:ext cx="8882744" cy="4000874"/>
+          <a:ext cx="8882744" cy="4332199"/>
         </p:xfrm>
         <a:graphic>
           <a:graphicData uri="http://schemas.openxmlformats.org/drawingml/2006/table">
@@ -6863,7 +9448,7 @@
                   </a:ext>
                 </a:extLst>
               </a:tr>
-              <a:tr h="622394">
+              <a:tr h="837859">
                 <a:tc>
                   <a:txBody>
                     <a:bodyPr/>
@@ -7214,7 +9799,7 @@
                   </a:ext>
                 </a:extLst>
               </a:tr>
-              <a:tr h="479226">
+              <a:tr h="795652">
                 <a:tc>
                   <a:txBody>
                     <a:bodyPr/>
@@ -7929,6 +10514,110 @@
           </a:graphicData>
         </a:graphic>
       </p:graphicFrame>
+      <p:sp>
+        <p:nvSpPr>
+          <p:cNvPr id="2" name="Rectangle 1">
+            <a:extLst>
+              <a:ext uri="{FF2B5EF4-FFF2-40B4-BE49-F238E27FC236}">
+                <a16:creationId xmlns:a16="http://schemas.microsoft.com/office/drawing/2014/main" id="{D52C8B7A-2091-0EFD-F9D9-043F05C51B0D}"/>
+              </a:ext>
+            </a:extLst>
+          </p:cNvPr>
+          <p:cNvSpPr/>
+          <p:nvPr/>
+        </p:nvSpPr>
+        <p:spPr>
+          <a:xfrm>
+            <a:off x="-5880546" y="5900831"/>
+            <a:ext cx="777604" cy="309470"/>
+          </a:xfrm>
+          <a:prstGeom prst="rect">
+            <a:avLst/>
+          </a:prstGeom>
+          <a:solidFill>
+            <a:schemeClr val="accent2"/>
+          </a:solidFill>
+          <a:ln>
+            <a:noFill/>
+          </a:ln>
+        </p:spPr>
+        <p:style>
+          <a:lnRef idx="2">
+            <a:schemeClr val="accent1">
+              <a:shade val="15000"/>
+            </a:schemeClr>
+          </a:lnRef>
+          <a:fillRef idx="1">
+            <a:schemeClr val="accent1"/>
+          </a:fillRef>
+          <a:effectRef idx="0">
+            <a:schemeClr val="accent1"/>
+          </a:effectRef>
+          <a:fontRef idx="minor">
+            <a:schemeClr val="lt1"/>
+          </a:fontRef>
+        </p:style>
+        <p:txBody>
+          <a:bodyPr rtlCol="0" anchor="ctr"/>
+          <a:lstStyle/>
+          <a:p>
+            <a:pPr algn="ctr"/>
+            <a:endParaRPr lang="en-US"/>
+          </a:p>
+        </p:txBody>
+      </p:sp>
+      <p:sp>
+        <p:nvSpPr>
+          <p:cNvPr id="5" name="Rectangle 4">
+            <a:extLst>
+              <a:ext uri="{FF2B5EF4-FFF2-40B4-BE49-F238E27FC236}">
+                <a16:creationId xmlns:a16="http://schemas.microsoft.com/office/drawing/2014/main" id="{0D862504-B52C-412B-8BB9-34A6D10B1F51}"/>
+              </a:ext>
+            </a:extLst>
+          </p:cNvPr>
+          <p:cNvSpPr/>
+          <p:nvPr/>
+        </p:nvSpPr>
+        <p:spPr>
+          <a:xfrm>
+            <a:off x="-9096649" y="3498540"/>
+            <a:ext cx="7209810" cy="309470"/>
+          </a:xfrm>
+          <a:prstGeom prst="rect">
+            <a:avLst/>
+          </a:prstGeom>
+          <a:solidFill>
+            <a:schemeClr val="accent2"/>
+          </a:solidFill>
+          <a:ln>
+            <a:noFill/>
+          </a:ln>
+        </p:spPr>
+        <p:style>
+          <a:lnRef idx="2">
+            <a:schemeClr val="accent1">
+              <a:shade val="15000"/>
+            </a:schemeClr>
+          </a:lnRef>
+          <a:fillRef idx="1">
+            <a:schemeClr val="accent1"/>
+          </a:fillRef>
+          <a:effectRef idx="0">
+            <a:schemeClr val="accent1"/>
+          </a:effectRef>
+          <a:fontRef idx="minor">
+            <a:schemeClr val="lt1"/>
+          </a:fontRef>
+        </p:style>
+        <p:txBody>
+          <a:bodyPr rtlCol="0" anchor="ctr"/>
+          <a:lstStyle/>
+          <a:p>
+            <a:pPr algn="ctr"/>
+            <a:endParaRPr lang="en-US"/>
+          </a:p>
+        </p:txBody>
+      </p:sp>
     </p:spTree>
     <p:extLst>
       <p:ext uri="{BB962C8B-B14F-4D97-AF65-F5344CB8AC3E}">
@@ -7972,14 +10661,36 @@
                             </p:stCondLst>
                             <p:childTnLst>
                               <p:par>
-                                <p:cTn id="5" presetID="35" presetClass="path" presetSubtype="0" accel="50000" decel="50000" fill="hold" grpId="0" nodeType="clickEffect">
+                                <p:cTn id="5" presetID="42" presetClass="path" presetSubtype="0" accel="50000" decel="50000" fill="hold" grpId="0" nodeType="clickEffect">
+                                  <p:stCondLst>
+                                    <p:cond delay="0"/>
+                                  </p:stCondLst>
+                                  <p:childTnLst>
+                                    <p:animMotion origin="layout" path="M 0 -7.40741E-7 L 0 0.81181 " pathEditMode="relative" rAng="0" ptsTypes="AA">
+                                      <p:cBhvr>
+                                        <p:cTn id="6" dur="900" fill="hold"/>
+                                        <p:tgtEl>
+                                          <p:spTgt spid="11"/>
+                                        </p:tgtEl>
+                                        <p:attrNameLst>
+                                          <p:attrName>ppt_x</p:attrName>
+                                          <p:attrName>ppt_y</p:attrName>
+                                        </p:attrNameLst>
+                                      </p:cBhvr>
+                                      <p:rCtr x="0" y="40579"/>
+                                    </p:animMotion>
+                                  </p:childTnLst>
+                                </p:cTn>
+                              </p:par>
+                              <p:par>
+                                <p:cTn id="7" presetID="35" presetClass="path" presetSubtype="0" accel="50000" decel="50000" fill="hold" grpId="0" nodeType="withEffect">
                                   <p:stCondLst>
                                     <p:cond delay="0"/>
                                   </p:stCondLst>
                                   <p:childTnLst>
                                     <p:animMotion origin="layout" path="M 2.5E-6 -1.11111E-6 L -0.89401 -0.0081 " pathEditMode="relative" rAng="0" ptsTypes="AA">
                                       <p:cBhvr>
-                                        <p:cTn id="6" dur="1000" fill="hold"/>
+                                        <p:cTn id="8" dur="1000" fill="hold"/>
                                         <p:tgtEl>
                                           <p:spTgt spid="3"/>
                                         </p:tgtEl>
@@ -8000,26 +10711,26 @@
                     </p:cTn>
                   </p:par>
                   <p:par>
-                    <p:cTn id="7" fill="hold">
+                    <p:cTn id="9" fill="hold">
                       <p:stCondLst>
                         <p:cond delay="indefinite"/>
                       </p:stCondLst>
                       <p:childTnLst>
                         <p:par>
-                          <p:cTn id="8" fill="hold">
+                          <p:cTn id="10" fill="hold">
                             <p:stCondLst>
                               <p:cond delay="0"/>
                             </p:stCondLst>
                             <p:childTnLst>
                               <p:par>
-                                <p:cTn id="9" presetID="35" presetClass="path" presetSubtype="0" accel="50000" decel="50000" fill="hold" grpId="0" nodeType="clickEffect">
+                                <p:cTn id="11" presetID="35" presetClass="path" presetSubtype="0" accel="50000" decel="50000" fill="hold" grpId="0" nodeType="clickEffect">
                                   <p:stCondLst>
                                     <p:cond delay="0"/>
                                   </p:stCondLst>
                                   <p:childTnLst>
                                     <p:animMotion origin="layout" path="M -2.29167E-6 1.85185E-6 L -0.89219 0.00185 " pathEditMode="relative" rAng="0" ptsTypes="AA">
                                       <p:cBhvr>
-                                        <p:cTn id="10" dur="1000" fill="hold"/>
+                                        <p:cTn id="12" dur="1000" fill="hold"/>
                                         <p:tgtEl>
                                           <p:spTgt spid="19"/>
                                         </p:tgtEl>
@@ -8040,26 +10751,26 @@
                     </p:cTn>
                   </p:par>
                   <p:par>
-                    <p:cTn id="11" fill="hold">
+                    <p:cTn id="13" fill="hold">
                       <p:stCondLst>
                         <p:cond delay="indefinite"/>
                       </p:stCondLst>
                       <p:childTnLst>
                         <p:par>
-                          <p:cTn id="12" fill="hold">
+                          <p:cTn id="14" fill="hold">
                             <p:stCondLst>
                               <p:cond delay="0"/>
                             </p:stCondLst>
                             <p:childTnLst>
                               <p:par>
-                                <p:cTn id="13" presetID="35" presetClass="path" presetSubtype="0" accel="50000" decel="50000" fill="hold" grpId="0" nodeType="clickEffect">
+                                <p:cTn id="15" presetID="35" presetClass="path" presetSubtype="0" accel="50000" decel="50000" fill="hold" grpId="0" nodeType="clickEffect">
                                   <p:stCondLst>
                                     <p:cond delay="0"/>
                                   </p:stCondLst>
                                   <p:childTnLst>
                                     <p:animMotion origin="layout" path="M 2.91667E-6 4.81481E-6 L -0.88086 4.81481E-6 " pathEditMode="relative" rAng="0" ptsTypes="AA">
                                       <p:cBhvr>
-                                        <p:cTn id="14" dur="1000" fill="hold"/>
+                                        <p:cTn id="16" dur="1000" fill="hold"/>
                                         <p:tgtEl>
                                           <p:spTgt spid="20"/>
                                         </p:tgtEl>
@@ -8080,26 +10791,26 @@
                     </p:cTn>
                   </p:par>
                   <p:par>
-                    <p:cTn id="15" fill="hold">
+                    <p:cTn id="17" fill="hold">
                       <p:stCondLst>
                         <p:cond delay="indefinite"/>
                       </p:stCondLst>
                       <p:childTnLst>
                         <p:par>
-                          <p:cTn id="16" fill="hold">
+                          <p:cTn id="18" fill="hold">
                             <p:stCondLst>
                               <p:cond delay="0"/>
                             </p:stCondLst>
                             <p:childTnLst>
                               <p:par>
-                                <p:cTn id="17" presetID="35" presetClass="path" presetSubtype="0" accel="50000" decel="50000" fill="hold" grpId="0" nodeType="clickEffect">
+                                <p:cTn id="19" presetID="35" presetClass="path" presetSubtype="0" accel="50000" decel="50000" fill="hold" grpId="0" nodeType="clickEffect">
                                   <p:stCondLst>
                                     <p:cond delay="0"/>
                                   </p:stCondLst>
                                   <p:childTnLst>
                                     <p:animMotion origin="layout" path="M -1.875E-6 -7.40741E-7 L -0.87435 -7.40741E-7 " pathEditMode="relative" rAng="0" ptsTypes="AA">
                                       <p:cBhvr>
-                                        <p:cTn id="18" dur="1000" fill="hold"/>
+                                        <p:cTn id="20" dur="1000" fill="hold"/>
                                         <p:tgtEl>
                                           <p:spTgt spid="21"/>
                                         </p:tgtEl>
@@ -8120,26 +10831,26 @@
                     </p:cTn>
                   </p:par>
                   <p:par>
-                    <p:cTn id="19" fill="hold">
+                    <p:cTn id="21" fill="hold">
                       <p:stCondLst>
                         <p:cond delay="indefinite"/>
                       </p:stCondLst>
                       <p:childTnLst>
                         <p:par>
-                          <p:cTn id="20" fill="hold">
+                          <p:cTn id="22" fill="hold">
                             <p:stCondLst>
                               <p:cond delay="0"/>
                             </p:stCondLst>
                             <p:childTnLst>
                               <p:par>
-                                <p:cTn id="21" presetID="35" presetClass="path" presetSubtype="0" accel="50000" decel="50000" fill="hold" grpId="0" nodeType="clickEffect">
+                                <p:cTn id="23" presetID="35" presetClass="path" presetSubtype="0" accel="50000" decel="50000" fill="hold" grpId="0" nodeType="clickEffect">
                                   <p:stCondLst>
                                     <p:cond delay="0"/>
                                   </p:stCondLst>
                                   <p:childTnLst>
                                     <p:animMotion origin="layout" path="M 3.33333E-6 2.22222E-6 L -0.85352 2.22222E-6 " pathEditMode="relative" rAng="0" ptsTypes="AA">
                                       <p:cBhvr>
-                                        <p:cTn id="22" dur="1000" fill="hold"/>
+                                        <p:cTn id="24" dur="1000" fill="hold"/>
                                         <p:tgtEl>
                                           <p:spTgt spid="22"/>
                                         </p:tgtEl>
@@ -8160,26 +10871,26 @@
                     </p:cTn>
                   </p:par>
                   <p:par>
-                    <p:cTn id="23" fill="hold">
+                    <p:cTn id="25" fill="hold">
                       <p:stCondLst>
                         <p:cond delay="indefinite"/>
                       </p:stCondLst>
                       <p:childTnLst>
                         <p:par>
-                          <p:cTn id="24" fill="hold">
+                          <p:cTn id="26" fill="hold">
                             <p:stCondLst>
                               <p:cond delay="0"/>
                             </p:stCondLst>
                             <p:childTnLst>
                               <p:par>
-                                <p:cTn id="25" presetID="42" presetClass="path" presetSubtype="0" accel="50000" decel="50000" fill="hold" grpId="1" nodeType="clickEffect">
+                                <p:cTn id="27" presetID="42" presetClass="path" presetSubtype="0" accel="50000" decel="50000" fill="hold" grpId="1" nodeType="clickEffect">
                                   <p:stCondLst>
                                     <p:cond delay="0"/>
                                   </p:stCondLst>
                                   <p:childTnLst>
                                     <p:animMotion origin="layout" path="M -0.89401 -0.0081 L -0.89336 1.11736 " pathEditMode="relative" rAng="0" ptsTypes="AA">
                                       <p:cBhvr>
-                                        <p:cTn id="26" dur="2000" fill="hold"/>
+                                        <p:cTn id="28" dur="2000" fill="hold"/>
                                         <p:tgtEl>
                                           <p:spTgt spid="3"/>
                                         </p:tgtEl>
@@ -8194,14 +10905,14 @@
                                 </p:cTn>
                               </p:par>
                               <p:par>
-                                <p:cTn id="27" presetID="42" presetClass="path" presetSubtype="0" accel="50000" decel="50000" fill="hold" grpId="1" nodeType="withEffect">
+                                <p:cTn id="29" presetID="42" presetClass="path" presetSubtype="0" accel="50000" decel="50000" fill="hold" grpId="1" nodeType="withEffect">
                                   <p:stCondLst>
                                     <p:cond delay="0"/>
                                   </p:stCondLst>
                                   <p:childTnLst>
                                     <p:animMotion origin="layout" path="M -0.89219 0.00185 L -0.89557 1.08032 " pathEditMode="relative" rAng="0" ptsTypes="AA">
                                       <p:cBhvr>
-                                        <p:cTn id="28" dur="2000" fill="hold"/>
+                                        <p:cTn id="30" dur="2000" fill="hold"/>
                                         <p:tgtEl>
                                           <p:spTgt spid="19"/>
                                         </p:tgtEl>
@@ -8216,14 +10927,14 @@
                                 </p:cTn>
                               </p:par>
                               <p:par>
-                                <p:cTn id="29" presetID="42" presetClass="path" presetSubtype="0" accel="50000" decel="50000" fill="hold" grpId="1" nodeType="withEffect">
+                                <p:cTn id="31" presetID="42" presetClass="path" presetSubtype="0" accel="50000" decel="50000" fill="hold" grpId="1" nodeType="withEffect">
                                   <p:stCondLst>
                                     <p:cond delay="0"/>
                                   </p:stCondLst>
                                   <p:childTnLst>
                                     <p:animMotion origin="layout" path="M -0.88086 4.81481E-6 L -0.88086 1.05625 " pathEditMode="relative" rAng="0" ptsTypes="AA">
                                       <p:cBhvr>
-                                        <p:cTn id="30" dur="2000" fill="hold"/>
+                                        <p:cTn id="32" dur="2000" fill="hold"/>
                                         <p:tgtEl>
                                           <p:spTgt spid="20"/>
                                         </p:tgtEl>
@@ -8238,14 +10949,14 @@
                                 </p:cTn>
                               </p:par>
                               <p:par>
-                                <p:cTn id="31" presetID="42" presetClass="path" presetSubtype="0" accel="50000" decel="50000" fill="hold" grpId="1" nodeType="withEffect">
+                                <p:cTn id="33" presetID="42" presetClass="path" presetSubtype="0" accel="50000" decel="50000" fill="hold" grpId="1" nodeType="withEffect">
                                   <p:stCondLst>
                                     <p:cond delay="0"/>
                                   </p:stCondLst>
                                   <p:childTnLst>
                                     <p:animMotion origin="layout" path="M -0.87435 -7.40741E-7 L -0.87096 1.01945 " pathEditMode="relative" rAng="0" ptsTypes="AA">
                                       <p:cBhvr>
-                                        <p:cTn id="32" dur="2000" fill="hold"/>
+                                        <p:cTn id="34" dur="2000" fill="hold"/>
                                         <p:tgtEl>
                                           <p:spTgt spid="21"/>
                                         </p:tgtEl>
@@ -8260,14 +10971,14 @@
                                 </p:cTn>
                               </p:par>
                               <p:par>
-                                <p:cTn id="33" presetID="42" presetClass="path" presetSubtype="0" accel="50000" decel="50000" fill="hold" grpId="1" nodeType="withEffect">
+                                <p:cTn id="35" presetID="42" presetClass="path" presetSubtype="0" accel="50000" decel="50000" fill="hold" grpId="1" nodeType="withEffect">
                                   <p:stCondLst>
                                     <p:cond delay="0"/>
                                   </p:stCondLst>
                                   <p:childTnLst>
                                     <p:animMotion origin="layout" path="M -0.85352 2.22222E-6 L -0.85612 0.99097 " pathEditMode="relative" rAng="0" ptsTypes="AA">
                                       <p:cBhvr>
-                                        <p:cTn id="34" dur="2000" fill="hold"/>
+                                        <p:cTn id="36" dur="2000" fill="hold"/>
                                         <p:tgtEl>
                                           <p:spTgt spid="22"/>
                                         </p:tgtEl>
@@ -8282,14 +10993,14 @@
                                 </p:cTn>
                               </p:par>
                               <p:par>
-                                <p:cTn id="35" presetID="42" presetClass="path" presetSubtype="0" accel="50000" decel="50000" fill="hold" nodeType="withEffect">
+                                <p:cTn id="37" presetID="42" presetClass="path" presetSubtype="0" accel="50000" decel="50000" fill="hold" nodeType="withEffect">
                                   <p:stCondLst>
                                     <p:cond delay="0"/>
                                   </p:stCondLst>
                                   <p:childTnLst>
                                     <p:animMotion origin="layout" path="M 1.45833E-6 1.85185E-6 L 1.45833E-6 -0.89283 " pathEditMode="relative" rAng="0" ptsTypes="AA">
                                       <p:cBhvr>
-                                        <p:cTn id="36" dur="2000" fill="hold"/>
+                                        <p:cTn id="38" dur="2300" fill="hold"/>
                                         <p:tgtEl>
                                           <p:spTgt spid="23"/>
                                         </p:tgtEl>
@@ -8331,6 +11042,7 @@
       </p:par>
     </p:tnLst>
     <p:bldLst>
+      <p:bldP spid="11" grpId="0"/>
       <p:bldP spid="3" grpId="0" animBg="1"/>
       <p:bldP spid="3" grpId="1" animBg="1"/>
       <p:bldP spid="19" grpId="0" animBg="1"/>
@@ -8369,6 +11081,58 @@
           <a:chExt cx="0" cy="0"/>
         </a:xfrm>
       </p:grpSpPr>
+      <p:sp>
+        <p:nvSpPr>
+          <p:cNvPr id="11" name="Rectangle 10">
+            <a:extLst>
+              <a:ext uri="{FF2B5EF4-FFF2-40B4-BE49-F238E27FC236}">
+                <a16:creationId xmlns:a16="http://schemas.microsoft.com/office/drawing/2014/main" id="{00A0DB9C-3632-6025-1AC7-EDB8177FFF7A}"/>
+              </a:ext>
+            </a:extLst>
+          </p:cNvPr>
+          <p:cNvSpPr/>
+          <p:nvPr/>
+        </p:nvSpPr>
+        <p:spPr>
+          <a:xfrm>
+            <a:off x="4197591" y="5900831"/>
+            <a:ext cx="4368800" cy="309470"/>
+          </a:xfrm>
+          <a:prstGeom prst="rect">
+            <a:avLst/>
+          </a:prstGeom>
+          <a:solidFill>
+            <a:schemeClr val="accent2"/>
+          </a:solidFill>
+          <a:ln>
+            <a:noFill/>
+          </a:ln>
+        </p:spPr>
+        <p:style>
+          <a:lnRef idx="2">
+            <a:schemeClr val="accent1">
+              <a:shade val="15000"/>
+            </a:schemeClr>
+          </a:lnRef>
+          <a:fillRef idx="1">
+            <a:schemeClr val="accent1"/>
+          </a:fillRef>
+          <a:effectRef idx="0">
+            <a:schemeClr val="accent1"/>
+          </a:effectRef>
+          <a:fontRef idx="minor">
+            <a:schemeClr val="lt1"/>
+          </a:fontRef>
+        </p:style>
+        <p:txBody>
+          <a:bodyPr rtlCol="0" anchor="ctr"/>
+          <a:lstStyle/>
+          <a:p>
+            <a:pPr algn="ctr"/>
+            <a:endParaRPr lang="en-US"/>
+          </a:p>
+        </p:txBody>
+      </p:sp>
       <p:sp>
         <p:nvSpPr>
           <p:cNvPr id="6" name="Rectangle: Rounded Corners 5">
@@ -8437,7 +11201,7 @@
         </p:nvSpPr>
         <p:spPr>
           <a:xfrm>
-            <a:off x="9853109" y="-1517788"/>
+            <a:off x="9886976" y="-1517788"/>
             <a:ext cx="4034971" cy="4034971"/>
           </a:xfrm>
           <a:prstGeom prst="ellipse">
@@ -8643,7 +11407,7 @@
         </p:nvSpPr>
         <p:spPr>
           <a:xfrm>
-            <a:off x="2410308" y="2517183"/>
+            <a:off x="2410308" y="2241548"/>
             <a:ext cx="8182093" cy="1077218"/>
           </a:xfrm>
           <a:prstGeom prst="rect">
@@ -8680,8 +11444,8 @@
         </p:nvSpPr>
         <p:spPr>
           <a:xfrm>
-            <a:off x="2562817" y="3779930"/>
-            <a:ext cx="7066366" cy="2062103"/>
+            <a:off x="2410308" y="3974746"/>
+            <a:ext cx="7943367" cy="1754326"/>
           </a:xfrm>
           <a:prstGeom prst="rect">
             <a:avLst/>
@@ -8695,42 +11459,42 @@
           <a:lstStyle/>
           <a:p>
             <a:pPr marL="457200" indent="-457200" algn="ctr">
-              <a:buFont typeface="Arial" panose="020B0604020202020204" pitchFamily="34" charset="0"/>
-              <a:buChar char="•"/>
+              <a:buFont typeface="Wingdings" panose="05000000000000000000" pitchFamily="2" charset="2"/>
+              <a:buChar char="q"/>
             </a:pPr>
             <a:r>
-              <a:rPr lang="en-US" sz="3200" b="1" dirty="0"/>
+              <a:rPr lang="en-US" sz="3600" b="1" dirty="0"/>
               <a:t>Accuracy : 86.84 %</a:t>
             </a:r>
           </a:p>
           <a:p>
             <a:pPr marL="457200" indent="-457200" algn="ctr">
-              <a:buFont typeface="Arial" panose="020B0604020202020204" pitchFamily="34" charset="0"/>
-              <a:buChar char="•"/>
+              <a:buFont typeface="Wingdings" panose="05000000000000000000" pitchFamily="2" charset="2"/>
+              <a:buChar char="q"/>
             </a:pPr>
             <a:r>
-              <a:rPr lang="en-US" sz="3200" b="1" dirty="0"/>
+              <a:rPr lang="en-US" sz="3600" b="1" dirty="0"/>
               <a:t>F1-score </a:t>
             </a:r>
             <a:r>
-              <a:rPr lang="en-US" sz="3200" b="1" dirty="0" err="1"/>
+              <a:rPr lang="en-US" sz="3600" b="1" dirty="0" err="1"/>
               <a:t>pondéré</a:t>
             </a:r>
             <a:r>
-              <a:rPr lang="en-US" sz="3200" b="1" dirty="0"/>
-              <a:t> : 0.868</a:t>
+              <a:rPr lang="en-US" sz="3600" b="1" dirty="0"/>
+              <a:t> : 86.8 %</a:t>
             </a:r>
           </a:p>
           <a:p>
             <a:pPr marL="457200" indent="-457200" algn="ctr">
-              <a:buFont typeface="Arial" panose="020B0604020202020204" pitchFamily="34" charset="0"/>
-              <a:buChar char="•"/>
+              <a:buFont typeface="Wingdings" panose="05000000000000000000" pitchFamily="2" charset="2"/>
+              <a:buChar char="q"/>
             </a:pPr>
             <a:r>
-              <a:rPr lang="fr-FR" sz="3200" b="1" dirty="0"/>
+              <a:rPr lang="fr-FR" sz="3600" b="1" dirty="0"/>
               <a:t>Faibles erreurs sur classes majoritaires</a:t>
             </a:r>
-            <a:endParaRPr lang="en-US" sz="3200" b="1" dirty="0"/>
+            <a:endParaRPr lang="en-US" sz="3600" b="1" dirty="0"/>
           </a:p>
         </p:txBody>
       </p:sp>
@@ -8863,6 +11627,58 @@
           </p:txBody>
         </p:sp>
       </p:grpSp>
+      <p:sp>
+        <p:nvSpPr>
+          <p:cNvPr id="14" name="Rectangle 13">
+            <a:extLst>
+              <a:ext uri="{FF2B5EF4-FFF2-40B4-BE49-F238E27FC236}">
+                <a16:creationId xmlns:a16="http://schemas.microsoft.com/office/drawing/2014/main" id="{E06FE861-9E62-2727-4A78-1658757AC6BE}"/>
+              </a:ext>
+            </a:extLst>
+          </p:cNvPr>
+          <p:cNvSpPr/>
+          <p:nvPr/>
+        </p:nvSpPr>
+        <p:spPr>
+          <a:xfrm>
+            <a:off x="4826000" y="3498540"/>
+            <a:ext cx="3111982" cy="309470"/>
+          </a:xfrm>
+          <a:prstGeom prst="rect">
+            <a:avLst/>
+          </a:prstGeom>
+          <a:solidFill>
+            <a:schemeClr val="accent2"/>
+          </a:solidFill>
+          <a:ln>
+            <a:noFill/>
+          </a:ln>
+        </p:spPr>
+        <p:style>
+          <a:lnRef idx="2">
+            <a:schemeClr val="accent1">
+              <a:shade val="15000"/>
+            </a:schemeClr>
+          </a:lnRef>
+          <a:fillRef idx="1">
+            <a:schemeClr val="accent1"/>
+          </a:fillRef>
+          <a:effectRef idx="0">
+            <a:schemeClr val="accent1"/>
+          </a:effectRef>
+          <a:fontRef idx="minor">
+            <a:schemeClr val="lt1"/>
+          </a:fontRef>
+        </p:style>
+        <p:txBody>
+          <a:bodyPr rtlCol="0" anchor="ctr"/>
+          <a:lstStyle/>
+          <a:p>
+            <a:pPr algn="ctr"/>
+            <a:endParaRPr lang="en-US"/>
+          </a:p>
+        </p:txBody>
+      </p:sp>
     </p:spTree>
     <p:extLst>
       <p:ext uri="{BB962C8B-B14F-4D97-AF65-F5344CB8AC3E}">
@@ -9033,7 +11849,7 @@
         </p:nvSpPr>
         <p:spPr>
           <a:xfrm>
-            <a:off x="10201724" y="499698"/>
+            <a:off x="10122345" y="475518"/>
             <a:ext cx="1262746" cy="1262746"/>
           </a:xfrm>
           <a:prstGeom prst="ellipse">
@@ -9150,8 +11966,8 @@
         </p:nvSpPr>
         <p:spPr>
           <a:xfrm>
-            <a:off x="11036466" y="3670552"/>
-            <a:ext cx="751796" cy="751796"/>
+            <a:off x="11184919" y="3682485"/>
+            <a:ext cx="512787" cy="751796"/>
           </a:xfrm>
           <a:prstGeom prst="ellipse">
             <a:avLst/>
@@ -9436,7 +12252,7 @@
         </p:nvSpPr>
         <p:spPr>
           <a:xfrm>
-            <a:off x="6976528" y="4231109"/>
+            <a:off x="6851268" y="4231109"/>
             <a:ext cx="1074057" cy="584775"/>
           </a:xfrm>
           <a:prstGeom prst="rect">
@@ -9471,7 +12287,7 @@
         </p:nvSpPr>
         <p:spPr>
           <a:xfrm>
-            <a:off x="7119617" y="3334676"/>
+            <a:off x="6994357" y="3334676"/>
             <a:ext cx="674906" cy="584775"/>
           </a:xfrm>
           <a:prstGeom prst="rect">
@@ -9616,7 +12432,7 @@
         </p:nvSpPr>
         <p:spPr>
           <a:xfrm>
-            <a:off x="6973773" y="3858328"/>
+            <a:off x="6848513" y="3858328"/>
             <a:ext cx="1074057" cy="400110"/>
           </a:xfrm>
           <a:prstGeom prst="rect">
@@ -9803,6 +12619,178 @@
               </a:rPr>
               <a:t>80.61 %</a:t>
             </a:r>
+          </a:p>
+        </p:txBody>
+      </p:sp>
+      <p:sp>
+        <p:nvSpPr>
+          <p:cNvPr id="3" name="Rectangle 2">
+            <a:extLst>
+              <a:ext uri="{FF2B5EF4-FFF2-40B4-BE49-F238E27FC236}">
+                <a16:creationId xmlns:a16="http://schemas.microsoft.com/office/drawing/2014/main" id="{A0C07851-1050-170F-37AC-5578978FF4E4}"/>
+              </a:ext>
+            </a:extLst>
+          </p:cNvPr>
+          <p:cNvSpPr/>
+          <p:nvPr/>
+        </p:nvSpPr>
+        <p:spPr>
+          <a:xfrm>
+            <a:off x="17270240" y="5900831"/>
+            <a:ext cx="777604" cy="309470"/>
+          </a:xfrm>
+          <a:prstGeom prst="rect">
+            <a:avLst/>
+          </a:prstGeom>
+          <a:solidFill>
+            <a:schemeClr val="accent2"/>
+          </a:solidFill>
+          <a:ln>
+            <a:noFill/>
+          </a:ln>
+        </p:spPr>
+        <p:style>
+          <a:lnRef idx="2">
+            <a:schemeClr val="accent1">
+              <a:shade val="15000"/>
+            </a:schemeClr>
+          </a:lnRef>
+          <a:fillRef idx="1">
+            <a:schemeClr val="accent1"/>
+          </a:fillRef>
+          <a:effectRef idx="0">
+            <a:schemeClr val="accent1"/>
+          </a:effectRef>
+          <a:fontRef idx="minor">
+            <a:schemeClr val="lt1"/>
+          </a:fontRef>
+        </p:style>
+        <p:txBody>
+          <a:bodyPr rtlCol="0" anchor="ctr"/>
+          <a:lstStyle/>
+          <a:p>
+            <a:pPr algn="ctr"/>
+            <a:endParaRPr lang="en-US"/>
+          </a:p>
+        </p:txBody>
+      </p:sp>
+      <p:sp>
+        <p:nvSpPr>
+          <p:cNvPr id="5" name="Rectangle 4">
+            <a:extLst>
+              <a:ext uri="{FF2B5EF4-FFF2-40B4-BE49-F238E27FC236}">
+                <a16:creationId xmlns:a16="http://schemas.microsoft.com/office/drawing/2014/main" id="{C0160E95-0D11-A780-34D1-29752DBFFE81}"/>
+              </a:ext>
+            </a:extLst>
+          </p:cNvPr>
+          <p:cNvSpPr/>
+          <p:nvPr/>
+        </p:nvSpPr>
+        <p:spPr>
+          <a:xfrm>
+            <a:off x="14054137" y="3498540"/>
+            <a:ext cx="7209810" cy="309470"/>
+          </a:xfrm>
+          <a:prstGeom prst="rect">
+            <a:avLst/>
+          </a:prstGeom>
+          <a:solidFill>
+            <a:schemeClr val="accent2"/>
+          </a:solidFill>
+          <a:ln>
+            <a:noFill/>
+          </a:ln>
+        </p:spPr>
+        <p:style>
+          <a:lnRef idx="2">
+            <a:schemeClr val="accent1">
+              <a:shade val="15000"/>
+            </a:schemeClr>
+          </a:lnRef>
+          <a:fillRef idx="1">
+            <a:schemeClr val="accent1"/>
+          </a:fillRef>
+          <a:effectRef idx="0">
+            <a:schemeClr val="accent1"/>
+          </a:effectRef>
+          <a:fontRef idx="minor">
+            <a:schemeClr val="lt1"/>
+          </a:fontRef>
+        </p:style>
+        <p:txBody>
+          <a:bodyPr rtlCol="0" anchor="ctr"/>
+          <a:lstStyle/>
+          <a:p>
+            <a:pPr algn="ctr"/>
+            <a:endParaRPr lang="en-US"/>
+          </a:p>
+        </p:txBody>
+      </p:sp>
+      <p:sp>
+        <p:nvSpPr>
+          <p:cNvPr id="19" name="TextBox 18">
+            <a:extLst>
+              <a:ext uri="{FF2B5EF4-FFF2-40B4-BE49-F238E27FC236}">
+                <a16:creationId xmlns:a16="http://schemas.microsoft.com/office/drawing/2014/main" id="{C854C1BB-0B2D-FA6D-36F1-A4CE08AAEEA8}"/>
+              </a:ext>
+            </a:extLst>
+          </p:cNvPr>
+          <p:cNvSpPr txBox="1"/>
+          <p:nvPr/>
+        </p:nvSpPr>
+        <p:spPr>
+          <a:xfrm>
+            <a:off x="2410308" y="7529968"/>
+            <a:ext cx="7943367" cy="1754326"/>
+          </a:xfrm>
+          <a:prstGeom prst="rect">
+            <a:avLst/>
+          </a:prstGeom>
+          <a:noFill/>
+        </p:spPr>
+        <p:txBody>
+          <a:bodyPr wrap="square" rtlCol="0">
+            <a:spAutoFit/>
+          </a:bodyPr>
+          <a:lstStyle/>
+          <a:p>
+            <a:pPr marL="457200" indent="-457200" algn="ctr">
+              <a:buFont typeface="Wingdings" panose="05000000000000000000" pitchFamily="2" charset="2"/>
+              <a:buChar char="q"/>
+            </a:pPr>
+            <a:r>
+              <a:rPr lang="en-US" sz="3600" b="1" dirty="0"/>
+              <a:t>Accuracy : 86.84 %</a:t>
+            </a:r>
+          </a:p>
+          <a:p>
+            <a:pPr marL="457200" indent="-457200" algn="ctr">
+              <a:buFont typeface="Wingdings" panose="05000000000000000000" pitchFamily="2" charset="2"/>
+              <a:buChar char="q"/>
+            </a:pPr>
+            <a:r>
+              <a:rPr lang="en-US" sz="3600" b="1" dirty="0"/>
+              <a:t>F1-score </a:t>
+            </a:r>
+            <a:r>
+              <a:rPr lang="en-US" sz="3600" b="1" dirty="0" err="1"/>
+              <a:t>pondéré</a:t>
+            </a:r>
+            <a:r>
+              <a:rPr lang="en-US" sz="3600" b="1" dirty="0"/>
+              <a:t> : 86.8 %</a:t>
+            </a:r>
+          </a:p>
+          <a:p>
+            <a:pPr marL="457200" indent="-457200" algn="ctr">
+              <a:buFont typeface="Wingdings" panose="05000000000000000000" pitchFamily="2" charset="2"/>
+              <a:buChar char="q"/>
+            </a:pPr>
+            <a:r>
+              <a:rPr lang="fr-FR" sz="3600" b="1" dirty="0"/>
+              <a:t>Faibles erreurs sur classes majoritaires</a:t>
+            </a:r>
+            <a:endParaRPr lang="en-US" sz="3600" b="1" dirty="0"/>
           </a:p>
         </p:txBody>
       </p:sp>
@@ -13643,7 +16631,7 @@
           <p:nvPr>
             <p:extLst>
               <p:ext uri="{D42A27DB-BD31-4B8C-83A1-F6EECF244321}">
-                <p14:modId xmlns:p14="http://schemas.microsoft.com/office/powerpoint/2010/main" val="1171545337"/>
+                <p14:modId xmlns:p14="http://schemas.microsoft.com/office/powerpoint/2010/main" val="3940879180"/>
               </p:ext>
             </p:extLst>
           </p:nvPr>
@@ -14261,38 +17249,16 @@
                     <a:bodyPr/>
                     <a:lstStyle/>
                     <a:p>
-                      <a:pPr marL="0" marR="0" lvl="0" indent="0" algn="ctr" defTabSz="914400" rtl="0" eaLnBrk="1" fontAlgn="auto" latinLnBrk="0" hangingPunct="1">
-                        <a:lnSpc>
-                          <a:spcPct val="100000"/>
-                        </a:lnSpc>
-                        <a:spcBef>
-                          <a:spcPts val="0"/>
-                        </a:spcBef>
-                        <a:spcAft>
-                          <a:spcPts val="0"/>
-                        </a:spcAft>
-                        <a:buClrTx/>
-                        <a:buSzTx/>
-                        <a:buFontTx/>
-                        <a:buNone/>
-                        <a:tabLst/>
-                        <a:defRPr/>
-                      </a:pPr>
+                      <a:pPr algn="ctr" rtl="0" fontAlgn="b"/>
                       <a:r>
-                        <a:rPr lang="en-US" sz="2400" b="1" kern="1200" dirty="0">
-                          <a:solidFill>
-                            <a:schemeClr val="dk1"/>
-                          </a:solidFill>
+                        <a:rPr lang="en-US" sz="2800" b="1" dirty="0">
                           <a:effectLst/>
-                          <a:latin typeface="+mn-lt"/>
-                          <a:ea typeface="+mn-ea"/>
-                          <a:cs typeface="+mn-cs"/>
                         </a:rPr>
-                        <a:t>0.8131</a:t>
+                        <a:t>81.31%</a:t>
                       </a:r>
                     </a:p>
                   </a:txBody>
-                  <a:tcPr>
+                  <a:tcPr marL="28575" marR="28575" marT="19050" marB="19050" anchor="ctr">
                     <a:lnL w="12700" cap="flat" cmpd="sng" algn="ctr">
                       <a:solidFill>
                         <a:schemeClr val="tx2">
@@ -14433,38 +17399,16 @@
                     <a:bodyPr/>
                     <a:lstStyle/>
                     <a:p>
-                      <a:pPr marL="0" marR="0" lvl="0" indent="0" algn="ctr" defTabSz="914400" rtl="0" eaLnBrk="1" fontAlgn="auto" latinLnBrk="0" hangingPunct="1">
-                        <a:lnSpc>
-                          <a:spcPct val="100000"/>
-                        </a:lnSpc>
-                        <a:spcBef>
-                          <a:spcPts val="0"/>
-                        </a:spcBef>
-                        <a:spcAft>
-                          <a:spcPts val="0"/>
-                        </a:spcAft>
-                        <a:buClrTx/>
-                        <a:buSzTx/>
-                        <a:buFontTx/>
-                        <a:buNone/>
-                        <a:tabLst/>
-                        <a:defRPr/>
-                      </a:pPr>
+                      <a:pPr algn="ctr" rtl="0" fontAlgn="b"/>
                       <a:r>
-                        <a:rPr lang="en-US" sz="2400" b="1" kern="1200" dirty="0">
-                          <a:solidFill>
-                            <a:schemeClr val="dk1"/>
-                          </a:solidFill>
+                        <a:rPr lang="en-US" sz="2800" b="1">
                           <a:effectLst/>
-                          <a:latin typeface="+mn-lt"/>
-                          <a:ea typeface="+mn-ea"/>
-                          <a:cs typeface="+mn-cs"/>
                         </a:rPr>
-                        <a:t>0.6128</a:t>
+                        <a:t>61.28%</a:t>
                       </a:r>
                     </a:p>
                   </a:txBody>
-                  <a:tcPr>
+                  <a:tcPr marL="28575" marR="28575" marT="19050" marB="19050" anchor="ctr">
                     <a:lnL w="12700" cap="flat" cmpd="sng" algn="ctr">
                       <a:solidFill>
                         <a:schemeClr val="tx2">
@@ -14606,7 +17550,7 @@
                       <a:endParaRPr lang="en-US" sz="2400" b="1" u="none" dirty="0"/>
                     </a:p>
                   </a:txBody>
-                  <a:tcPr>
+                  <a:tcPr anchor="ctr">
                     <a:lnL w="12700" cap="flat" cmpd="sng" algn="ctr">
                       <a:solidFill>
                         <a:schemeClr val="tx2">
@@ -14754,38 +17698,16 @@
                     <a:bodyPr/>
                     <a:lstStyle/>
                     <a:p>
-                      <a:pPr marL="0" marR="0" lvl="0" indent="0" algn="ctr" defTabSz="914400" rtl="0" eaLnBrk="1" fontAlgn="auto" latinLnBrk="0" hangingPunct="1">
-                        <a:lnSpc>
-                          <a:spcPct val="100000"/>
-                        </a:lnSpc>
-                        <a:spcBef>
-                          <a:spcPts val="0"/>
-                        </a:spcBef>
-                        <a:spcAft>
-                          <a:spcPts val="0"/>
-                        </a:spcAft>
-                        <a:buClrTx/>
-                        <a:buSzTx/>
-                        <a:buFontTx/>
-                        <a:buNone/>
-                        <a:tabLst/>
-                        <a:defRPr/>
-                      </a:pPr>
+                      <a:pPr algn="ctr" rtl="0" fontAlgn="b"/>
                       <a:r>
-                        <a:rPr lang="en-US" sz="2400" b="1" kern="1200" dirty="0">
-                          <a:solidFill>
-                            <a:schemeClr val="dk1"/>
-                          </a:solidFill>
+                        <a:rPr lang="en-US" sz="2800" b="1" dirty="0">
                           <a:effectLst/>
-                          <a:latin typeface="+mn-lt"/>
-                          <a:ea typeface="+mn-ea"/>
-                          <a:cs typeface="+mn-cs"/>
                         </a:rPr>
-                        <a:t>0.8411</a:t>
+                        <a:t>84.11%</a:t>
                       </a:r>
                     </a:p>
                   </a:txBody>
-                  <a:tcPr>
+                  <a:tcPr marL="28575" marR="28575" marT="19050" marB="19050" anchor="ctr">
                     <a:lnL w="12700" cap="flat" cmpd="sng" algn="ctr">
                       <a:solidFill>
                         <a:schemeClr val="tx2">
@@ -14926,38 +17848,16 @@
                     <a:bodyPr/>
                     <a:lstStyle/>
                     <a:p>
-                      <a:pPr marL="0" marR="0" lvl="0" indent="0" algn="ctr" defTabSz="914400" rtl="0" eaLnBrk="1" fontAlgn="auto" latinLnBrk="0" hangingPunct="1">
-                        <a:lnSpc>
-                          <a:spcPct val="100000"/>
-                        </a:lnSpc>
-                        <a:spcBef>
-                          <a:spcPts val="0"/>
-                        </a:spcBef>
-                        <a:spcAft>
-                          <a:spcPts val="0"/>
-                        </a:spcAft>
-                        <a:buClrTx/>
-                        <a:buSzTx/>
-                        <a:buFontTx/>
-                        <a:buNone/>
-                        <a:tabLst/>
-                        <a:defRPr/>
-                      </a:pPr>
+                      <a:pPr algn="ctr" rtl="0" fontAlgn="b"/>
                       <a:r>
-                        <a:rPr lang="en-US" sz="2400" b="1" kern="1200" dirty="0">
-                          <a:solidFill>
-                            <a:schemeClr val="dk1"/>
-                          </a:solidFill>
+                        <a:rPr lang="en-US" sz="2800" b="1">
                           <a:effectLst/>
-                          <a:latin typeface="+mn-lt"/>
-                          <a:ea typeface="+mn-ea"/>
-                          <a:cs typeface="+mn-cs"/>
                         </a:rPr>
-                        <a:t>0.8061</a:t>
+                        <a:t>80.61%</a:t>
                       </a:r>
                     </a:p>
                   </a:txBody>
-                  <a:tcPr>
+                  <a:tcPr marL="28575" marR="28575" marT="19050" marB="19050" anchor="ctr">
                     <a:lnL w="12700" cap="flat" cmpd="sng" algn="ctr">
                       <a:solidFill>
                         <a:schemeClr val="tx2">
@@ -15129,7 +18029,7 @@
                       </a:r>
                     </a:p>
                   </a:txBody>
-                  <a:tcPr>
+                  <a:tcPr anchor="ctr">
                     <a:lnL w="12700" cap="flat" cmpd="sng" algn="ctr">
                       <a:solidFill>
                         <a:schemeClr val="tx2">
@@ -15277,38 +18177,16 @@
                     <a:bodyPr/>
                     <a:lstStyle/>
                     <a:p>
-                      <a:pPr marL="0" marR="0" lvl="0" indent="0" algn="ctr" defTabSz="914400" rtl="0" eaLnBrk="1" fontAlgn="auto" latinLnBrk="0" hangingPunct="1">
-                        <a:lnSpc>
-                          <a:spcPct val="100000"/>
-                        </a:lnSpc>
-                        <a:spcBef>
-                          <a:spcPts val="0"/>
-                        </a:spcBef>
-                        <a:spcAft>
-                          <a:spcPts val="0"/>
-                        </a:spcAft>
-                        <a:buClrTx/>
-                        <a:buSzTx/>
-                        <a:buFontTx/>
-                        <a:buNone/>
-                        <a:tabLst/>
-                        <a:defRPr/>
-                      </a:pPr>
+                      <a:pPr algn="ctr" rtl="0" fontAlgn="b"/>
                       <a:r>
-                        <a:rPr lang="en-US" sz="2400" b="1" kern="1200" dirty="0">
-                          <a:solidFill>
-                            <a:schemeClr val="dk1"/>
-                          </a:solidFill>
+                        <a:rPr lang="en-US" sz="2800" b="1" dirty="0">
                           <a:effectLst/>
-                          <a:latin typeface="+mn-lt"/>
-                          <a:ea typeface="+mn-ea"/>
-                          <a:cs typeface="+mn-cs"/>
                         </a:rPr>
-                        <a:t>0.3719</a:t>
+                        <a:t>37.19%</a:t>
                       </a:r>
                     </a:p>
                   </a:txBody>
-                  <a:tcPr>
+                  <a:tcPr marL="28575" marR="28575" marT="19050" marB="19050" anchor="ctr">
                     <a:lnL w="12700" cap="flat" cmpd="sng" algn="ctr">
                       <a:solidFill>
                         <a:schemeClr val="tx2">
@@ -15449,38 +18327,16 @@
                     <a:bodyPr/>
                     <a:lstStyle/>
                     <a:p>
-                      <a:pPr marL="0" marR="0" lvl="0" indent="0" algn="ctr" defTabSz="914400" rtl="0" eaLnBrk="1" fontAlgn="auto" latinLnBrk="0" hangingPunct="1">
-                        <a:lnSpc>
-                          <a:spcPct val="100000"/>
-                        </a:lnSpc>
-                        <a:spcBef>
-                          <a:spcPts val="0"/>
-                        </a:spcBef>
-                        <a:spcAft>
-                          <a:spcPts val="0"/>
-                        </a:spcAft>
-                        <a:buClrTx/>
-                        <a:buSzTx/>
-                        <a:buFontTx/>
-                        <a:buNone/>
-                        <a:tabLst/>
-                        <a:defRPr/>
-                      </a:pPr>
+                      <a:pPr algn="ctr" rtl="0" fontAlgn="b"/>
                       <a:r>
-                        <a:rPr lang="en-US" sz="2400" b="1" kern="1200" dirty="0">
-                          <a:solidFill>
-                            <a:schemeClr val="dk1"/>
-                          </a:solidFill>
+                        <a:rPr lang="en-US" sz="2800" b="1">
                           <a:effectLst/>
-                          <a:latin typeface="+mn-lt"/>
-                          <a:ea typeface="+mn-ea"/>
-                          <a:cs typeface="+mn-cs"/>
                         </a:rPr>
-                        <a:t>0.3236 </a:t>
+                        <a:t>32.36%</a:t>
                       </a:r>
                     </a:p>
                   </a:txBody>
-                  <a:tcPr>
+                  <a:tcPr marL="28575" marR="28575" marT="19050" marB="19050" anchor="ctr">
                     <a:lnL w="12700" cap="flat" cmpd="sng" algn="ctr">
                       <a:solidFill>
                         <a:schemeClr val="tx2">
@@ -15604,7 +18460,7 @@
                       </a:r>
                     </a:p>
                   </a:txBody>
-                  <a:tcPr>
+                  <a:tcPr anchor="ctr">
                     <a:lnL w="12700" cap="flat" cmpd="sng" algn="ctr">
                       <a:solidFill>
                         <a:schemeClr val="tx2">
@@ -15752,38 +18608,16 @@
                     <a:bodyPr/>
                     <a:lstStyle/>
                     <a:p>
-                      <a:pPr marL="0" marR="0" lvl="0" indent="0" algn="ctr" defTabSz="914400" rtl="0" eaLnBrk="1" fontAlgn="auto" latinLnBrk="0" hangingPunct="1">
-                        <a:lnSpc>
-                          <a:spcPct val="100000"/>
-                        </a:lnSpc>
-                        <a:spcBef>
-                          <a:spcPts val="0"/>
-                        </a:spcBef>
-                        <a:spcAft>
-                          <a:spcPts val="0"/>
-                        </a:spcAft>
-                        <a:buClrTx/>
-                        <a:buSzTx/>
-                        <a:buFontTx/>
-                        <a:buNone/>
-                        <a:tabLst/>
-                        <a:defRPr/>
-                      </a:pPr>
+                      <a:pPr algn="ctr" rtl="0" fontAlgn="b"/>
                       <a:r>
-                        <a:rPr lang="en-US" sz="2400" b="1" kern="1200" dirty="0">
-                          <a:solidFill>
-                            <a:schemeClr val="dk1"/>
-                          </a:solidFill>
+                        <a:rPr lang="en-US" sz="2800" b="1" dirty="0">
                           <a:effectLst/>
-                          <a:latin typeface="+mn-lt"/>
-                          <a:ea typeface="+mn-ea"/>
-                          <a:cs typeface="+mn-cs"/>
                         </a:rPr>
-                        <a:t>0.8010</a:t>
+                        <a:t>80.10%</a:t>
                       </a:r>
                     </a:p>
                   </a:txBody>
-                  <a:tcPr>
+                  <a:tcPr marL="28575" marR="28575" marT="19050" marB="19050" anchor="ctr">
                     <a:lnL w="12700" cap="flat" cmpd="sng" algn="ctr">
                       <a:solidFill>
                         <a:schemeClr val="tx2">
@@ -15933,38 +18767,16 @@
                     <a:bodyPr/>
                     <a:lstStyle/>
                     <a:p>
-                      <a:pPr marL="0" marR="0" lvl="0" indent="0" algn="ctr" defTabSz="914400" rtl="0" eaLnBrk="1" fontAlgn="auto" latinLnBrk="0" hangingPunct="1">
-                        <a:lnSpc>
-                          <a:spcPct val="100000"/>
-                        </a:lnSpc>
-                        <a:spcBef>
-                          <a:spcPts val="0"/>
-                        </a:spcBef>
-                        <a:spcAft>
-                          <a:spcPts val="0"/>
-                        </a:spcAft>
-                        <a:buClrTx/>
-                        <a:buSzTx/>
-                        <a:buFontTx/>
-                        <a:buNone/>
-                        <a:tabLst/>
-                        <a:defRPr/>
-                      </a:pPr>
+                      <a:pPr algn="ctr" rtl="0" fontAlgn="b"/>
                       <a:r>
-                        <a:rPr lang="en-US" sz="2400" b="1" kern="1200" dirty="0">
-                          <a:solidFill>
-                            <a:schemeClr val="dk1"/>
-                          </a:solidFill>
+                        <a:rPr lang="en-US" sz="2800" b="1">
                           <a:effectLst/>
-                          <a:latin typeface="+mn-lt"/>
-                          <a:ea typeface="+mn-ea"/>
-                          <a:cs typeface="+mn-cs"/>
                         </a:rPr>
-                        <a:t>0.8442</a:t>
+                        <a:t>84.42%</a:t>
                       </a:r>
                     </a:p>
                   </a:txBody>
-                  <a:tcPr>
+                  <a:tcPr marL="28575" marR="28575" marT="19050" marB="19050" anchor="ctr">
                     <a:lnL w="12700" cap="flat" cmpd="sng" algn="ctr">
                       <a:solidFill>
                         <a:schemeClr val="tx2">
@@ -16104,7 +18916,7 @@
                       </a:r>
                     </a:p>
                   </a:txBody>
-                  <a:tcPr>
+                  <a:tcPr anchor="ctr">
                     <a:lnL w="12700" cap="flat" cmpd="sng" algn="ctr">
                       <a:solidFill>
                         <a:schemeClr val="tx2">
@@ -16252,38 +19064,16 @@
                     <a:bodyPr/>
                     <a:lstStyle/>
                     <a:p>
-                      <a:pPr marL="0" marR="0" lvl="0" indent="0" algn="ctr" defTabSz="914400" rtl="0" eaLnBrk="1" fontAlgn="auto" latinLnBrk="0" hangingPunct="1">
-                        <a:lnSpc>
-                          <a:spcPct val="100000"/>
-                        </a:lnSpc>
-                        <a:spcBef>
-                          <a:spcPts val="0"/>
-                        </a:spcBef>
-                        <a:spcAft>
-                          <a:spcPts val="0"/>
-                        </a:spcAft>
-                        <a:buClrTx/>
-                        <a:buSzTx/>
-                        <a:buFontTx/>
-                        <a:buNone/>
-                        <a:tabLst/>
-                        <a:defRPr/>
-                      </a:pPr>
+                      <a:pPr algn="ctr" rtl="0" fontAlgn="b"/>
                       <a:r>
-                        <a:rPr lang="en-US" sz="2400" b="1" kern="1200" dirty="0">
-                          <a:solidFill>
-                            <a:schemeClr val="dk1"/>
-                          </a:solidFill>
+                        <a:rPr lang="en-US" sz="2800" b="1" dirty="0">
                           <a:effectLst/>
-                          <a:latin typeface="+mn-lt"/>
-                          <a:ea typeface="+mn-ea"/>
-                          <a:cs typeface="+mn-cs"/>
                         </a:rPr>
-                        <a:t>0.8595</a:t>
+                        <a:t>85.95%</a:t>
                       </a:r>
                     </a:p>
                   </a:txBody>
-                  <a:tcPr>
+                  <a:tcPr marL="28575" marR="28575" marT="19050" marB="19050" anchor="ctr">
                     <a:lnL w="12700" cap="flat" cmpd="sng" algn="ctr">
                       <a:solidFill>
                         <a:schemeClr val="tx2">
@@ -16424,38 +19214,16 @@
                     <a:bodyPr/>
                     <a:lstStyle/>
                     <a:p>
-                      <a:pPr marL="0" marR="0" lvl="0" indent="0" algn="ctr" defTabSz="914400" rtl="0" eaLnBrk="1" fontAlgn="auto" latinLnBrk="0" hangingPunct="1">
-                        <a:lnSpc>
-                          <a:spcPct val="100000"/>
-                        </a:lnSpc>
-                        <a:spcBef>
-                          <a:spcPts val="0"/>
-                        </a:spcBef>
-                        <a:spcAft>
-                          <a:spcPts val="0"/>
-                        </a:spcAft>
-                        <a:buClrTx/>
-                        <a:buSzTx/>
-                        <a:buFontTx/>
-                        <a:buNone/>
-                        <a:tabLst/>
-                        <a:defRPr/>
-                      </a:pPr>
+                      <a:pPr algn="ctr" rtl="0" fontAlgn="b"/>
                       <a:r>
-                        <a:rPr lang="en-US" sz="2400" b="1" kern="1200" dirty="0">
-                          <a:solidFill>
-                            <a:schemeClr val="dk1"/>
-                          </a:solidFill>
+                        <a:rPr lang="en-US" sz="2800" b="1" dirty="0">
                           <a:effectLst/>
-                          <a:latin typeface="+mn-lt"/>
-                          <a:ea typeface="+mn-ea"/>
-                          <a:cs typeface="+mn-cs"/>
                         </a:rPr>
-                        <a:t>0.8684</a:t>
+                        <a:t>86.84%</a:t>
                       </a:r>
                     </a:p>
                   </a:txBody>
-                  <a:tcPr>
+                  <a:tcPr marL="28575" marR="28575" marT="19050" marB="19050" anchor="ctr">
                     <a:lnL w="12700" cap="flat" cmpd="sng" algn="ctr">
                       <a:solidFill>
                         <a:schemeClr val="tx2">
@@ -16636,7 +19404,7 @@
                       </a:r>
                     </a:p>
                   </a:txBody>
-                  <a:tcPr>
+                  <a:tcPr anchor="ctr">
                     <a:lnL w="12700" cap="flat" cmpd="sng" algn="ctr">
                       <a:solidFill>
                         <a:schemeClr val="tx2">
@@ -22319,47 +25087,6 @@
           </a:p>
         </p:txBody>
       </p:sp>
-      <p:sp>
-        <p:nvSpPr>
-          <p:cNvPr id="10" name="TextBox 9">
-            <a:extLst>
-              <a:ext uri="{FF2B5EF4-FFF2-40B4-BE49-F238E27FC236}">
-                <a16:creationId xmlns:a16="http://schemas.microsoft.com/office/drawing/2014/main" id="{81B8700A-FA37-F487-5F53-4305E0196565}"/>
-              </a:ext>
-            </a:extLst>
-          </p:cNvPr>
-          <p:cNvSpPr txBox="1"/>
-          <p:nvPr/>
-        </p:nvSpPr>
-        <p:spPr>
-          <a:xfrm>
-            <a:off x="578139" y="7010180"/>
-            <a:ext cx="5335783" cy="2246769"/>
-          </a:xfrm>
-          <a:prstGeom prst="rect">
-            <a:avLst/>
-          </a:prstGeom>
-          <a:noFill/>
-        </p:spPr>
-        <p:txBody>
-          <a:bodyPr wrap="square" rtlCol="0">
-            <a:spAutoFit/>
-          </a:bodyPr>
-          <a:lstStyle/>
-          <a:p>
-            <a:pPr algn="ctr"/>
-            <a:r>
-              <a:rPr lang="fr-FR" sz="2800" b="1" dirty="0"/>
-              <a:t>Notre solution :</a:t>
-            </a:r>
-            <a:r>
-              <a:rPr lang="fr-FR" sz="2800" dirty="0"/>
-              <a:t> Intégrer l’intelligence artificielle pour détecter et prédire les défauts de manière automatique, rapide et fiable.</a:t>
-            </a:r>
-            <a:endParaRPr lang="en-US" sz="2800" dirty="0"/>
-          </a:p>
-        </p:txBody>
-      </p:sp>
       <p:pic>
         <p:nvPicPr>
           <p:cNvPr id="5" name="Picture 4">
@@ -22627,102 +25354,6 @@
       </p:transition>
     </mc:Fallback>
   </mc:AlternateContent>
-  <p:timing>
-    <p:tnLst>
-      <p:par>
-        <p:cTn id="1" dur="indefinite" restart="never" nodeType="tmRoot">
-          <p:childTnLst>
-            <p:seq concurrent="1" nextAc="seek">
-              <p:cTn id="2" dur="indefinite" nodeType="mainSeq">
-                <p:childTnLst>
-                  <p:par>
-                    <p:cTn id="3" fill="hold">
-                      <p:stCondLst>
-                        <p:cond delay="indefinite"/>
-                      </p:stCondLst>
-                      <p:childTnLst>
-                        <p:par>
-                          <p:cTn id="4" fill="hold">
-                            <p:stCondLst>
-                              <p:cond delay="0"/>
-                            </p:stCondLst>
-                            <p:childTnLst>
-                              <p:par>
-                                <p:cTn id="5" presetID="42" presetClass="path" presetSubtype="0" accel="50000" decel="50000" fill="hold" grpId="0" nodeType="clickEffect">
-                                  <p:stCondLst>
-                                    <p:cond delay="0"/>
-                                  </p:stCondLst>
-                                  <p:childTnLst>
-                                    <p:animMotion origin="layout" path="M 2.08333E-6 -1.11111E-6 L 2.08333E-6 0.73218 " pathEditMode="relative" rAng="0" ptsTypes="AA">
-                                      <p:cBhvr>
-                                        <p:cTn id="6" dur="2000" fill="hold"/>
-                                        <p:tgtEl>
-                                          <p:spTgt spid="8"/>
-                                        </p:tgtEl>
-                                        <p:attrNameLst>
-                                          <p:attrName>ppt_x</p:attrName>
-                                          <p:attrName>ppt_y</p:attrName>
-                                        </p:attrNameLst>
-                                      </p:cBhvr>
-                                      <p:rCtr x="0" y="36597"/>
-                                    </p:animMotion>
-                                  </p:childTnLst>
-                                </p:cTn>
-                              </p:par>
-                              <p:par>
-                                <p:cTn id="7" presetID="42" presetClass="path" presetSubtype="0" accel="50000" decel="50000" fill="hold" grpId="0" nodeType="withEffect">
-                                  <p:stCondLst>
-                                    <p:cond delay="0"/>
-                                  </p:stCondLst>
-                                  <p:childTnLst>
-                                    <p:animMotion origin="layout" path="M 0.00755 0.01134 L 0.00755 -0.59977 " pathEditMode="relative" rAng="0" ptsTypes="AA">
-                                      <p:cBhvr>
-                                        <p:cTn id="8" dur="2000" fill="hold"/>
-                                        <p:tgtEl>
-                                          <p:spTgt spid="10"/>
-                                        </p:tgtEl>
-                                        <p:attrNameLst>
-                                          <p:attrName>ppt_x</p:attrName>
-                                          <p:attrName>ppt_y</p:attrName>
-                                        </p:attrNameLst>
-                                      </p:cBhvr>
-                                      <p:rCtr x="0" y="-30556"/>
-                                    </p:animMotion>
-                                  </p:childTnLst>
-                                </p:cTn>
-                              </p:par>
-                            </p:childTnLst>
-                          </p:cTn>
-                        </p:par>
-                      </p:childTnLst>
-                    </p:cTn>
-                  </p:par>
-                </p:childTnLst>
-              </p:cTn>
-              <p:prevCondLst>
-                <p:cond evt="onPrev" delay="0">
-                  <p:tgtEl>
-                    <p:sldTgt/>
-                  </p:tgtEl>
-                </p:cond>
-              </p:prevCondLst>
-              <p:nextCondLst>
-                <p:cond evt="onNext" delay="0">
-                  <p:tgtEl>
-                    <p:sldTgt/>
-                  </p:tgtEl>
-                </p:cond>
-              </p:nextCondLst>
-            </p:seq>
-          </p:childTnLst>
-        </p:cTn>
-      </p:par>
-    </p:tnLst>
-    <p:bldLst>
-      <p:bldP spid="8" grpId="0"/>
-      <p:bldP spid="10" grpId="0"/>
-    </p:bldLst>
-  </p:timing>
 </p:sld>
 </file>
 
@@ -23701,7 +26332,7 @@
         </p:nvSpPr>
         <p:spPr>
           <a:xfrm>
-            <a:off x="2656169" y="2414308"/>
+            <a:off x="2656169" y="2521059"/>
             <a:ext cx="7371384" cy="1815882"/>
           </a:xfrm>
           <a:prstGeom prst="rect">
@@ -24224,7 +26855,7 @@
         </p:nvSpPr>
         <p:spPr>
           <a:xfrm>
-            <a:off x="2410307" y="2571069"/>
+            <a:off x="2410307" y="2658752"/>
             <a:ext cx="7371384" cy="2246769"/>
           </a:xfrm>
           <a:prstGeom prst="rect">
@@ -24845,84 +27476,6 @@
           </a:prstGeom>
         </p:spPr>
       </p:pic>
-      <p:sp>
-        <p:nvSpPr>
-          <p:cNvPr id="3" name="TextBox 2">
-            <a:extLst>
-              <a:ext uri="{FF2B5EF4-FFF2-40B4-BE49-F238E27FC236}">
-                <a16:creationId xmlns:a16="http://schemas.microsoft.com/office/drawing/2014/main" id="{058CABA7-5010-1C9A-1892-DB49B1131A09}"/>
-              </a:ext>
-            </a:extLst>
-          </p:cNvPr>
-          <p:cNvSpPr txBox="1"/>
-          <p:nvPr/>
-        </p:nvSpPr>
-        <p:spPr>
-          <a:xfrm>
-            <a:off x="756568" y="6919366"/>
-            <a:ext cx="10675214" cy="1815882"/>
-          </a:xfrm>
-          <a:prstGeom prst="rect">
-            <a:avLst/>
-          </a:prstGeom>
-          <a:noFill/>
-        </p:spPr>
-        <p:txBody>
-          <a:bodyPr wrap="square" rtlCol="0">
-            <a:spAutoFit/>
-          </a:bodyPr>
-          <a:lstStyle/>
-          <a:p>
-            <a:pPr algn="ctr"/>
-            <a:r>
-              <a:rPr lang="fr-FR" sz="2800" dirty="0"/>
-              <a:t>Dans un monde de plus en plus dépendant de l’électricité, la fiabilité des réseaux de distribution est devenue cruciale. Les interruptions peuvent avoir des conséquences graves. Or, les méthodes classiques de détection ne sont plus suffisantes.</a:t>
-            </a:r>
-            <a:endParaRPr lang="en-US" sz="2800" dirty="0"/>
-          </a:p>
-        </p:txBody>
-      </p:sp>
-      <p:sp>
-        <p:nvSpPr>
-          <p:cNvPr id="6" name="TextBox 5">
-            <a:extLst>
-              <a:ext uri="{FF2B5EF4-FFF2-40B4-BE49-F238E27FC236}">
-                <a16:creationId xmlns:a16="http://schemas.microsoft.com/office/drawing/2014/main" id="{E5233351-EB7F-717F-F3A8-1519E4E07F50}"/>
-              </a:ext>
-            </a:extLst>
-          </p:cNvPr>
-          <p:cNvSpPr txBox="1"/>
-          <p:nvPr/>
-        </p:nvSpPr>
-        <p:spPr>
-          <a:xfrm>
-            <a:off x="1209512" y="8965211"/>
-            <a:ext cx="9769326" cy="954107"/>
-          </a:xfrm>
-          <a:prstGeom prst="rect">
-            <a:avLst/>
-          </a:prstGeom>
-          <a:noFill/>
-        </p:spPr>
-        <p:txBody>
-          <a:bodyPr wrap="square" rtlCol="0">
-            <a:spAutoFit/>
-          </a:bodyPr>
-          <a:lstStyle/>
-          <a:p>
-            <a:pPr algn="ctr"/>
-            <a:r>
-              <a:rPr lang="fr-FR" sz="2800" b="1" dirty="0"/>
-              <a:t>Notre solution :</a:t>
-            </a:r>
-            <a:r>
-              <a:rPr lang="fr-FR" sz="2800" dirty="0"/>
-              <a:t> Intégrer l’intelligence artificielle pour détecter et prédire les défauts de manière automatique, rapide et fiable.</a:t>
-            </a:r>
-            <a:endParaRPr lang="en-US" sz="2800" dirty="0"/>
-          </a:p>
-        </p:txBody>
-      </p:sp>
       <p:sp>
         <p:nvSpPr>
           <p:cNvPr id="15" name="Rectangle: Rounded Corners 14">
@@ -26055,6 +28608,90 @@
           </a:p>
         </p:txBody>
       </p:sp>
+      <p:sp>
+        <p:nvSpPr>
+          <p:cNvPr id="7" name="TextBox 6">
+            <a:extLst>
+              <a:ext uri="{FF2B5EF4-FFF2-40B4-BE49-F238E27FC236}">
+                <a16:creationId xmlns:a16="http://schemas.microsoft.com/office/drawing/2014/main" id="{02252B74-D6FA-E5B8-2A15-C08A18F8B8CA}"/>
+              </a:ext>
+            </a:extLst>
+          </p:cNvPr>
+          <p:cNvSpPr txBox="1"/>
+          <p:nvPr/>
+        </p:nvSpPr>
+        <p:spPr>
+          <a:xfrm>
+            <a:off x="705408" y="7960851"/>
+            <a:ext cx="5263916" cy="3539430"/>
+          </a:xfrm>
+          <a:prstGeom prst="rect">
+            <a:avLst/>
+          </a:prstGeom>
+          <a:noFill/>
+        </p:spPr>
+        <p:txBody>
+          <a:bodyPr wrap="square" rtlCol="0">
+            <a:spAutoFit/>
+          </a:bodyPr>
+          <a:lstStyle/>
+          <a:p>
+            <a:pPr algn="ctr"/>
+            <a:r>
+              <a:rPr lang="fr-FR" sz="2800" dirty="0"/>
+              <a:t>Dans un monde de plus en plus dépendant de l’électricité, la fiabilité des réseaux de distribution est devenue cruciale. Les interruptions peuvent avoir des conséquences graves. Or, les méthodes classiques de détection ne sont plus suffisantes.</a:t>
+            </a:r>
+            <a:endParaRPr lang="en-US" sz="2800" dirty="0"/>
+          </a:p>
+        </p:txBody>
+      </p:sp>
+      <p:pic>
+        <p:nvPicPr>
+          <p:cNvPr id="9" name="Picture 2" descr="power system">
+            <a:extLst>
+              <a:ext uri="{FF2B5EF4-FFF2-40B4-BE49-F238E27FC236}">
+                <a16:creationId xmlns:a16="http://schemas.microsoft.com/office/drawing/2014/main" id="{093D8FAB-C98E-EA68-2BBF-393B379DE73B}"/>
+              </a:ext>
+            </a:extLst>
+          </p:cNvPr>
+          <p:cNvPicPr>
+            <a:picLocks noChangeAspect="1" noChangeArrowheads="1"/>
+          </p:cNvPicPr>
+          <p:nvPr/>
+        </p:nvPicPr>
+        <p:blipFill>
+          <a:blip r:embed="rId2">
+            <a:extLst>
+              <a:ext uri="{28A0092B-C50C-407E-A947-70E740481C1C}">
+                <a14:useLocalDpi xmlns:a14="http://schemas.microsoft.com/office/drawing/2010/main" val="0"/>
+              </a:ext>
+            </a:extLst>
+          </a:blip>
+          <a:srcRect/>
+          <a:stretch>
+            <a:fillRect/>
+          </a:stretch>
+        </p:blipFill>
+        <p:spPr bwMode="auto">
+          <a:xfrm>
+            <a:off x="5905689" y="8395248"/>
+            <a:ext cx="5335783" cy="2670636"/>
+          </a:xfrm>
+          <a:prstGeom prst="rect">
+            <a:avLst/>
+          </a:prstGeom>
+          <a:noFill/>
+          <a:extLst>
+            <a:ext uri="{909E8E84-426E-40DD-AFC4-6F175D3DCCD1}">
+              <a14:hiddenFill xmlns:a14="http://schemas.microsoft.com/office/drawing/2010/main">
+                <a:solidFill>
+                  <a:srgbClr val="FFFFFF"/>
+                </a:solidFill>
+              </a14:hiddenFill>
+            </a:ext>
+          </a:extLst>
+        </p:spPr>
+      </p:pic>
     </p:spTree>
     <p:extLst>
       <p:ext uri="{BB962C8B-B14F-4D97-AF65-F5344CB8AC3E}">
@@ -26103,6 +28740,116 @@
           <a:chExt cx="0" cy="0"/>
         </a:xfrm>
       </p:grpSpPr>
+      <p:sp>
+        <p:nvSpPr>
+          <p:cNvPr id="7" name="Rectangle: Rounded Corners 6">
+            <a:extLst>
+              <a:ext uri="{FF2B5EF4-FFF2-40B4-BE49-F238E27FC236}">
+                <a16:creationId xmlns:a16="http://schemas.microsoft.com/office/drawing/2014/main" id="{1570A4F8-1E1E-A503-968C-E663565EEF13}"/>
+              </a:ext>
+            </a:extLst>
+          </p:cNvPr>
+          <p:cNvSpPr/>
+          <p:nvPr/>
+        </p:nvSpPr>
+        <p:spPr>
+          <a:xfrm>
+            <a:off x="14621154" y="2602687"/>
+            <a:ext cx="3477081" cy="3164954"/>
+          </a:xfrm>
+          <a:prstGeom prst="roundRect">
+            <a:avLst/>
+          </a:prstGeom>
+          <a:solidFill>
+            <a:srgbClr val="F7941F"/>
+          </a:solidFill>
+          <a:ln>
+            <a:solidFill>
+              <a:srgbClr val="FFFFFF"/>
+            </a:solidFill>
+          </a:ln>
+        </p:spPr>
+        <p:style>
+          <a:lnRef idx="2">
+            <a:schemeClr val="accent1">
+              <a:shade val="15000"/>
+            </a:schemeClr>
+          </a:lnRef>
+          <a:fillRef idx="1">
+            <a:schemeClr val="accent1"/>
+          </a:fillRef>
+          <a:effectRef idx="0">
+            <a:schemeClr val="accent1"/>
+          </a:effectRef>
+          <a:fontRef idx="minor">
+            <a:schemeClr val="lt1"/>
+          </a:fontRef>
+        </p:style>
+        <p:txBody>
+          <a:bodyPr rtlCol="0" anchor="ctr"/>
+          <a:lstStyle/>
+          <a:p>
+            <a:pPr algn="ctr"/>
+            <a:endParaRPr lang="en-US"/>
+          </a:p>
+        </p:txBody>
+      </p:sp>
+      <p:sp>
+        <p:nvSpPr>
+          <p:cNvPr id="13" name="TextBox 12">
+            <a:extLst>
+              <a:ext uri="{FF2B5EF4-FFF2-40B4-BE49-F238E27FC236}">
+                <a16:creationId xmlns:a16="http://schemas.microsoft.com/office/drawing/2014/main" id="{C5736D03-86A9-19F2-BAD3-79CE815CF0C3}"/>
+              </a:ext>
+            </a:extLst>
+          </p:cNvPr>
+          <p:cNvSpPr txBox="1"/>
+          <p:nvPr/>
+        </p:nvSpPr>
+        <p:spPr>
+          <a:xfrm>
+            <a:off x="14702344" y="3791861"/>
+            <a:ext cx="3314700" cy="861774"/>
+          </a:xfrm>
+          <a:prstGeom prst="rect">
+            <a:avLst/>
+          </a:prstGeom>
+          <a:noFill/>
+        </p:spPr>
+        <p:txBody>
+          <a:bodyPr wrap="square" rtlCol="0">
+            <a:spAutoFit/>
+          </a:bodyPr>
+          <a:lstStyle/>
+          <a:p>
+            <a:pPr algn="ctr"/>
+            <a:r>
+              <a:rPr lang="en-US" sz="2500" b="1" dirty="0"/>
+              <a:t>Interface </a:t>
+            </a:r>
+            <a:r>
+              <a:rPr lang="en-US" sz="2500" b="1" dirty="0" err="1"/>
+              <a:t>utilisateur</a:t>
+            </a:r>
+            <a:endParaRPr lang="en-US" sz="2500" b="1" dirty="0"/>
+          </a:p>
+          <a:p>
+            <a:pPr algn="ctr"/>
+            <a:r>
+              <a:rPr lang="en-US" sz="2500" b="1" dirty="0"/>
+              <a:t>(</a:t>
+            </a:r>
+            <a:r>
+              <a:rPr lang="en-US" sz="2500" b="1" dirty="0" err="1"/>
+              <a:t>Streamlit</a:t>
+            </a:r>
+            <a:r>
+              <a:rPr lang="en-US" sz="2500" b="1" dirty="0"/>
+              <a:t>)</a:t>
+            </a:r>
+          </a:p>
+        </p:txBody>
+      </p:sp>
       <p:sp>
         <p:nvSpPr>
           <p:cNvPr id="6" name="Rectangle: Rounded Corners 5">
@@ -27027,10 +29774,10 @@
       </p:sp>
       <p:sp>
         <p:nvSpPr>
-          <p:cNvPr id="2" name="Rectangle 1">
+          <p:cNvPr id="3" name="Hexagon 2">
             <a:extLst>
               <a:ext uri="{FF2B5EF4-FFF2-40B4-BE49-F238E27FC236}">
-                <a16:creationId xmlns:a16="http://schemas.microsoft.com/office/drawing/2014/main" id="{362E3909-8C99-53DE-E49F-5058BCB68E31}"/>
+                <a16:creationId xmlns:a16="http://schemas.microsoft.com/office/drawing/2014/main" id="{5CC745BF-C76D-EDFA-15A6-B4259A9A3754}"/>
               </a:ext>
             </a:extLst>
           </p:cNvPr>
@@ -27038,17 +29785,20 @@
           <p:nvPr/>
         </p:nvSpPr>
         <p:spPr>
-          <a:xfrm rot="2700000">
-            <a:off x="-3147767" y="3017030"/>
-            <a:ext cx="2201765" cy="2294556"/>
+          <a:xfrm>
+            <a:off x="-5580173" y="2713586"/>
+            <a:ext cx="3310678" cy="2854032"/>
           </a:xfrm>
-          <a:prstGeom prst="rect">
-            <a:avLst/>
+          <a:prstGeom prst="hexagon">
+            <a:avLst>
+              <a:gd name="adj" fmla="val 16641"/>
+              <a:gd name="vf" fmla="val 115470"/>
+            </a:avLst>
           </a:prstGeom>
           <a:solidFill>
             <a:srgbClr val="F7941F"/>
           </a:solidFill>
-          <a:ln w="57150">
+          <a:ln>
             <a:solidFill>
               <a:srgbClr val="FFFFFF"/>
             </a:solidFill>
@@ -27076,6 +29826,54 @@
           <a:p>
             <a:pPr algn="ctr"/>
             <a:endParaRPr lang="en-US"/>
+          </a:p>
+        </p:txBody>
+      </p:sp>
+      <p:sp>
+        <p:nvSpPr>
+          <p:cNvPr id="5" name="TextBox 4">
+            <a:extLst>
+              <a:ext uri="{FF2B5EF4-FFF2-40B4-BE49-F238E27FC236}">
+                <a16:creationId xmlns:a16="http://schemas.microsoft.com/office/drawing/2014/main" id="{8CF0BA1A-4DA7-2804-4DC5-52B01A6AED5D}"/>
+              </a:ext>
+            </a:extLst>
+          </p:cNvPr>
+          <p:cNvSpPr txBox="1"/>
+          <p:nvPr/>
+        </p:nvSpPr>
+        <p:spPr>
+          <a:xfrm>
+            <a:off x="-5611317" y="3630025"/>
+            <a:ext cx="3314702" cy="954107"/>
+          </a:xfrm>
+          <a:prstGeom prst="rect">
+            <a:avLst/>
+          </a:prstGeom>
+          <a:noFill/>
+        </p:spPr>
+        <p:txBody>
+          <a:bodyPr wrap="square" rtlCol="0">
+            <a:spAutoFit/>
+          </a:bodyPr>
+          <a:lstStyle/>
+          <a:p>
+            <a:pPr algn="ctr"/>
+            <a:r>
+              <a:rPr lang="en-US" sz="2800" b="1" dirty="0"/>
+              <a:t>Données </a:t>
+            </a:r>
+            <a:r>
+              <a:rPr lang="en-US" sz="2800" b="1" dirty="0" err="1"/>
+              <a:t>simulées</a:t>
+            </a:r>
+            <a:endParaRPr lang="en-US" sz="2800" b="1" dirty="0"/>
+          </a:p>
+          <a:p>
+            <a:pPr algn="ctr"/>
+            <a:r>
+              <a:rPr lang="en-US" sz="2800" b="1" dirty="0"/>
+              <a:t> (courants, tensions)</a:t>
+            </a:r>
           </a:p>
         </p:txBody>
       </p:sp>
@@ -27141,12 +29939,12 @@
         </p:nvSpPr>
         <p:spPr>
           <a:xfrm>
-            <a:off x="1275240" y="573698"/>
-            <a:ext cx="9906000" cy="5710603"/>
+            <a:off x="709653" y="247649"/>
+            <a:ext cx="11037174" cy="6362702"/>
           </a:xfrm>
           <a:prstGeom prst="roundRect">
             <a:avLst>
-              <a:gd name="adj" fmla="val 9362"/>
+              <a:gd name="adj" fmla="val 3673"/>
             </a:avLst>
           </a:prstGeom>
           <a:solidFill>
@@ -27389,8 +30187,8 @@
         </p:nvSpPr>
         <p:spPr>
           <a:xfrm>
-            <a:off x="1213678" y="3867598"/>
-            <a:ext cx="10005061" cy="529987"/>
+            <a:off x="-2705100" y="3867598"/>
+            <a:ext cx="18878550" cy="529987"/>
           </a:xfrm>
           <a:prstGeom prst="roundRect">
             <a:avLst>
@@ -27398,7 +30196,7 @@
             </a:avLst>
           </a:prstGeom>
           <a:solidFill>
-            <a:srgbClr val="F7941F"/>
+            <a:srgbClr val="FFFFFF"/>
           </a:solidFill>
           <a:ln w="57150">
             <a:solidFill>
@@ -27557,7 +30355,7 @@
         </p:nvSpPr>
         <p:spPr>
           <a:xfrm>
-            <a:off x="4256692" y="4494949"/>
+            <a:off x="4475272" y="3887096"/>
             <a:ext cx="3314701" cy="523220"/>
           </a:xfrm>
           <a:prstGeom prst="rect">
@@ -27573,177 +30371,13 @@
           <a:p>
             <a:pPr algn="ctr"/>
             <a:r>
-              <a:rPr lang="en-US" sz="2800" b="1" dirty="0" err="1">
-                <a:solidFill>
-                  <a:schemeClr val="bg1"/>
-                </a:solidFill>
-              </a:rPr>
+              <a:rPr lang="en-US" sz="2800" b="1" u="sng" dirty="0" err="1"/>
               <a:t>Modèles</a:t>
             </a:r>
             <a:r>
-              <a:rPr lang="en-US" sz="2800" b="1" dirty="0">
-                <a:solidFill>
-                  <a:schemeClr val="bg1"/>
-                </a:solidFill>
-              </a:rPr>
+              <a:rPr lang="en-US" sz="2800" b="1" u="sng" dirty="0"/>
               <a:t> ML et DL</a:t>
             </a:r>
-          </a:p>
-        </p:txBody>
-      </p:sp>
-      <p:sp>
-        <p:nvSpPr>
-          <p:cNvPr id="16" name="Isosceles Triangle 15">
-            <a:extLst>
-              <a:ext uri="{FF2B5EF4-FFF2-40B4-BE49-F238E27FC236}">
-                <a16:creationId xmlns:a16="http://schemas.microsoft.com/office/drawing/2014/main" id="{32CE9F83-4C0C-D012-DCFC-2B51FB0F4715}"/>
-              </a:ext>
-            </a:extLst>
-          </p:cNvPr>
-          <p:cNvSpPr/>
-          <p:nvPr/>
-        </p:nvSpPr>
-        <p:spPr>
-          <a:xfrm rot="5400000">
-            <a:off x="1233622" y="2724709"/>
-            <a:ext cx="3339224" cy="2690734"/>
-          </a:xfrm>
-          <a:prstGeom prst="triangle">
-            <a:avLst/>
-          </a:prstGeom>
-          <a:solidFill>
-            <a:srgbClr val="F7941F"/>
-          </a:solidFill>
-          <a:ln w="57150">
-            <a:solidFill>
-              <a:srgbClr val="FFFFFF"/>
-            </a:solidFill>
-          </a:ln>
-        </p:spPr>
-        <p:style>
-          <a:lnRef idx="2">
-            <a:schemeClr val="accent1">
-              <a:shade val="15000"/>
-            </a:schemeClr>
-          </a:lnRef>
-          <a:fillRef idx="1">
-            <a:schemeClr val="accent1"/>
-          </a:fillRef>
-          <a:effectRef idx="0">
-            <a:schemeClr val="accent1"/>
-          </a:effectRef>
-          <a:fontRef idx="minor">
-            <a:schemeClr val="lt1"/>
-          </a:fontRef>
-        </p:style>
-        <p:txBody>
-          <a:bodyPr rtlCol="0" anchor="ctr"/>
-          <a:lstStyle/>
-          <a:p>
-            <a:pPr algn="ctr"/>
-            <a:endParaRPr lang="en-US" baseline="-25000" dirty="0"/>
-          </a:p>
-        </p:txBody>
-      </p:sp>
-      <p:sp>
-        <p:nvSpPr>
-          <p:cNvPr id="14" name="TextBox 13">
-            <a:extLst>
-              <a:ext uri="{FF2B5EF4-FFF2-40B4-BE49-F238E27FC236}">
-                <a16:creationId xmlns:a16="http://schemas.microsoft.com/office/drawing/2014/main" id="{0442E74B-6D2D-0C0F-E33E-0EEA027A6139}"/>
-              </a:ext>
-            </a:extLst>
-          </p:cNvPr>
-          <p:cNvSpPr txBox="1"/>
-          <p:nvPr/>
-        </p:nvSpPr>
-        <p:spPr>
-          <a:xfrm>
-            <a:off x="1076624" y="3690971"/>
-            <a:ext cx="3314702" cy="707886"/>
-          </a:xfrm>
-          <a:prstGeom prst="rect">
-            <a:avLst/>
-          </a:prstGeom>
-          <a:noFill/>
-        </p:spPr>
-        <p:txBody>
-          <a:bodyPr wrap="square" rtlCol="0">
-            <a:spAutoFit/>
-          </a:bodyPr>
-          <a:lstStyle/>
-          <a:p>
-            <a:pPr algn="ctr"/>
-            <a:r>
-              <a:rPr lang="en-US" sz="2000" b="1" dirty="0"/>
-              <a:t>Données </a:t>
-            </a:r>
-            <a:r>
-              <a:rPr lang="en-US" sz="2000" b="1" dirty="0" err="1"/>
-              <a:t>simulées</a:t>
-            </a:r>
-            <a:endParaRPr lang="en-US" sz="2000" b="1" dirty="0"/>
-          </a:p>
-          <a:p>
-            <a:pPr algn="ctr"/>
-            <a:r>
-              <a:rPr lang="en-US" sz="2000" b="1" dirty="0"/>
-              <a:t> (courants, tensions)</a:t>
-            </a:r>
-          </a:p>
-        </p:txBody>
-      </p:sp>
-      <p:sp>
-        <p:nvSpPr>
-          <p:cNvPr id="20" name="Isosceles Triangle 19">
-            <a:extLst>
-              <a:ext uri="{FF2B5EF4-FFF2-40B4-BE49-F238E27FC236}">
-                <a16:creationId xmlns:a16="http://schemas.microsoft.com/office/drawing/2014/main" id="{7D5A12E4-026A-2103-8A27-E849C469DCB3}"/>
-              </a:ext>
-            </a:extLst>
-          </p:cNvPr>
-          <p:cNvSpPr/>
-          <p:nvPr/>
-        </p:nvSpPr>
-        <p:spPr>
-          <a:xfrm rot="5400000">
-            <a:off x="3772451" y="3727727"/>
-            <a:ext cx="1075424" cy="809728"/>
-          </a:xfrm>
-          <a:prstGeom prst="triangle">
-            <a:avLst/>
-          </a:prstGeom>
-          <a:solidFill>
-            <a:srgbClr val="F7941F"/>
-          </a:solidFill>
-          <a:ln w="57150">
-            <a:solidFill>
-              <a:srgbClr val="FFFFFF"/>
-            </a:solidFill>
-          </a:ln>
-        </p:spPr>
-        <p:style>
-          <a:lnRef idx="2">
-            <a:schemeClr val="accent1">
-              <a:shade val="15000"/>
-            </a:schemeClr>
-          </a:lnRef>
-          <a:fillRef idx="1">
-            <a:schemeClr val="accent1"/>
-          </a:fillRef>
-          <a:effectRef idx="0">
-            <a:schemeClr val="accent1"/>
-          </a:effectRef>
-          <a:fontRef idx="minor">
-            <a:schemeClr val="lt1"/>
-          </a:fontRef>
-        </p:style>
-        <p:txBody>
-          <a:bodyPr rtlCol="0" anchor="ctr"/>
-          <a:lstStyle/>
-          <a:p>
-            <a:pPr algn="ctr"/>
-            <a:endParaRPr lang="en-US" baseline="-25000" dirty="0"/>
           </a:p>
         </p:txBody>
       </p:sp>
@@ -27761,7 +30395,7 @@
         </p:nvSpPr>
         <p:spPr>
           <a:xfrm>
-            <a:off x="-1886839" y="4588834"/>
+            <a:off x="4143863" y="4987408"/>
             <a:ext cx="4034971" cy="4034971"/>
           </a:xfrm>
           <a:prstGeom prst="ellipse">
@@ -27815,7 +30449,7 @@
         </p:nvSpPr>
         <p:spPr>
           <a:xfrm>
-            <a:off x="-466335" y="6009338"/>
+            <a:off x="5564367" y="6407912"/>
             <a:ext cx="1193962" cy="1193962"/>
           </a:xfrm>
           <a:prstGeom prst="ellipse">
@@ -27857,10 +30491,10 @@
       </p:sp>
       <p:sp>
         <p:nvSpPr>
-          <p:cNvPr id="21" name="Rectangle 20">
+          <p:cNvPr id="22" name="Hexagon 21">
             <a:extLst>
               <a:ext uri="{FF2B5EF4-FFF2-40B4-BE49-F238E27FC236}">
-                <a16:creationId xmlns:a16="http://schemas.microsoft.com/office/drawing/2014/main" id="{40FD6B54-A7D3-8FB4-C450-1FA74428A2A2}"/>
+                <a16:creationId xmlns:a16="http://schemas.microsoft.com/office/drawing/2014/main" id="{7697566D-BBD4-E585-272E-C9E18F019BB4}"/>
               </a:ext>
             </a:extLst>
           </p:cNvPr>
@@ -27869,16 +30503,19 @@
         </p:nvSpPr>
         <p:spPr>
           <a:xfrm>
-            <a:off x="8059840" y="2945260"/>
-            <a:ext cx="3117098" cy="2573623"/>
+            <a:off x="973027" y="2713586"/>
+            <a:ext cx="3310678" cy="2854032"/>
           </a:xfrm>
-          <a:prstGeom prst="rect">
-            <a:avLst/>
+          <a:prstGeom prst="hexagon">
+            <a:avLst>
+              <a:gd name="adj" fmla="val 16641"/>
+              <a:gd name="vf" fmla="val 115470"/>
+            </a:avLst>
           </a:prstGeom>
           <a:solidFill>
             <a:srgbClr val="F7941F"/>
           </a:solidFill>
-          <a:ln w="57150">
+          <a:ln>
             <a:solidFill>
               <a:srgbClr val="FFFFFF"/>
             </a:solidFill>
@@ -27911,10 +30548,10 @@
       </p:sp>
       <p:sp>
         <p:nvSpPr>
-          <p:cNvPr id="2" name="TextBox 1">
+          <p:cNvPr id="14" name="TextBox 13">
             <a:extLst>
               <a:ext uri="{FF2B5EF4-FFF2-40B4-BE49-F238E27FC236}">
-                <a16:creationId xmlns:a16="http://schemas.microsoft.com/office/drawing/2014/main" id="{990936B5-34E5-7D6E-79A9-386E2B0C34D8}"/>
+                <a16:creationId xmlns:a16="http://schemas.microsoft.com/office/drawing/2014/main" id="{0442E74B-6D2D-0C0F-E33E-0EEA027A6139}"/>
               </a:ext>
             </a:extLst>
           </p:cNvPr>
@@ -27923,8 +30560,8 @@
         </p:nvSpPr>
         <p:spPr>
           <a:xfrm>
-            <a:off x="8041093" y="3816572"/>
-            <a:ext cx="3314700" cy="830997"/>
+            <a:off x="941883" y="3630025"/>
+            <a:ext cx="3314702" cy="954107"/>
           </a:xfrm>
           <a:prstGeom prst="rect">
             <a:avLst/>
@@ -27939,38 +30576,30 @@
           <a:p>
             <a:pPr algn="ctr"/>
             <a:r>
-              <a:rPr lang="en-US" sz="2400" b="1" dirty="0"/>
-              <a:t>Interface </a:t>
-            </a:r>
-            <a:r>
-              <a:rPr lang="en-US" sz="2400" b="1" dirty="0" err="1"/>
-              <a:t>utilisateur</a:t>
-            </a:r>
-            <a:endParaRPr lang="en-US" sz="2400" b="1" dirty="0"/>
+              <a:rPr lang="en-US" sz="2800" b="1" dirty="0"/>
+              <a:t>Données </a:t>
+            </a:r>
+            <a:r>
+              <a:rPr lang="en-US" sz="2800" b="1" dirty="0" err="1"/>
+              <a:t>simulées</a:t>
+            </a:r>
+            <a:endParaRPr lang="en-US" sz="2800" b="1" dirty="0"/>
           </a:p>
           <a:p>
             <a:pPr algn="ctr"/>
             <a:r>
-              <a:rPr lang="en-US" sz="2400" b="1" dirty="0"/>
-              <a:t>(</a:t>
-            </a:r>
-            <a:r>
-              <a:rPr lang="en-US" sz="2400" b="1" dirty="0" err="1"/>
-              <a:t>Streamlit</a:t>
-            </a:r>
-            <a:r>
-              <a:rPr lang="en-US" sz="2400" b="1" dirty="0"/>
-              <a:t>)</a:t>
+              <a:rPr lang="en-US" sz="2800" b="1" dirty="0"/>
+              <a:t> (courants, tensions)</a:t>
             </a:r>
           </a:p>
         </p:txBody>
       </p:sp>
       <p:sp>
         <p:nvSpPr>
-          <p:cNvPr id="12" name="Isosceles Triangle 11">
+          <p:cNvPr id="23" name="Rectangle: Rounded Corners 22">
             <a:extLst>
               <a:ext uri="{FF2B5EF4-FFF2-40B4-BE49-F238E27FC236}">
-                <a16:creationId xmlns:a16="http://schemas.microsoft.com/office/drawing/2014/main" id="{84DC2567-B956-DAE9-6604-B0958BF0A156}"/>
+                <a16:creationId xmlns:a16="http://schemas.microsoft.com/office/drawing/2014/main" id="{333F6F49-5643-0E01-3144-EB3F24762186}"/>
               </a:ext>
             </a:extLst>
           </p:cNvPr>
@@ -27978,17 +30607,17 @@
           <p:nvPr/>
         </p:nvSpPr>
         <p:spPr>
-          <a:xfrm rot="5400000">
-            <a:off x="7453601" y="3780300"/>
-            <a:ext cx="1075424" cy="809728"/>
+          <a:xfrm>
+            <a:off x="7994533" y="2602687"/>
+            <a:ext cx="3477081" cy="3164954"/>
           </a:xfrm>
-          <a:prstGeom prst="triangle">
+          <a:prstGeom prst="roundRect">
             <a:avLst/>
           </a:prstGeom>
           <a:solidFill>
             <a:srgbClr val="F7941F"/>
           </a:solidFill>
-          <a:ln w="57150">
+          <a:ln>
             <a:solidFill>
               <a:srgbClr val="FFFFFF"/>
             </a:solidFill>
@@ -28015,7 +30644,63 @@
           <a:lstStyle/>
           <a:p>
             <a:pPr algn="ctr"/>
-            <a:endParaRPr lang="en-US" baseline="-25000" dirty="0"/>
+            <a:endParaRPr lang="en-US"/>
+          </a:p>
+        </p:txBody>
+      </p:sp>
+      <p:sp>
+        <p:nvSpPr>
+          <p:cNvPr id="2" name="TextBox 1">
+            <a:extLst>
+              <a:ext uri="{FF2B5EF4-FFF2-40B4-BE49-F238E27FC236}">
+                <a16:creationId xmlns:a16="http://schemas.microsoft.com/office/drawing/2014/main" id="{990936B5-34E5-7D6E-79A9-386E2B0C34D8}"/>
+              </a:ext>
+            </a:extLst>
+          </p:cNvPr>
+          <p:cNvSpPr txBox="1"/>
+          <p:nvPr/>
+        </p:nvSpPr>
+        <p:spPr>
+          <a:xfrm>
+            <a:off x="8075723" y="3791861"/>
+            <a:ext cx="3314700" cy="861774"/>
+          </a:xfrm>
+          <a:prstGeom prst="rect">
+            <a:avLst/>
+          </a:prstGeom>
+          <a:noFill/>
+        </p:spPr>
+        <p:txBody>
+          <a:bodyPr wrap="square" rtlCol="0">
+            <a:spAutoFit/>
+          </a:bodyPr>
+          <a:lstStyle/>
+          <a:p>
+            <a:pPr algn="ctr"/>
+            <a:r>
+              <a:rPr lang="en-US" sz="2500" b="1" dirty="0"/>
+              <a:t>Interface </a:t>
+            </a:r>
+            <a:r>
+              <a:rPr lang="en-US" sz="2500" b="1" dirty="0" err="1"/>
+              <a:t>utilisateur</a:t>
+            </a:r>
+            <a:endParaRPr lang="en-US" sz="2500" b="1" dirty="0"/>
+          </a:p>
+          <a:p>
+            <a:pPr algn="ctr"/>
+            <a:r>
+              <a:rPr lang="en-US" sz="2500" b="1" dirty="0"/>
+              <a:t>(</a:t>
+            </a:r>
+            <a:r>
+              <a:rPr lang="en-US" sz="2500" b="1" dirty="0" err="1"/>
+              <a:t>Streamlit</a:t>
+            </a:r>
+            <a:r>
+              <a:rPr lang="en-US" sz="2500" b="1" dirty="0"/>
+              <a:t>)</a:t>
+            </a:r>
           </a:p>
         </p:txBody>
       </p:sp>
@@ -28067,6 +30752,221 @@
           <a:chExt cx="0" cy="0"/>
         </a:xfrm>
       </p:grpSpPr>
+      <p:sp>
+        <p:nvSpPr>
+          <p:cNvPr id="9" name="Rectangle: Rounded Corners 8">
+            <a:extLst>
+              <a:ext uri="{FF2B5EF4-FFF2-40B4-BE49-F238E27FC236}">
+                <a16:creationId xmlns:a16="http://schemas.microsoft.com/office/drawing/2014/main" id="{4267C5B3-AF80-E97C-AFA1-4C182065647C}"/>
+              </a:ext>
+            </a:extLst>
+          </p:cNvPr>
+          <p:cNvSpPr/>
+          <p:nvPr/>
+        </p:nvSpPr>
+        <p:spPr>
+          <a:xfrm>
+            <a:off x="16627795" y="2602687"/>
+            <a:ext cx="3477081" cy="3164954"/>
+          </a:xfrm>
+          <a:prstGeom prst="roundRect">
+            <a:avLst/>
+          </a:prstGeom>
+          <a:solidFill>
+            <a:srgbClr val="F7941F"/>
+          </a:solidFill>
+          <a:ln>
+            <a:solidFill>
+              <a:srgbClr val="FFFFFF"/>
+            </a:solidFill>
+          </a:ln>
+        </p:spPr>
+        <p:style>
+          <a:lnRef idx="2">
+            <a:schemeClr val="accent1">
+              <a:shade val="15000"/>
+            </a:schemeClr>
+          </a:lnRef>
+          <a:fillRef idx="1">
+            <a:schemeClr val="accent1"/>
+          </a:fillRef>
+          <a:effectRef idx="0">
+            <a:schemeClr val="accent1"/>
+          </a:effectRef>
+          <a:fontRef idx="minor">
+            <a:schemeClr val="lt1"/>
+          </a:fontRef>
+        </p:style>
+        <p:txBody>
+          <a:bodyPr rtlCol="0" anchor="ctr"/>
+          <a:lstStyle/>
+          <a:p>
+            <a:pPr algn="ctr"/>
+            <a:endParaRPr lang="en-US"/>
+          </a:p>
+        </p:txBody>
+      </p:sp>
+      <p:sp>
+        <p:nvSpPr>
+          <p:cNvPr id="11" name="TextBox 10">
+            <a:extLst>
+              <a:ext uri="{FF2B5EF4-FFF2-40B4-BE49-F238E27FC236}">
+                <a16:creationId xmlns:a16="http://schemas.microsoft.com/office/drawing/2014/main" id="{38376120-F87C-4CFC-24BB-186C6C9BB509}"/>
+              </a:ext>
+            </a:extLst>
+          </p:cNvPr>
+          <p:cNvSpPr txBox="1"/>
+          <p:nvPr/>
+        </p:nvSpPr>
+        <p:spPr>
+          <a:xfrm>
+            <a:off x="16708985" y="3791861"/>
+            <a:ext cx="3314700" cy="861774"/>
+          </a:xfrm>
+          <a:prstGeom prst="rect">
+            <a:avLst/>
+          </a:prstGeom>
+          <a:noFill/>
+        </p:spPr>
+        <p:txBody>
+          <a:bodyPr wrap="square" rtlCol="0">
+            <a:spAutoFit/>
+          </a:bodyPr>
+          <a:lstStyle/>
+          <a:p>
+            <a:pPr algn="ctr"/>
+            <a:r>
+              <a:rPr lang="en-US" sz="2500" b="1" dirty="0"/>
+              <a:t>Interface </a:t>
+            </a:r>
+            <a:r>
+              <a:rPr lang="en-US" sz="2500" b="1" dirty="0" err="1"/>
+              <a:t>utilisateur</a:t>
+            </a:r>
+            <a:endParaRPr lang="en-US" sz="2500" b="1" dirty="0"/>
+          </a:p>
+          <a:p>
+            <a:pPr algn="ctr"/>
+            <a:r>
+              <a:rPr lang="en-US" sz="2500" b="1" dirty="0"/>
+              <a:t>(</a:t>
+            </a:r>
+            <a:r>
+              <a:rPr lang="en-US" sz="2500" b="1" dirty="0" err="1"/>
+              <a:t>Streamlit</a:t>
+            </a:r>
+            <a:r>
+              <a:rPr lang="en-US" sz="2500" b="1" dirty="0"/>
+              <a:t>)</a:t>
+            </a:r>
+          </a:p>
+        </p:txBody>
+      </p:sp>
+      <p:sp>
+        <p:nvSpPr>
+          <p:cNvPr id="5" name="Hexagon 4">
+            <a:extLst>
+              <a:ext uri="{FF2B5EF4-FFF2-40B4-BE49-F238E27FC236}">
+                <a16:creationId xmlns:a16="http://schemas.microsoft.com/office/drawing/2014/main" id="{92B33ECD-5BB1-1900-79FA-9BA455943BBB}"/>
+              </a:ext>
+            </a:extLst>
+          </p:cNvPr>
+          <p:cNvSpPr/>
+          <p:nvPr/>
+        </p:nvSpPr>
+        <p:spPr>
+          <a:xfrm>
+            <a:off x="-5580173" y="2713586"/>
+            <a:ext cx="3310678" cy="2854032"/>
+          </a:xfrm>
+          <a:prstGeom prst="hexagon">
+            <a:avLst>
+              <a:gd name="adj" fmla="val 16641"/>
+              <a:gd name="vf" fmla="val 115470"/>
+            </a:avLst>
+          </a:prstGeom>
+          <a:solidFill>
+            <a:srgbClr val="F7941F"/>
+          </a:solidFill>
+          <a:ln>
+            <a:solidFill>
+              <a:srgbClr val="FFFFFF"/>
+            </a:solidFill>
+          </a:ln>
+        </p:spPr>
+        <p:style>
+          <a:lnRef idx="2">
+            <a:schemeClr val="accent1">
+              <a:shade val="15000"/>
+            </a:schemeClr>
+          </a:lnRef>
+          <a:fillRef idx="1">
+            <a:schemeClr val="accent1"/>
+          </a:fillRef>
+          <a:effectRef idx="0">
+            <a:schemeClr val="accent1"/>
+          </a:effectRef>
+          <a:fontRef idx="minor">
+            <a:schemeClr val="lt1"/>
+          </a:fontRef>
+        </p:style>
+        <p:txBody>
+          <a:bodyPr rtlCol="0" anchor="ctr"/>
+          <a:lstStyle/>
+          <a:p>
+            <a:pPr algn="ctr"/>
+            <a:endParaRPr lang="en-US"/>
+          </a:p>
+        </p:txBody>
+      </p:sp>
+      <p:sp>
+        <p:nvSpPr>
+          <p:cNvPr id="7" name="TextBox 6">
+            <a:extLst>
+              <a:ext uri="{FF2B5EF4-FFF2-40B4-BE49-F238E27FC236}">
+                <a16:creationId xmlns:a16="http://schemas.microsoft.com/office/drawing/2014/main" id="{F68A279A-4E5E-7C1F-AC34-5FFD8607BBA3}"/>
+              </a:ext>
+            </a:extLst>
+          </p:cNvPr>
+          <p:cNvSpPr txBox="1"/>
+          <p:nvPr/>
+        </p:nvSpPr>
+        <p:spPr>
+          <a:xfrm>
+            <a:off x="-5611317" y="3630025"/>
+            <a:ext cx="3314702" cy="954107"/>
+          </a:xfrm>
+          <a:prstGeom prst="rect">
+            <a:avLst/>
+          </a:prstGeom>
+          <a:noFill/>
+        </p:spPr>
+        <p:txBody>
+          <a:bodyPr wrap="square" rtlCol="0">
+            <a:spAutoFit/>
+          </a:bodyPr>
+          <a:lstStyle/>
+          <a:p>
+            <a:pPr algn="ctr"/>
+            <a:r>
+              <a:rPr lang="en-US" sz="2800" b="1" dirty="0"/>
+              <a:t>Données </a:t>
+            </a:r>
+            <a:r>
+              <a:rPr lang="en-US" sz="2800" b="1" dirty="0" err="1"/>
+              <a:t>simulées</a:t>
+            </a:r>
+            <a:endParaRPr lang="en-US" sz="2800" b="1" dirty="0"/>
+          </a:p>
+          <a:p>
+            <a:pPr algn="ctr"/>
+            <a:r>
+              <a:rPr lang="en-US" sz="2800" b="1" dirty="0"/>
+              <a:t> (courants, tensions)</a:t>
+            </a:r>
+          </a:p>
+        </p:txBody>
+      </p:sp>
       <p:grpSp>
         <p:nvGrpSpPr>
           <p:cNvPr id="63" name="Group 62">
@@ -32051,7 +34951,7 @@
             <p:nvPr/>
           </p:nvPicPr>
           <p:blipFill>
-            <a:blip r:embed="rId2"/>
+            <a:blip r:embed="rId3"/>
             <a:srcRect l="1" r="66169" b="49364"/>
             <a:stretch/>
           </p:blipFill>
@@ -32080,7 +34980,7 @@
             <p:nvPr/>
           </p:nvPicPr>
           <p:blipFill>
-            <a:blip r:embed="rId2"/>
+            <a:blip r:embed="rId3"/>
             <a:srcRect l="33332" r="32838" b="49364"/>
             <a:stretch/>
           </p:blipFill>
@@ -32109,7 +35009,7 @@
             <p:nvPr/>
           </p:nvPicPr>
           <p:blipFill>
-            <a:blip r:embed="rId2"/>
+            <a:blip r:embed="rId3"/>
             <a:srcRect l="66748" r="-97" b="49364"/>
             <a:stretch/>
           </p:blipFill>
@@ -32138,7 +35038,7 @@
             <p:nvPr/>
           </p:nvPicPr>
           <p:blipFill>
-            <a:blip r:embed="rId2"/>
+            <a:blip r:embed="rId3"/>
             <a:srcRect t="48884" r="66170" b="480"/>
             <a:stretch/>
           </p:blipFill>
@@ -32167,7 +35067,7 @@
             <p:nvPr/>
           </p:nvPicPr>
           <p:blipFill>
-            <a:blip r:embed="rId2"/>
+            <a:blip r:embed="rId3"/>
             <a:srcRect l="33960" t="50000" r="33085" b="-636"/>
             <a:stretch/>
           </p:blipFill>
@@ -32196,7 +35096,7 @@
             <p:nvPr/>
           </p:nvPicPr>
           <p:blipFill>
-            <a:blip r:embed="rId2"/>
+            <a:blip r:embed="rId3"/>
             <a:srcRect l="66639" t="50000" r="-469" b="-636"/>
             <a:stretch/>
           </p:blipFill>
@@ -32226,7 +35126,7 @@
           <p:nvPr/>
         </p:nvPicPr>
         <p:blipFill>
-          <a:blip r:embed="rId3">
+          <a:blip r:embed="rId4">
             <a:extLst>
               <a:ext uri="{28A0092B-C50C-407E-A947-70E740481C1C}">
                 <a14:useLocalDpi xmlns:a14="http://schemas.microsoft.com/office/drawing/2010/main" val="0"/>
@@ -32262,7 +35162,7 @@
           <p:nvPr/>
         </p:nvPicPr>
         <p:blipFill>
-          <a:blip r:embed="rId3">
+          <a:blip r:embed="rId4">
             <a:extLst>
               <a:ext uri="{28A0092B-C50C-407E-A947-70E740481C1C}">
                 <a14:useLocalDpi xmlns:a14="http://schemas.microsoft.com/office/drawing/2010/main" val="0"/>
@@ -33108,4 +36008,319 @@
     </a:ext>
   </a:extLst>
 </a:theme>
+</file>
+
+<file path=ppt/theme/theme2.xml><?xml version="1.0" encoding="utf-8"?>
+<a:theme xmlns:a="http://schemas.openxmlformats.org/drawingml/2006/main" name="Office Theme">
+  <a:themeElements>
+    <a:clrScheme name="Office">
+      <a:dk1>
+        <a:sysClr val="windowText" lastClr="000000"/>
+      </a:dk1>
+      <a:lt1>
+        <a:sysClr val="window" lastClr="FFFFFF"/>
+      </a:lt1>
+      <a:dk2>
+        <a:srgbClr val="0E2841"/>
+      </a:dk2>
+      <a:lt2>
+        <a:srgbClr val="E8E8E8"/>
+      </a:lt2>
+      <a:accent1>
+        <a:srgbClr val="156082"/>
+      </a:accent1>
+      <a:accent2>
+        <a:srgbClr val="E97132"/>
+      </a:accent2>
+      <a:accent3>
+        <a:srgbClr val="196B24"/>
+      </a:accent3>
+      <a:accent4>
+        <a:srgbClr val="0F9ED5"/>
+      </a:accent4>
+      <a:accent5>
+        <a:srgbClr val="A02B93"/>
+      </a:accent5>
+      <a:accent6>
+        <a:srgbClr val="4EA72E"/>
+      </a:accent6>
+      <a:hlink>
+        <a:srgbClr val="467886"/>
+      </a:hlink>
+      <a:folHlink>
+        <a:srgbClr val="96607D"/>
+      </a:folHlink>
+    </a:clrScheme>
+    <a:fontScheme name="Office">
+      <a:majorFont>
+        <a:latin typeface="Aptos Display" panose="02110004020202020204"/>
+        <a:ea typeface=""/>
+        <a:cs typeface=""/>
+        <a:font script="Jpan" typeface="游ゴシック Light"/>
+        <a:font script="Hang" typeface="맑은 고딕"/>
+        <a:font script="Hans" typeface="等线 Light"/>
+        <a:font script="Hant" typeface="新細明體"/>
+        <a:font script="Arab" typeface="Times New Roman"/>
+        <a:font script="Hebr" typeface="Times New Roman"/>
+        <a:font script="Thai" typeface="Angsana New"/>
+        <a:font script="Ethi" typeface="Nyala"/>
+        <a:font script="Beng" typeface="Vrinda"/>
+        <a:font script="Gujr" typeface="Shruti"/>
+        <a:font script="Khmr" typeface="MoolBoran"/>
+        <a:font script="Knda" typeface="Tunga"/>
+        <a:font script="Guru" typeface="Raavi"/>
+        <a:font script="Cans" typeface="Euphemia"/>
+        <a:font script="Cher" typeface="Plantagenet Cherokee"/>
+        <a:font script="Yiii" typeface="Microsoft Yi Baiti"/>
+        <a:font script="Tibt" typeface="Microsoft Himalaya"/>
+        <a:font script="Thaa" typeface="MV Boli"/>
+        <a:font script="Deva" typeface="Mangal"/>
+        <a:font script="Telu" typeface="Gautami"/>
+        <a:font script="Taml" typeface="Latha"/>
+        <a:font script="Syrc" typeface="Estrangelo Edessa"/>
+        <a:font script="Orya" typeface="Kalinga"/>
+        <a:font script="Mlym" typeface="Kartika"/>
+        <a:font script="Laoo" typeface="DokChampa"/>
+        <a:font script="Sinh" typeface="Iskoola Pota"/>
+        <a:font script="Mong" typeface="Mongolian Baiti"/>
+        <a:font script="Viet" typeface="Times New Roman"/>
+        <a:font script="Uigh" typeface="Microsoft Uighur"/>
+        <a:font script="Geor" typeface="Sylfaen"/>
+        <a:font script="Armn" typeface="Arial"/>
+        <a:font script="Bugi" typeface="Leelawadee UI"/>
+        <a:font script="Bopo" typeface="Microsoft JhengHei"/>
+        <a:font script="Java" typeface="Javanese Text"/>
+        <a:font script="Lisu" typeface="Segoe UI"/>
+        <a:font script="Mymr" typeface="Myanmar Text"/>
+        <a:font script="Nkoo" typeface="Ebrima"/>
+        <a:font script="Olck" typeface="Nirmala UI"/>
+        <a:font script="Osma" typeface="Ebrima"/>
+        <a:font script="Phag" typeface="Phagspa"/>
+        <a:font script="Syrn" typeface="Estrangelo Edessa"/>
+        <a:font script="Syrj" typeface="Estrangelo Edessa"/>
+        <a:font script="Syre" typeface="Estrangelo Edessa"/>
+        <a:font script="Sora" typeface="Nirmala UI"/>
+        <a:font script="Tale" typeface="Microsoft Tai Le"/>
+        <a:font script="Talu" typeface="Microsoft New Tai Lue"/>
+        <a:font script="Tfng" typeface="Ebrima"/>
+      </a:majorFont>
+      <a:minorFont>
+        <a:latin typeface="Aptos" panose="02110004020202020204"/>
+        <a:ea typeface=""/>
+        <a:cs typeface=""/>
+        <a:font script="Jpan" typeface="游ゴシック"/>
+        <a:font script="Hang" typeface="맑은 고딕"/>
+        <a:font script="Hans" typeface="等线"/>
+        <a:font script="Hant" typeface="新細明體"/>
+        <a:font script="Arab" typeface="Arial"/>
+        <a:font script="Hebr" typeface="Arial"/>
+        <a:font script="Thai" typeface="Cordia New"/>
+        <a:font script="Ethi" typeface="Nyala"/>
+        <a:font script="Beng" typeface="Vrinda"/>
+        <a:font script="Gujr" typeface="Shruti"/>
+        <a:font script="Khmr" typeface="DaunPenh"/>
+        <a:font script="Knda" typeface="Tunga"/>
+        <a:font script="Guru" typeface="Raavi"/>
+        <a:font script="Cans" typeface="Euphemia"/>
+        <a:font script="Cher" typeface="Plantagenet Cherokee"/>
+        <a:font script="Yiii" typeface="Microsoft Yi Baiti"/>
+        <a:font script="Tibt" typeface="Microsoft Himalaya"/>
+        <a:font script="Thaa" typeface="MV Boli"/>
+        <a:font script="Deva" typeface="Mangal"/>
+        <a:font script="Telu" typeface="Gautami"/>
+        <a:font script="Taml" typeface="Latha"/>
+        <a:font script="Syrc" typeface="Estrangelo Edessa"/>
+        <a:font script="Orya" typeface="Kalinga"/>
+        <a:font script="Mlym" typeface="Kartika"/>
+        <a:font script="Laoo" typeface="DokChampa"/>
+        <a:font script="Sinh" typeface="Iskoola Pota"/>
+        <a:font script="Mong" typeface="Mongolian Baiti"/>
+        <a:font script="Viet" typeface="Arial"/>
+        <a:font script="Uigh" typeface="Microsoft Uighur"/>
+        <a:font script="Geor" typeface="Sylfaen"/>
+        <a:font script="Armn" typeface="Arial"/>
+        <a:font script="Bugi" typeface="Leelawadee UI"/>
+        <a:font script="Bopo" typeface="Microsoft JhengHei"/>
+        <a:font script="Java" typeface="Javanese Text"/>
+        <a:font script="Lisu" typeface="Segoe UI"/>
+        <a:font script="Mymr" typeface="Myanmar Text"/>
+        <a:font script="Nkoo" typeface="Ebrima"/>
+        <a:font script="Olck" typeface="Nirmala UI"/>
+        <a:font script="Osma" typeface="Ebrima"/>
+        <a:font script="Phag" typeface="Phagspa"/>
+        <a:font script="Syrn" typeface="Estrangelo Edessa"/>
+        <a:font script="Syrj" typeface="Estrangelo Edessa"/>
+        <a:font script="Syre" typeface="Estrangelo Edessa"/>
+        <a:font script="Sora" typeface="Nirmala UI"/>
+        <a:font script="Tale" typeface="Microsoft Tai Le"/>
+        <a:font script="Talu" typeface="Microsoft New Tai Lue"/>
+        <a:font script="Tfng" typeface="Ebrima"/>
+      </a:minorFont>
+    </a:fontScheme>
+    <a:fmtScheme name="Office">
+      <a:fillStyleLst>
+        <a:solidFill>
+          <a:schemeClr val="phClr"/>
+        </a:solidFill>
+        <a:gradFill rotWithShape="1">
+          <a:gsLst>
+            <a:gs pos="0">
+              <a:schemeClr val="phClr">
+                <a:lumMod val="110000"/>
+                <a:satMod val="105000"/>
+                <a:tint val="67000"/>
+              </a:schemeClr>
+            </a:gs>
+            <a:gs pos="50000">
+              <a:schemeClr val="phClr">
+                <a:lumMod val="105000"/>
+                <a:satMod val="103000"/>
+                <a:tint val="73000"/>
+              </a:schemeClr>
+            </a:gs>
+            <a:gs pos="100000">
+              <a:schemeClr val="phClr">
+                <a:lumMod val="105000"/>
+                <a:satMod val="109000"/>
+                <a:tint val="81000"/>
+              </a:schemeClr>
+            </a:gs>
+          </a:gsLst>
+          <a:lin ang="5400000" scaled="0"/>
+        </a:gradFill>
+        <a:gradFill rotWithShape="1">
+          <a:gsLst>
+            <a:gs pos="0">
+              <a:schemeClr val="phClr">
+                <a:satMod val="103000"/>
+                <a:lumMod val="102000"/>
+                <a:tint val="94000"/>
+              </a:schemeClr>
+            </a:gs>
+            <a:gs pos="50000">
+              <a:schemeClr val="phClr">
+                <a:satMod val="110000"/>
+                <a:lumMod val="100000"/>
+                <a:shade val="100000"/>
+              </a:schemeClr>
+            </a:gs>
+            <a:gs pos="100000">
+              <a:schemeClr val="phClr">
+                <a:lumMod val="99000"/>
+                <a:satMod val="120000"/>
+                <a:shade val="78000"/>
+              </a:schemeClr>
+            </a:gs>
+          </a:gsLst>
+          <a:lin ang="5400000" scaled="0"/>
+        </a:gradFill>
+      </a:fillStyleLst>
+      <a:lnStyleLst>
+        <a:ln w="12700" cap="flat" cmpd="sng" algn="ctr">
+          <a:solidFill>
+            <a:schemeClr val="phClr"/>
+          </a:solidFill>
+          <a:prstDash val="solid"/>
+          <a:miter lim="800000"/>
+        </a:ln>
+        <a:ln w="19050" cap="flat" cmpd="sng" algn="ctr">
+          <a:solidFill>
+            <a:schemeClr val="phClr"/>
+          </a:solidFill>
+          <a:prstDash val="solid"/>
+          <a:miter lim="800000"/>
+        </a:ln>
+        <a:ln w="25400" cap="flat" cmpd="sng" algn="ctr">
+          <a:solidFill>
+            <a:schemeClr val="phClr"/>
+          </a:solidFill>
+          <a:prstDash val="solid"/>
+          <a:miter lim="800000"/>
+        </a:ln>
+      </a:lnStyleLst>
+      <a:effectStyleLst>
+        <a:effectStyle>
+          <a:effectLst/>
+        </a:effectStyle>
+        <a:effectStyle>
+          <a:effectLst/>
+        </a:effectStyle>
+        <a:effectStyle>
+          <a:effectLst>
+            <a:outerShdw blurRad="57150" dist="19050" dir="5400000" algn="ctr" rotWithShape="0">
+              <a:srgbClr val="000000">
+                <a:alpha val="63000"/>
+              </a:srgbClr>
+            </a:outerShdw>
+          </a:effectLst>
+        </a:effectStyle>
+      </a:effectStyleLst>
+      <a:bgFillStyleLst>
+        <a:solidFill>
+          <a:schemeClr val="phClr"/>
+        </a:solidFill>
+        <a:solidFill>
+          <a:schemeClr val="phClr">
+            <a:tint val="95000"/>
+            <a:satMod val="170000"/>
+          </a:schemeClr>
+        </a:solidFill>
+        <a:gradFill rotWithShape="1">
+          <a:gsLst>
+            <a:gs pos="0">
+              <a:schemeClr val="phClr">
+                <a:tint val="93000"/>
+                <a:satMod val="150000"/>
+                <a:shade val="98000"/>
+                <a:lumMod val="102000"/>
+              </a:schemeClr>
+            </a:gs>
+            <a:gs pos="50000">
+              <a:schemeClr val="phClr">
+                <a:tint val="98000"/>
+                <a:satMod val="130000"/>
+                <a:shade val="90000"/>
+                <a:lumMod val="103000"/>
+              </a:schemeClr>
+            </a:gs>
+            <a:gs pos="100000">
+              <a:schemeClr val="phClr">
+                <a:shade val="63000"/>
+                <a:satMod val="120000"/>
+              </a:schemeClr>
+            </a:gs>
+          </a:gsLst>
+          <a:lin ang="5400000" scaled="0"/>
+        </a:gradFill>
+      </a:bgFillStyleLst>
+    </a:fmtScheme>
+  </a:themeElements>
+  <a:objectDefaults>
+    <a:lnDef>
+      <a:spPr/>
+      <a:bodyPr/>
+      <a:lstStyle/>
+      <a:style>
+        <a:lnRef idx="2">
+          <a:schemeClr val="accent1"/>
+        </a:lnRef>
+        <a:fillRef idx="0">
+          <a:schemeClr val="accent1"/>
+        </a:fillRef>
+        <a:effectRef idx="1">
+          <a:schemeClr val="accent1"/>
+        </a:effectRef>
+        <a:fontRef idx="minor">
+          <a:schemeClr val="tx1"/>
+        </a:fontRef>
+      </a:style>
+    </a:lnDef>
+  </a:objectDefaults>
+  <a:extraClrSchemeLst/>
+  <a:extLst>
+    <a:ext uri="{05A4C25C-085E-4340-85A3-A5531E510DB2}">
+      <thm15:themeFamily xmlns:thm15="http://schemas.microsoft.com/office/thememl/2012/main" name="Office Theme" id="{2E142A2C-CD16-42D6-873A-C26D2A0506FA}" vid="{1BDDFF52-6CD6-40A5-AB3C-68EB2F1E4D0A}"/>
+    </a:ext>
+  </a:extLst>
+</a:theme>
 </file>